--- a/examples/boundary-widths.pptx
+++ b/examples/boundary-widths.pptx
@@ -50,6 +50,60 @@
     <p:sldId id="298" r:id="rId49"/>
     <p:sldId id="299" r:id="rId50"/>
     <p:sldId id="300" r:id="rId51"/>
+    <p:sldId id="301" r:id="rId52"/>
+    <p:sldId id="302" r:id="rId53"/>
+    <p:sldId id="303" r:id="rId54"/>
+    <p:sldId id="304" r:id="rId55"/>
+    <p:sldId id="305" r:id="rId56"/>
+    <p:sldId id="306" r:id="rId57"/>
+    <p:sldId id="307" r:id="rId58"/>
+    <p:sldId id="308" r:id="rId59"/>
+    <p:sldId id="309" r:id="rId60"/>
+    <p:sldId id="310" r:id="rId61"/>
+    <p:sldId id="311" r:id="rId62"/>
+    <p:sldId id="312" r:id="rId63"/>
+    <p:sldId id="313" r:id="rId64"/>
+    <p:sldId id="314" r:id="rId65"/>
+    <p:sldId id="315" r:id="rId66"/>
+    <p:sldId id="316" r:id="rId67"/>
+    <p:sldId id="317" r:id="rId68"/>
+    <p:sldId id="318" r:id="rId69"/>
+    <p:sldId id="319" r:id="rId70"/>
+    <p:sldId id="320" r:id="rId71"/>
+    <p:sldId id="321" r:id="rId72"/>
+    <p:sldId id="322" r:id="rId73"/>
+    <p:sldId id="323" r:id="rId74"/>
+    <p:sldId id="324" r:id="rId75"/>
+    <p:sldId id="325" r:id="rId76"/>
+    <p:sldId id="326" r:id="rId77"/>
+    <p:sldId id="327" r:id="rId78"/>
+    <p:sldId id="328" r:id="rId79"/>
+    <p:sldId id="329" r:id="rId80"/>
+    <p:sldId id="330" r:id="rId81"/>
+    <p:sldId id="331" r:id="rId82"/>
+    <p:sldId id="332" r:id="rId83"/>
+    <p:sldId id="333" r:id="rId84"/>
+    <p:sldId id="334" r:id="rId85"/>
+    <p:sldId id="335" r:id="rId86"/>
+    <p:sldId id="336" r:id="rId87"/>
+    <p:sldId id="337" r:id="rId88"/>
+    <p:sldId id="338" r:id="rId89"/>
+    <p:sldId id="339" r:id="rId90"/>
+    <p:sldId id="340" r:id="rId91"/>
+    <p:sldId id="341" r:id="rId92"/>
+    <p:sldId id="342" r:id="rId93"/>
+    <p:sldId id="343" r:id="rId94"/>
+    <p:sldId id="344" r:id="rId95"/>
+    <p:sldId id="345" r:id="rId96"/>
+    <p:sldId id="346" r:id="rId97"/>
+    <p:sldId id="347" r:id="rId98"/>
+    <p:sldId id="348" r:id="rId99"/>
+    <p:sldId id="349" r:id="rId100"/>
+    <p:sldId id="350" r:id="rId101"/>
+    <p:sldId id="351" r:id="rId102"/>
+    <p:sldId id="352" r:id="rId103"/>
+    <p:sldId id="353" r:id="rId104"/>
+    <p:sldId id="354" r:id="rId105"/>
   </p:sldIdLst>
   <p:sldSz cx="3657600" cy="1828800" type="screen4x3"/>
   <p:notesSz cx="6858000" cy="9144000"/>
@@ -3651,6 +3705,2046 @@
         <p:spPr>
           <a:xfrm>
             <a:off x="304800" y="190500"/>
+            <a:ext cx="1522730" cy="1397000"/>
+          </a:xfrm>
+          <a:prstGeom prst="rect">
+            <a:avLst/>
+          </a:prstGeom>
+          <a:noFill/>
+        </p:spPr>
+        <p:txBody>
+          <a:bodyPr wrap="square" lIns="0" rIns="0" tIns="0" bIns="0">
+            <a:noAutofit/>
+          </a:bodyPr>
+          <a:lstStyle/>
+          <a:p>
+            <a:pPr hangingPunct="0"/>
+            <a:r>
+              <a:rPr sz="2000" lang="ja-JP">
+                <a:latin typeface="Hiragino Sans"/>
+                <a:ea typeface="Hiragino Sans"/>
+              </a:rPr>
+              <a:t>あいうえおか</a:t>
+            </a:r>
+          </a:p>
+        </p:txBody>
+      </p:sp>
+    </p:spTree>
+  </p:cSld>
+  <p:clrMapOvr>
+    <a:masterClrMapping/>
+  </p:clrMapOvr>
+</p:sld>
+</file>
+
+<file path=ppt/slides/slide2.xml><?xml version="1.0" encoding="utf-8"?>
+<p:sld xmlns:a="http://schemas.openxmlformats.org/drawingml/2006/main" xmlns:p="http://schemas.openxmlformats.org/presentationml/2006/main" xmlns:r="http://schemas.openxmlformats.org/officeDocument/2006/relationships">
+  <p:cSld>
+    <p:spTree>
+      <p:nvGrpSpPr>
+        <p:cNvPr id="1" name=""/>
+        <p:cNvGrpSpPr/>
+        <p:nvPr/>
+      </p:nvGrpSpPr>
+      <p:grpSpPr/>
+      <p:sp>
+        <p:nvSpPr>
+          <p:cNvPr id="2" name="TextBox 1"/>
+          <p:cNvSpPr txBox="1"/>
+          <p:nvPr/>
+        </p:nvSpPr>
+        <p:spPr>
+          <a:xfrm>
+            <a:off x="304800" y="190500"/>
+            <a:ext cx="1370965" cy="1397000"/>
+          </a:xfrm>
+          <a:prstGeom prst="rect">
+            <a:avLst/>
+          </a:prstGeom>
+          <a:noFill/>
+        </p:spPr>
+        <p:txBody>
+          <a:bodyPr wrap="square" lIns="0" rIns="0" tIns="0" bIns="0">
+            <a:noAutofit/>
+          </a:bodyPr>
+          <a:lstStyle/>
+          <a:p>
+            <a:pPr hangingPunct="0"/>
+            <a:r>
+              <a:rPr sz="1800" lang="ja-JP">
+                <a:latin typeface="Hiragino Sans"/>
+                <a:ea typeface="Hiragino Sans"/>
+              </a:rPr>
+              <a:t>あいうえおか</a:t>
+            </a:r>
+          </a:p>
+        </p:txBody>
+      </p:sp>
+    </p:spTree>
+  </p:cSld>
+  <p:clrMapOvr>
+    <a:masterClrMapping/>
+  </p:clrMapOvr>
+</p:sld>
+</file>
+
+<file path=ppt/slides/slide20.xml><?xml version="1.0" encoding="utf-8"?>
+<p:sld xmlns:a="http://schemas.openxmlformats.org/drawingml/2006/main" xmlns:p="http://schemas.openxmlformats.org/presentationml/2006/main" xmlns:r="http://schemas.openxmlformats.org/officeDocument/2006/relationships">
+  <p:cSld>
+    <p:spTree>
+      <p:nvGrpSpPr>
+        <p:cNvPr id="1" name=""/>
+        <p:cNvGrpSpPr/>
+        <p:nvPr/>
+      </p:nvGrpSpPr>
+      <p:grpSpPr/>
+      <p:sp>
+        <p:nvSpPr>
+          <p:cNvPr id="2" name="TextBox 1"/>
+          <p:cNvSpPr txBox="1"/>
+          <p:nvPr/>
+        </p:nvSpPr>
+        <p:spPr>
+          <a:xfrm>
+            <a:off x="304800" y="190500"/>
+            <a:ext cx="1523365" cy="1397000"/>
+          </a:xfrm>
+          <a:prstGeom prst="rect">
+            <a:avLst/>
+          </a:prstGeom>
+          <a:noFill/>
+        </p:spPr>
+        <p:txBody>
+          <a:bodyPr wrap="square" lIns="0" rIns="0" tIns="0" bIns="0">
+            <a:noAutofit/>
+          </a:bodyPr>
+          <a:lstStyle/>
+          <a:p>
+            <a:pPr hangingPunct="0"/>
+            <a:r>
+              <a:rPr sz="2000" lang="ja-JP">
+                <a:latin typeface="Hiragino Sans"/>
+                <a:ea typeface="Hiragino Sans"/>
+              </a:rPr>
+              <a:t>あいうえおか</a:t>
+            </a:r>
+          </a:p>
+        </p:txBody>
+      </p:sp>
+    </p:spTree>
+  </p:cSld>
+  <p:clrMapOvr>
+    <a:masterClrMapping/>
+  </p:clrMapOvr>
+</p:sld>
+</file>
+
+<file path=ppt/slides/slide21.xml><?xml version="1.0" encoding="utf-8"?>
+<p:sld xmlns:a="http://schemas.openxmlformats.org/drawingml/2006/main" xmlns:p="http://schemas.openxmlformats.org/presentationml/2006/main" xmlns:r="http://schemas.openxmlformats.org/officeDocument/2006/relationships">
+  <p:cSld>
+    <p:spTree>
+      <p:nvGrpSpPr>
+        <p:cNvPr id="1" name=""/>
+        <p:cNvGrpSpPr/>
+        <p:nvPr/>
+      </p:nvGrpSpPr>
+      <p:grpSpPr/>
+      <p:sp>
+        <p:nvSpPr>
+          <p:cNvPr id="2" name="TextBox 1"/>
+          <p:cNvSpPr txBox="1"/>
+          <p:nvPr/>
+        </p:nvSpPr>
+        <p:spPr>
+          <a:xfrm>
+            <a:off x="304800" y="190500"/>
+            <a:ext cx="1523746" cy="1397000"/>
+          </a:xfrm>
+          <a:prstGeom prst="rect">
+            <a:avLst/>
+          </a:prstGeom>
+          <a:noFill/>
+        </p:spPr>
+        <p:txBody>
+          <a:bodyPr wrap="square" lIns="0" rIns="0" tIns="0" bIns="0">
+            <a:noAutofit/>
+          </a:bodyPr>
+          <a:lstStyle/>
+          <a:p>
+            <a:pPr hangingPunct="0"/>
+            <a:r>
+              <a:rPr sz="2000" lang="ja-JP">
+                <a:latin typeface="Hiragino Sans"/>
+                <a:ea typeface="Hiragino Sans"/>
+              </a:rPr>
+              <a:t>あいうえおか</a:t>
+            </a:r>
+          </a:p>
+        </p:txBody>
+      </p:sp>
+    </p:spTree>
+  </p:cSld>
+  <p:clrMapOvr>
+    <a:masterClrMapping/>
+  </p:clrMapOvr>
+</p:sld>
+</file>
+
+<file path=ppt/slides/slide22.xml><?xml version="1.0" encoding="utf-8"?>
+<p:sld xmlns:a="http://schemas.openxmlformats.org/drawingml/2006/main" xmlns:p="http://schemas.openxmlformats.org/presentationml/2006/main" xmlns:r="http://schemas.openxmlformats.org/officeDocument/2006/relationships">
+  <p:cSld>
+    <p:spTree>
+      <p:nvGrpSpPr>
+        <p:cNvPr id="1" name=""/>
+        <p:cNvGrpSpPr/>
+        <p:nvPr/>
+      </p:nvGrpSpPr>
+      <p:grpSpPr/>
+      <p:sp>
+        <p:nvSpPr>
+          <p:cNvPr id="2" name="TextBox 1"/>
+          <p:cNvSpPr txBox="1"/>
+          <p:nvPr/>
+        </p:nvSpPr>
+        <p:spPr>
+          <a:xfrm>
+            <a:off x="304800" y="190500"/>
+            <a:ext cx="1523873" cy="1397000"/>
+          </a:xfrm>
+          <a:prstGeom prst="rect">
+            <a:avLst/>
+          </a:prstGeom>
+          <a:noFill/>
+        </p:spPr>
+        <p:txBody>
+          <a:bodyPr wrap="square" lIns="0" rIns="0" tIns="0" bIns="0">
+            <a:noAutofit/>
+          </a:bodyPr>
+          <a:lstStyle/>
+          <a:p>
+            <a:pPr hangingPunct="0"/>
+            <a:r>
+              <a:rPr sz="2000" lang="ja-JP">
+                <a:latin typeface="Hiragino Sans"/>
+                <a:ea typeface="Hiragino Sans"/>
+              </a:rPr>
+              <a:t>あいうえおか</a:t>
+            </a:r>
+          </a:p>
+        </p:txBody>
+      </p:sp>
+    </p:spTree>
+  </p:cSld>
+  <p:clrMapOvr>
+    <a:masterClrMapping/>
+  </p:clrMapOvr>
+</p:sld>
+</file>
+
+<file path=ppt/slides/slide23.xml><?xml version="1.0" encoding="utf-8"?>
+<p:sld xmlns:a="http://schemas.openxmlformats.org/drawingml/2006/main" xmlns:p="http://schemas.openxmlformats.org/presentationml/2006/main" xmlns:r="http://schemas.openxmlformats.org/officeDocument/2006/relationships">
+  <p:cSld>
+    <p:spTree>
+      <p:nvGrpSpPr>
+        <p:cNvPr id="1" name=""/>
+        <p:cNvGrpSpPr/>
+        <p:nvPr/>
+      </p:nvGrpSpPr>
+      <p:grpSpPr/>
+      <p:sp>
+        <p:nvSpPr>
+          <p:cNvPr id="2" name="TextBox 1"/>
+          <p:cNvSpPr txBox="1"/>
+          <p:nvPr/>
+        </p:nvSpPr>
+        <p:spPr>
+          <a:xfrm>
+            <a:off x="304800" y="190500"/>
+            <a:ext cx="1524000" cy="1397000"/>
+          </a:xfrm>
+          <a:prstGeom prst="rect">
+            <a:avLst/>
+          </a:prstGeom>
+          <a:noFill/>
+        </p:spPr>
+        <p:txBody>
+          <a:bodyPr wrap="square" lIns="0" rIns="0" tIns="0" bIns="0">
+            <a:noAutofit/>
+          </a:bodyPr>
+          <a:lstStyle/>
+          <a:p>
+            <a:pPr hangingPunct="0"/>
+            <a:r>
+              <a:rPr sz="2000" lang="ja-JP">
+                <a:latin typeface="Hiragino Sans"/>
+                <a:ea typeface="Hiragino Sans"/>
+              </a:rPr>
+              <a:t>あいうえおか</a:t>
+            </a:r>
+          </a:p>
+        </p:txBody>
+      </p:sp>
+    </p:spTree>
+  </p:cSld>
+  <p:clrMapOvr>
+    <a:masterClrMapping/>
+  </p:clrMapOvr>
+</p:sld>
+</file>
+
+<file path=ppt/slides/slide24.xml><?xml version="1.0" encoding="utf-8"?>
+<p:sld xmlns:a="http://schemas.openxmlformats.org/drawingml/2006/main" xmlns:p="http://schemas.openxmlformats.org/presentationml/2006/main" xmlns:r="http://schemas.openxmlformats.org/officeDocument/2006/relationships">
+  <p:cSld>
+    <p:spTree>
+      <p:nvGrpSpPr>
+        <p:cNvPr id="1" name=""/>
+        <p:cNvGrpSpPr/>
+        <p:nvPr/>
+      </p:nvGrpSpPr>
+      <p:grpSpPr/>
+      <p:sp>
+        <p:nvSpPr>
+          <p:cNvPr id="2" name="TextBox 1"/>
+          <p:cNvSpPr txBox="1"/>
+          <p:nvPr/>
+        </p:nvSpPr>
+        <p:spPr>
+          <a:xfrm>
+            <a:off x="304800" y="190500"/>
+            <a:ext cx="1524127" cy="1397000"/>
+          </a:xfrm>
+          <a:prstGeom prst="rect">
+            <a:avLst/>
+          </a:prstGeom>
+          <a:noFill/>
+        </p:spPr>
+        <p:txBody>
+          <a:bodyPr wrap="square" lIns="0" rIns="0" tIns="0" bIns="0">
+            <a:noAutofit/>
+          </a:bodyPr>
+          <a:lstStyle/>
+          <a:p>
+            <a:pPr hangingPunct="0"/>
+            <a:r>
+              <a:rPr sz="2000" lang="ja-JP">
+                <a:latin typeface="Hiragino Sans"/>
+                <a:ea typeface="Hiragino Sans"/>
+              </a:rPr>
+              <a:t>あいうえおか</a:t>
+            </a:r>
+          </a:p>
+        </p:txBody>
+      </p:sp>
+    </p:spTree>
+  </p:cSld>
+  <p:clrMapOvr>
+    <a:masterClrMapping/>
+  </p:clrMapOvr>
+</p:sld>
+</file>
+
+<file path=ppt/slides/slide25.xml><?xml version="1.0" encoding="utf-8"?>
+<p:sld xmlns:a="http://schemas.openxmlformats.org/drawingml/2006/main" xmlns:p="http://schemas.openxmlformats.org/presentationml/2006/main" xmlns:r="http://schemas.openxmlformats.org/officeDocument/2006/relationships">
+  <p:cSld>
+    <p:spTree>
+      <p:nvGrpSpPr>
+        <p:cNvPr id="1" name=""/>
+        <p:cNvGrpSpPr/>
+        <p:nvPr/>
+      </p:nvGrpSpPr>
+      <p:grpSpPr/>
+      <p:sp>
+        <p:nvSpPr>
+          <p:cNvPr id="2" name="TextBox 1"/>
+          <p:cNvSpPr txBox="1"/>
+          <p:nvPr/>
+        </p:nvSpPr>
+        <p:spPr>
+          <a:xfrm>
+            <a:off x="304800" y="190500"/>
+            <a:ext cx="1524254" cy="1397000"/>
+          </a:xfrm>
+          <a:prstGeom prst="rect">
+            <a:avLst/>
+          </a:prstGeom>
+          <a:noFill/>
+        </p:spPr>
+        <p:txBody>
+          <a:bodyPr wrap="square" lIns="0" rIns="0" tIns="0" bIns="0">
+            <a:noAutofit/>
+          </a:bodyPr>
+          <a:lstStyle/>
+          <a:p>
+            <a:pPr hangingPunct="0"/>
+            <a:r>
+              <a:rPr sz="2000" lang="ja-JP">
+                <a:latin typeface="Hiragino Sans"/>
+                <a:ea typeface="Hiragino Sans"/>
+              </a:rPr>
+              <a:t>あいうえおか</a:t>
+            </a:r>
+          </a:p>
+        </p:txBody>
+      </p:sp>
+    </p:spTree>
+  </p:cSld>
+  <p:clrMapOvr>
+    <a:masterClrMapping/>
+  </p:clrMapOvr>
+</p:sld>
+</file>
+
+<file path=ppt/slides/slide26.xml><?xml version="1.0" encoding="utf-8"?>
+<p:sld xmlns:a="http://schemas.openxmlformats.org/drawingml/2006/main" xmlns:p="http://schemas.openxmlformats.org/presentationml/2006/main" xmlns:r="http://schemas.openxmlformats.org/officeDocument/2006/relationships">
+  <p:cSld>
+    <p:spTree>
+      <p:nvGrpSpPr>
+        <p:cNvPr id="1" name=""/>
+        <p:cNvGrpSpPr/>
+        <p:nvPr/>
+      </p:nvGrpSpPr>
+      <p:grpSpPr/>
+      <p:sp>
+        <p:nvSpPr>
+          <p:cNvPr id="2" name="TextBox 1"/>
+          <p:cNvSpPr txBox="1"/>
+          <p:nvPr/>
+        </p:nvSpPr>
+        <p:spPr>
+          <a:xfrm>
+            <a:off x="304800" y="190500"/>
+            <a:ext cx="1524635" cy="1397000"/>
+          </a:xfrm>
+          <a:prstGeom prst="rect">
+            <a:avLst/>
+          </a:prstGeom>
+          <a:noFill/>
+        </p:spPr>
+        <p:txBody>
+          <a:bodyPr wrap="square" lIns="0" rIns="0" tIns="0" bIns="0">
+            <a:noAutofit/>
+          </a:bodyPr>
+          <a:lstStyle/>
+          <a:p>
+            <a:pPr hangingPunct="0"/>
+            <a:r>
+              <a:rPr sz="2000" lang="ja-JP">
+                <a:latin typeface="Hiragino Sans"/>
+                <a:ea typeface="Hiragino Sans"/>
+              </a:rPr>
+              <a:t>あいうえおか</a:t>
+            </a:r>
+          </a:p>
+        </p:txBody>
+      </p:sp>
+    </p:spTree>
+  </p:cSld>
+  <p:clrMapOvr>
+    <a:masterClrMapping/>
+  </p:clrMapOvr>
+</p:sld>
+</file>
+
+<file path=ppt/slides/slide27.xml><?xml version="1.0" encoding="utf-8"?>
+<p:sld xmlns:a="http://schemas.openxmlformats.org/drawingml/2006/main" xmlns:p="http://schemas.openxmlformats.org/presentationml/2006/main" xmlns:r="http://schemas.openxmlformats.org/officeDocument/2006/relationships">
+  <p:cSld>
+    <p:spTree>
+      <p:nvGrpSpPr>
+        <p:cNvPr id="1" name=""/>
+        <p:cNvGrpSpPr/>
+        <p:nvPr/>
+      </p:nvGrpSpPr>
+      <p:grpSpPr/>
+      <p:sp>
+        <p:nvSpPr>
+          <p:cNvPr id="2" name="TextBox 1"/>
+          <p:cNvSpPr txBox="1"/>
+          <p:nvPr/>
+        </p:nvSpPr>
+        <p:spPr>
+          <a:xfrm>
+            <a:off x="304800" y="190500"/>
+            <a:ext cx="1525270" cy="1397000"/>
+          </a:xfrm>
+          <a:prstGeom prst="rect">
+            <a:avLst/>
+          </a:prstGeom>
+          <a:noFill/>
+        </p:spPr>
+        <p:txBody>
+          <a:bodyPr wrap="square" lIns="0" rIns="0" tIns="0" bIns="0">
+            <a:noAutofit/>
+          </a:bodyPr>
+          <a:lstStyle/>
+          <a:p>
+            <a:pPr hangingPunct="0"/>
+            <a:r>
+              <a:rPr sz="2000" lang="ja-JP">
+                <a:latin typeface="Hiragino Sans"/>
+                <a:ea typeface="Hiragino Sans"/>
+              </a:rPr>
+              <a:t>あいうえおか</a:t>
+            </a:r>
+          </a:p>
+        </p:txBody>
+      </p:sp>
+    </p:spTree>
+  </p:cSld>
+  <p:clrMapOvr>
+    <a:masterClrMapping/>
+  </p:clrMapOvr>
+</p:sld>
+</file>
+
+<file path=ppt/slides/slide28.xml><?xml version="1.0" encoding="utf-8"?>
+<p:sld xmlns:a="http://schemas.openxmlformats.org/drawingml/2006/main" xmlns:p="http://schemas.openxmlformats.org/presentationml/2006/main" xmlns:r="http://schemas.openxmlformats.org/officeDocument/2006/relationships">
+  <p:cSld>
+    <p:spTree>
+      <p:nvGrpSpPr>
+        <p:cNvPr id="1" name=""/>
+        <p:cNvGrpSpPr/>
+        <p:nvPr/>
+      </p:nvGrpSpPr>
+      <p:grpSpPr/>
+      <p:sp>
+        <p:nvSpPr>
+          <p:cNvPr id="2" name="TextBox 1"/>
+          <p:cNvSpPr txBox="1"/>
+          <p:nvPr/>
+        </p:nvSpPr>
+        <p:spPr>
+          <a:xfrm>
+            <a:off x="304800" y="190500"/>
+            <a:ext cx="1268730" cy="1397000"/>
+          </a:xfrm>
+          <a:prstGeom prst="rect">
+            <a:avLst/>
+          </a:prstGeom>
+          <a:noFill/>
+        </p:spPr>
+        <p:txBody>
+          <a:bodyPr wrap="square" lIns="0" rIns="0" tIns="0" bIns="0">
+            <a:noAutofit/>
+          </a:bodyPr>
+          <a:lstStyle/>
+          <a:p>
+            <a:pPr hangingPunct="0"/>
+            <a:r>
+              <a:rPr sz="2000" lang="ja-JP">
+                <a:latin typeface="Hiragino Sans"/>
+                <a:ea typeface="Hiragino Sans"/>
+              </a:rPr>
+              <a:t>あ、いう、え</a:t>
+            </a:r>
+          </a:p>
+        </p:txBody>
+      </p:sp>
+    </p:spTree>
+  </p:cSld>
+  <p:clrMapOvr>
+    <a:masterClrMapping/>
+  </p:clrMapOvr>
+</p:sld>
+</file>
+
+<file path=ppt/slides/slide29.xml><?xml version="1.0" encoding="utf-8"?>
+<p:sld xmlns:a="http://schemas.openxmlformats.org/drawingml/2006/main" xmlns:p="http://schemas.openxmlformats.org/presentationml/2006/main" xmlns:r="http://schemas.openxmlformats.org/officeDocument/2006/relationships">
+  <p:cSld>
+    <p:spTree>
+      <p:nvGrpSpPr>
+        <p:cNvPr id="1" name=""/>
+        <p:cNvGrpSpPr/>
+        <p:nvPr/>
+      </p:nvGrpSpPr>
+      <p:grpSpPr/>
+      <p:sp>
+        <p:nvSpPr>
+          <p:cNvPr id="2" name="TextBox 1"/>
+          <p:cNvSpPr txBox="1"/>
+          <p:nvPr/>
+        </p:nvSpPr>
+        <p:spPr>
+          <a:xfrm>
+            <a:off x="304800" y="190500"/>
+            <a:ext cx="1269365" cy="1397000"/>
+          </a:xfrm>
+          <a:prstGeom prst="rect">
+            <a:avLst/>
+          </a:prstGeom>
+          <a:noFill/>
+        </p:spPr>
+        <p:txBody>
+          <a:bodyPr wrap="square" lIns="0" rIns="0" tIns="0" bIns="0">
+            <a:noAutofit/>
+          </a:bodyPr>
+          <a:lstStyle/>
+          <a:p>
+            <a:pPr hangingPunct="0"/>
+            <a:r>
+              <a:rPr sz="2000" lang="ja-JP">
+                <a:latin typeface="Hiragino Sans"/>
+                <a:ea typeface="Hiragino Sans"/>
+              </a:rPr>
+              <a:t>あ、いう、え</a:t>
+            </a:r>
+          </a:p>
+        </p:txBody>
+      </p:sp>
+    </p:spTree>
+  </p:cSld>
+  <p:clrMapOvr>
+    <a:masterClrMapping/>
+  </p:clrMapOvr>
+</p:sld>
+</file>
+
+<file path=ppt/slides/slide3.xml><?xml version="1.0" encoding="utf-8"?>
+<p:sld xmlns:a="http://schemas.openxmlformats.org/drawingml/2006/main" xmlns:p="http://schemas.openxmlformats.org/presentationml/2006/main" xmlns:r="http://schemas.openxmlformats.org/officeDocument/2006/relationships">
+  <p:cSld>
+    <p:spTree>
+      <p:nvGrpSpPr>
+        <p:cNvPr id="1" name=""/>
+        <p:cNvGrpSpPr/>
+        <p:nvPr/>
+      </p:nvGrpSpPr>
+      <p:grpSpPr/>
+      <p:sp>
+        <p:nvSpPr>
+          <p:cNvPr id="2" name="TextBox 1"/>
+          <p:cNvSpPr txBox="1"/>
+          <p:nvPr/>
+        </p:nvSpPr>
+        <p:spPr>
+          <a:xfrm>
+            <a:off x="304800" y="190500"/>
+            <a:ext cx="1371346" cy="1397000"/>
+          </a:xfrm>
+          <a:prstGeom prst="rect">
+            <a:avLst/>
+          </a:prstGeom>
+          <a:noFill/>
+        </p:spPr>
+        <p:txBody>
+          <a:bodyPr wrap="square" lIns="0" rIns="0" tIns="0" bIns="0">
+            <a:noAutofit/>
+          </a:bodyPr>
+          <a:lstStyle/>
+          <a:p>
+            <a:pPr hangingPunct="0"/>
+            <a:r>
+              <a:rPr sz="1800" lang="ja-JP">
+                <a:latin typeface="Hiragino Sans"/>
+                <a:ea typeface="Hiragino Sans"/>
+              </a:rPr>
+              <a:t>あいうえおか</a:t>
+            </a:r>
+          </a:p>
+        </p:txBody>
+      </p:sp>
+    </p:spTree>
+  </p:cSld>
+  <p:clrMapOvr>
+    <a:masterClrMapping/>
+  </p:clrMapOvr>
+</p:sld>
+</file>
+
+<file path=ppt/slides/slide30.xml><?xml version="1.0" encoding="utf-8"?>
+<p:sld xmlns:a="http://schemas.openxmlformats.org/drawingml/2006/main" xmlns:p="http://schemas.openxmlformats.org/presentationml/2006/main" xmlns:r="http://schemas.openxmlformats.org/officeDocument/2006/relationships">
+  <p:cSld>
+    <p:spTree>
+      <p:nvGrpSpPr>
+        <p:cNvPr id="1" name=""/>
+        <p:cNvGrpSpPr/>
+        <p:nvPr/>
+      </p:nvGrpSpPr>
+      <p:grpSpPr/>
+      <p:sp>
+        <p:nvSpPr>
+          <p:cNvPr id="2" name="TextBox 1"/>
+          <p:cNvSpPr txBox="1"/>
+          <p:nvPr/>
+        </p:nvSpPr>
+        <p:spPr>
+          <a:xfrm>
+            <a:off x="304800" y="190500"/>
+            <a:ext cx="1269746" cy="1397000"/>
+          </a:xfrm>
+          <a:prstGeom prst="rect">
+            <a:avLst/>
+          </a:prstGeom>
+          <a:noFill/>
+        </p:spPr>
+        <p:txBody>
+          <a:bodyPr wrap="square" lIns="0" rIns="0" tIns="0" bIns="0">
+            <a:noAutofit/>
+          </a:bodyPr>
+          <a:lstStyle/>
+          <a:p>
+            <a:pPr hangingPunct="0"/>
+            <a:r>
+              <a:rPr sz="2000" lang="ja-JP">
+                <a:latin typeface="Hiragino Sans"/>
+                <a:ea typeface="Hiragino Sans"/>
+              </a:rPr>
+              <a:t>あ、いう、え</a:t>
+            </a:r>
+          </a:p>
+        </p:txBody>
+      </p:sp>
+    </p:spTree>
+  </p:cSld>
+  <p:clrMapOvr>
+    <a:masterClrMapping/>
+  </p:clrMapOvr>
+</p:sld>
+</file>
+
+<file path=ppt/slides/slide31.xml><?xml version="1.0" encoding="utf-8"?>
+<p:sld xmlns:a="http://schemas.openxmlformats.org/drawingml/2006/main" xmlns:p="http://schemas.openxmlformats.org/presentationml/2006/main" xmlns:r="http://schemas.openxmlformats.org/officeDocument/2006/relationships">
+  <p:cSld>
+    <p:spTree>
+      <p:nvGrpSpPr>
+        <p:cNvPr id="1" name=""/>
+        <p:cNvGrpSpPr/>
+        <p:nvPr/>
+      </p:nvGrpSpPr>
+      <p:grpSpPr/>
+      <p:sp>
+        <p:nvSpPr>
+          <p:cNvPr id="2" name="TextBox 1"/>
+          <p:cNvSpPr txBox="1"/>
+          <p:nvPr/>
+        </p:nvSpPr>
+        <p:spPr>
+          <a:xfrm>
+            <a:off x="304800" y="190500"/>
+            <a:ext cx="1269873" cy="1397000"/>
+          </a:xfrm>
+          <a:prstGeom prst="rect">
+            <a:avLst/>
+          </a:prstGeom>
+          <a:noFill/>
+        </p:spPr>
+        <p:txBody>
+          <a:bodyPr wrap="square" lIns="0" rIns="0" tIns="0" bIns="0">
+            <a:noAutofit/>
+          </a:bodyPr>
+          <a:lstStyle/>
+          <a:p>
+            <a:pPr hangingPunct="0"/>
+            <a:r>
+              <a:rPr sz="2000" lang="ja-JP">
+                <a:latin typeface="Hiragino Sans"/>
+                <a:ea typeface="Hiragino Sans"/>
+              </a:rPr>
+              <a:t>あ、いう、え</a:t>
+            </a:r>
+          </a:p>
+        </p:txBody>
+      </p:sp>
+    </p:spTree>
+  </p:cSld>
+  <p:clrMapOvr>
+    <a:masterClrMapping/>
+  </p:clrMapOvr>
+</p:sld>
+</file>
+
+<file path=ppt/slides/slide32.xml><?xml version="1.0" encoding="utf-8"?>
+<p:sld xmlns:a="http://schemas.openxmlformats.org/drawingml/2006/main" xmlns:p="http://schemas.openxmlformats.org/presentationml/2006/main" xmlns:r="http://schemas.openxmlformats.org/officeDocument/2006/relationships">
+  <p:cSld>
+    <p:spTree>
+      <p:nvGrpSpPr>
+        <p:cNvPr id="1" name=""/>
+        <p:cNvGrpSpPr/>
+        <p:nvPr/>
+      </p:nvGrpSpPr>
+      <p:grpSpPr/>
+      <p:sp>
+        <p:nvSpPr>
+          <p:cNvPr id="2" name="TextBox 1"/>
+          <p:cNvSpPr txBox="1"/>
+          <p:nvPr/>
+        </p:nvSpPr>
+        <p:spPr>
+          <a:xfrm>
+            <a:off x="304800" y="190500"/>
+            <a:ext cx="1270000" cy="1397000"/>
+          </a:xfrm>
+          <a:prstGeom prst="rect">
+            <a:avLst/>
+          </a:prstGeom>
+          <a:noFill/>
+        </p:spPr>
+        <p:txBody>
+          <a:bodyPr wrap="square" lIns="0" rIns="0" tIns="0" bIns="0">
+            <a:noAutofit/>
+          </a:bodyPr>
+          <a:lstStyle/>
+          <a:p>
+            <a:pPr hangingPunct="0"/>
+            <a:r>
+              <a:rPr sz="2000" lang="ja-JP">
+                <a:latin typeface="Hiragino Sans"/>
+                <a:ea typeface="Hiragino Sans"/>
+              </a:rPr>
+              <a:t>あ、いう、え</a:t>
+            </a:r>
+          </a:p>
+        </p:txBody>
+      </p:sp>
+    </p:spTree>
+  </p:cSld>
+  <p:clrMapOvr>
+    <a:masterClrMapping/>
+  </p:clrMapOvr>
+</p:sld>
+</file>
+
+<file path=ppt/slides/slide33.xml><?xml version="1.0" encoding="utf-8"?>
+<p:sld xmlns:a="http://schemas.openxmlformats.org/drawingml/2006/main" xmlns:p="http://schemas.openxmlformats.org/presentationml/2006/main" xmlns:r="http://schemas.openxmlformats.org/officeDocument/2006/relationships">
+  <p:cSld>
+    <p:spTree>
+      <p:nvGrpSpPr>
+        <p:cNvPr id="1" name=""/>
+        <p:cNvGrpSpPr/>
+        <p:nvPr/>
+      </p:nvGrpSpPr>
+      <p:grpSpPr/>
+      <p:sp>
+        <p:nvSpPr>
+          <p:cNvPr id="2" name="TextBox 1"/>
+          <p:cNvSpPr txBox="1"/>
+          <p:nvPr/>
+        </p:nvSpPr>
+        <p:spPr>
+          <a:xfrm>
+            <a:off x="304800" y="190500"/>
+            <a:ext cx="1270127" cy="1397000"/>
+          </a:xfrm>
+          <a:prstGeom prst="rect">
+            <a:avLst/>
+          </a:prstGeom>
+          <a:noFill/>
+        </p:spPr>
+        <p:txBody>
+          <a:bodyPr wrap="square" lIns="0" rIns="0" tIns="0" bIns="0">
+            <a:noAutofit/>
+          </a:bodyPr>
+          <a:lstStyle/>
+          <a:p>
+            <a:pPr hangingPunct="0"/>
+            <a:r>
+              <a:rPr sz="2000" lang="ja-JP">
+                <a:latin typeface="Hiragino Sans"/>
+                <a:ea typeface="Hiragino Sans"/>
+              </a:rPr>
+              <a:t>あ、いう、え</a:t>
+            </a:r>
+          </a:p>
+        </p:txBody>
+      </p:sp>
+    </p:spTree>
+  </p:cSld>
+  <p:clrMapOvr>
+    <a:masterClrMapping/>
+  </p:clrMapOvr>
+</p:sld>
+</file>
+
+<file path=ppt/slides/slide34.xml><?xml version="1.0" encoding="utf-8"?>
+<p:sld xmlns:a="http://schemas.openxmlformats.org/drawingml/2006/main" xmlns:p="http://schemas.openxmlformats.org/presentationml/2006/main" xmlns:r="http://schemas.openxmlformats.org/officeDocument/2006/relationships">
+  <p:cSld>
+    <p:spTree>
+      <p:nvGrpSpPr>
+        <p:cNvPr id="1" name=""/>
+        <p:cNvGrpSpPr/>
+        <p:nvPr/>
+      </p:nvGrpSpPr>
+      <p:grpSpPr/>
+      <p:sp>
+        <p:nvSpPr>
+          <p:cNvPr id="2" name="TextBox 1"/>
+          <p:cNvSpPr txBox="1"/>
+          <p:nvPr/>
+        </p:nvSpPr>
+        <p:spPr>
+          <a:xfrm>
+            <a:off x="304800" y="190500"/>
+            <a:ext cx="1270254" cy="1397000"/>
+          </a:xfrm>
+          <a:prstGeom prst="rect">
+            <a:avLst/>
+          </a:prstGeom>
+          <a:noFill/>
+        </p:spPr>
+        <p:txBody>
+          <a:bodyPr wrap="square" lIns="0" rIns="0" tIns="0" bIns="0">
+            <a:noAutofit/>
+          </a:bodyPr>
+          <a:lstStyle/>
+          <a:p>
+            <a:pPr hangingPunct="0"/>
+            <a:r>
+              <a:rPr sz="2000" lang="ja-JP">
+                <a:latin typeface="Hiragino Sans"/>
+                <a:ea typeface="Hiragino Sans"/>
+              </a:rPr>
+              <a:t>あ、いう、え</a:t>
+            </a:r>
+          </a:p>
+        </p:txBody>
+      </p:sp>
+    </p:spTree>
+  </p:cSld>
+  <p:clrMapOvr>
+    <a:masterClrMapping/>
+  </p:clrMapOvr>
+</p:sld>
+</file>
+
+<file path=ppt/slides/slide35.xml><?xml version="1.0" encoding="utf-8"?>
+<p:sld xmlns:a="http://schemas.openxmlformats.org/drawingml/2006/main" xmlns:p="http://schemas.openxmlformats.org/presentationml/2006/main" xmlns:r="http://schemas.openxmlformats.org/officeDocument/2006/relationships">
+  <p:cSld>
+    <p:spTree>
+      <p:nvGrpSpPr>
+        <p:cNvPr id="1" name=""/>
+        <p:cNvGrpSpPr/>
+        <p:nvPr/>
+      </p:nvGrpSpPr>
+      <p:grpSpPr/>
+      <p:sp>
+        <p:nvSpPr>
+          <p:cNvPr id="2" name="TextBox 1"/>
+          <p:cNvSpPr txBox="1"/>
+          <p:nvPr/>
+        </p:nvSpPr>
+        <p:spPr>
+          <a:xfrm>
+            <a:off x="304800" y="190500"/>
+            <a:ext cx="1270635" cy="1397000"/>
+          </a:xfrm>
+          <a:prstGeom prst="rect">
+            <a:avLst/>
+          </a:prstGeom>
+          <a:noFill/>
+        </p:spPr>
+        <p:txBody>
+          <a:bodyPr wrap="square" lIns="0" rIns="0" tIns="0" bIns="0">
+            <a:noAutofit/>
+          </a:bodyPr>
+          <a:lstStyle/>
+          <a:p>
+            <a:pPr hangingPunct="0"/>
+            <a:r>
+              <a:rPr sz="2000" lang="ja-JP">
+                <a:latin typeface="Hiragino Sans"/>
+                <a:ea typeface="Hiragino Sans"/>
+              </a:rPr>
+              <a:t>あ、いう、え</a:t>
+            </a:r>
+          </a:p>
+        </p:txBody>
+      </p:sp>
+    </p:spTree>
+  </p:cSld>
+  <p:clrMapOvr>
+    <a:masterClrMapping/>
+  </p:clrMapOvr>
+</p:sld>
+</file>
+
+<file path=ppt/slides/slide36.xml><?xml version="1.0" encoding="utf-8"?>
+<p:sld xmlns:a="http://schemas.openxmlformats.org/drawingml/2006/main" xmlns:p="http://schemas.openxmlformats.org/presentationml/2006/main" xmlns:r="http://schemas.openxmlformats.org/officeDocument/2006/relationships">
+  <p:cSld>
+    <p:spTree>
+      <p:nvGrpSpPr>
+        <p:cNvPr id="1" name=""/>
+        <p:cNvGrpSpPr/>
+        <p:nvPr/>
+      </p:nvGrpSpPr>
+      <p:grpSpPr/>
+      <p:sp>
+        <p:nvSpPr>
+          <p:cNvPr id="2" name="TextBox 1"/>
+          <p:cNvSpPr txBox="1"/>
+          <p:nvPr/>
+        </p:nvSpPr>
+        <p:spPr>
+          <a:xfrm>
+            <a:off x="304800" y="190500"/>
+            <a:ext cx="1271270" cy="1397000"/>
+          </a:xfrm>
+          <a:prstGeom prst="rect">
+            <a:avLst/>
+          </a:prstGeom>
+          <a:noFill/>
+        </p:spPr>
+        <p:txBody>
+          <a:bodyPr wrap="square" lIns="0" rIns="0" tIns="0" bIns="0">
+            <a:noAutofit/>
+          </a:bodyPr>
+          <a:lstStyle/>
+          <a:p>
+            <a:pPr hangingPunct="0"/>
+            <a:r>
+              <a:rPr sz="2000" lang="ja-JP">
+                <a:latin typeface="Hiragino Sans"/>
+                <a:ea typeface="Hiragino Sans"/>
+              </a:rPr>
+              <a:t>あ、いう、え</a:t>
+            </a:r>
+          </a:p>
+        </p:txBody>
+      </p:sp>
+    </p:spTree>
+  </p:cSld>
+  <p:clrMapOvr>
+    <a:masterClrMapping/>
+  </p:clrMapOvr>
+</p:sld>
+</file>
+
+<file path=ppt/slides/slide37.xml><?xml version="1.0" encoding="utf-8"?>
+<p:sld xmlns:a="http://schemas.openxmlformats.org/drawingml/2006/main" xmlns:p="http://schemas.openxmlformats.org/presentationml/2006/main" xmlns:r="http://schemas.openxmlformats.org/officeDocument/2006/relationships">
+  <p:cSld>
+    <p:spTree>
+      <p:nvGrpSpPr>
+        <p:cNvPr id="1" name=""/>
+        <p:cNvGrpSpPr/>
+        <p:nvPr/>
+      </p:nvGrpSpPr>
+      <p:grpSpPr/>
+      <p:sp>
+        <p:nvSpPr>
+          <p:cNvPr id="2" name="TextBox 1"/>
+          <p:cNvSpPr txBox="1"/>
+          <p:nvPr/>
+        </p:nvSpPr>
+        <p:spPr>
+          <a:xfrm>
+            <a:off x="304800" y="190500"/>
+            <a:ext cx="1637030" cy="1397000"/>
+          </a:xfrm>
+          <a:prstGeom prst="rect">
+            <a:avLst/>
+          </a:prstGeom>
+          <a:noFill/>
+        </p:spPr>
+        <p:txBody>
+          <a:bodyPr wrap="square" lIns="0" rIns="0" tIns="0" bIns="0">
+            <a:noAutofit/>
+          </a:bodyPr>
+          <a:lstStyle/>
+          <a:p>
+            <a:pPr hangingPunct="0"/>
+            <a:r>
+              <a:rPr sz="2150" lang="ja-JP">
+                <a:latin typeface="Hiragino Sans"/>
+                <a:ea typeface="Hiragino Sans"/>
+              </a:rPr>
+              <a:t>あいうえおか</a:t>
+            </a:r>
+          </a:p>
+        </p:txBody>
+      </p:sp>
+    </p:spTree>
+  </p:cSld>
+  <p:clrMapOvr>
+    <a:masterClrMapping/>
+  </p:clrMapOvr>
+</p:sld>
+</file>
+
+<file path=ppt/slides/slide38.xml><?xml version="1.0" encoding="utf-8"?>
+<p:sld xmlns:a="http://schemas.openxmlformats.org/drawingml/2006/main" xmlns:p="http://schemas.openxmlformats.org/presentationml/2006/main" xmlns:r="http://schemas.openxmlformats.org/officeDocument/2006/relationships">
+  <p:cSld>
+    <p:spTree>
+      <p:nvGrpSpPr>
+        <p:cNvPr id="1" name=""/>
+        <p:cNvGrpSpPr/>
+        <p:nvPr/>
+      </p:nvGrpSpPr>
+      <p:grpSpPr/>
+      <p:sp>
+        <p:nvSpPr>
+          <p:cNvPr id="2" name="TextBox 1"/>
+          <p:cNvSpPr txBox="1"/>
+          <p:nvPr/>
+        </p:nvSpPr>
+        <p:spPr>
+          <a:xfrm>
+            <a:off x="304800" y="190500"/>
+            <a:ext cx="1637664" cy="1397000"/>
+          </a:xfrm>
+          <a:prstGeom prst="rect">
+            <a:avLst/>
+          </a:prstGeom>
+          <a:noFill/>
+        </p:spPr>
+        <p:txBody>
+          <a:bodyPr wrap="square" lIns="0" rIns="0" tIns="0" bIns="0">
+            <a:noAutofit/>
+          </a:bodyPr>
+          <a:lstStyle/>
+          <a:p>
+            <a:pPr hangingPunct="0"/>
+            <a:r>
+              <a:rPr sz="2150" lang="ja-JP">
+                <a:latin typeface="Hiragino Sans"/>
+                <a:ea typeface="Hiragino Sans"/>
+              </a:rPr>
+              <a:t>あいうえおか</a:t>
+            </a:r>
+          </a:p>
+        </p:txBody>
+      </p:sp>
+    </p:spTree>
+  </p:cSld>
+  <p:clrMapOvr>
+    <a:masterClrMapping/>
+  </p:clrMapOvr>
+</p:sld>
+</file>
+
+<file path=ppt/slides/slide39.xml><?xml version="1.0" encoding="utf-8"?>
+<p:sld xmlns:a="http://schemas.openxmlformats.org/drawingml/2006/main" xmlns:p="http://schemas.openxmlformats.org/presentationml/2006/main" xmlns:r="http://schemas.openxmlformats.org/officeDocument/2006/relationships">
+  <p:cSld>
+    <p:spTree>
+      <p:nvGrpSpPr>
+        <p:cNvPr id="1" name=""/>
+        <p:cNvGrpSpPr/>
+        <p:nvPr/>
+      </p:nvGrpSpPr>
+      <p:grpSpPr/>
+      <p:sp>
+        <p:nvSpPr>
+          <p:cNvPr id="2" name="TextBox 1"/>
+          <p:cNvSpPr txBox="1"/>
+          <p:nvPr/>
+        </p:nvSpPr>
+        <p:spPr>
+          <a:xfrm>
+            <a:off x="304800" y="190500"/>
+            <a:ext cx="1638045" cy="1397000"/>
+          </a:xfrm>
+          <a:prstGeom prst="rect">
+            <a:avLst/>
+          </a:prstGeom>
+          <a:noFill/>
+        </p:spPr>
+        <p:txBody>
+          <a:bodyPr wrap="square" lIns="0" rIns="0" tIns="0" bIns="0">
+            <a:noAutofit/>
+          </a:bodyPr>
+          <a:lstStyle/>
+          <a:p>
+            <a:pPr hangingPunct="0"/>
+            <a:r>
+              <a:rPr sz="2150" lang="ja-JP">
+                <a:latin typeface="Hiragino Sans"/>
+                <a:ea typeface="Hiragino Sans"/>
+              </a:rPr>
+              <a:t>あいうえおか</a:t>
+            </a:r>
+          </a:p>
+        </p:txBody>
+      </p:sp>
+    </p:spTree>
+  </p:cSld>
+  <p:clrMapOvr>
+    <a:masterClrMapping/>
+  </p:clrMapOvr>
+</p:sld>
+</file>
+
+<file path=ppt/slides/slide4.xml><?xml version="1.0" encoding="utf-8"?>
+<p:sld xmlns:a="http://schemas.openxmlformats.org/drawingml/2006/main" xmlns:p="http://schemas.openxmlformats.org/presentationml/2006/main" xmlns:r="http://schemas.openxmlformats.org/officeDocument/2006/relationships">
+  <p:cSld>
+    <p:spTree>
+      <p:nvGrpSpPr>
+        <p:cNvPr id="1" name=""/>
+        <p:cNvGrpSpPr/>
+        <p:nvPr/>
+      </p:nvGrpSpPr>
+      <p:grpSpPr/>
+      <p:sp>
+        <p:nvSpPr>
+          <p:cNvPr id="2" name="TextBox 1"/>
+          <p:cNvSpPr txBox="1"/>
+          <p:nvPr/>
+        </p:nvSpPr>
+        <p:spPr>
+          <a:xfrm>
+            <a:off x="304800" y="190500"/>
+            <a:ext cx="1371473" cy="1397000"/>
+          </a:xfrm>
+          <a:prstGeom prst="rect">
+            <a:avLst/>
+          </a:prstGeom>
+          <a:noFill/>
+        </p:spPr>
+        <p:txBody>
+          <a:bodyPr wrap="square" lIns="0" rIns="0" tIns="0" bIns="0">
+            <a:noAutofit/>
+          </a:bodyPr>
+          <a:lstStyle/>
+          <a:p>
+            <a:pPr hangingPunct="0"/>
+            <a:r>
+              <a:rPr sz="1800" lang="ja-JP">
+                <a:latin typeface="Hiragino Sans"/>
+                <a:ea typeface="Hiragino Sans"/>
+              </a:rPr>
+              <a:t>あいうえおか</a:t>
+            </a:r>
+          </a:p>
+        </p:txBody>
+      </p:sp>
+    </p:spTree>
+  </p:cSld>
+  <p:clrMapOvr>
+    <a:masterClrMapping/>
+  </p:clrMapOvr>
+</p:sld>
+</file>
+
+<file path=ppt/slides/slide40.xml><?xml version="1.0" encoding="utf-8"?>
+<p:sld xmlns:a="http://schemas.openxmlformats.org/drawingml/2006/main" xmlns:p="http://schemas.openxmlformats.org/presentationml/2006/main" xmlns:r="http://schemas.openxmlformats.org/officeDocument/2006/relationships">
+  <p:cSld>
+    <p:spTree>
+      <p:nvGrpSpPr>
+        <p:cNvPr id="1" name=""/>
+        <p:cNvGrpSpPr/>
+        <p:nvPr/>
+      </p:nvGrpSpPr>
+      <p:grpSpPr/>
+      <p:sp>
+        <p:nvSpPr>
+          <p:cNvPr id="2" name="TextBox 1"/>
+          <p:cNvSpPr txBox="1"/>
+          <p:nvPr/>
+        </p:nvSpPr>
+        <p:spPr>
+          <a:xfrm>
+            <a:off x="304800" y="190500"/>
+            <a:ext cx="1638173" cy="1397000"/>
+          </a:xfrm>
+          <a:prstGeom prst="rect">
+            <a:avLst/>
+          </a:prstGeom>
+          <a:noFill/>
+        </p:spPr>
+        <p:txBody>
+          <a:bodyPr wrap="square" lIns="0" rIns="0" tIns="0" bIns="0">
+            <a:noAutofit/>
+          </a:bodyPr>
+          <a:lstStyle/>
+          <a:p>
+            <a:pPr hangingPunct="0"/>
+            <a:r>
+              <a:rPr sz="2150" lang="ja-JP">
+                <a:latin typeface="Hiragino Sans"/>
+                <a:ea typeface="Hiragino Sans"/>
+              </a:rPr>
+              <a:t>あいうえおか</a:t>
+            </a:r>
+          </a:p>
+        </p:txBody>
+      </p:sp>
+    </p:spTree>
+  </p:cSld>
+  <p:clrMapOvr>
+    <a:masterClrMapping/>
+  </p:clrMapOvr>
+</p:sld>
+</file>
+
+<file path=ppt/slides/slide41.xml><?xml version="1.0" encoding="utf-8"?>
+<p:sld xmlns:a="http://schemas.openxmlformats.org/drawingml/2006/main" xmlns:p="http://schemas.openxmlformats.org/presentationml/2006/main" xmlns:r="http://schemas.openxmlformats.org/officeDocument/2006/relationships">
+  <p:cSld>
+    <p:spTree>
+      <p:nvGrpSpPr>
+        <p:cNvPr id="1" name=""/>
+        <p:cNvGrpSpPr/>
+        <p:nvPr/>
+      </p:nvGrpSpPr>
+      <p:grpSpPr/>
+      <p:sp>
+        <p:nvSpPr>
+          <p:cNvPr id="2" name="TextBox 1"/>
+          <p:cNvSpPr txBox="1"/>
+          <p:nvPr/>
+        </p:nvSpPr>
+        <p:spPr>
+          <a:xfrm>
+            <a:off x="304800" y="190500"/>
+            <a:ext cx="1638300" cy="1397000"/>
+          </a:xfrm>
+          <a:prstGeom prst="rect">
+            <a:avLst/>
+          </a:prstGeom>
+          <a:noFill/>
+        </p:spPr>
+        <p:txBody>
+          <a:bodyPr wrap="square" lIns="0" rIns="0" tIns="0" bIns="0">
+            <a:noAutofit/>
+          </a:bodyPr>
+          <a:lstStyle/>
+          <a:p>
+            <a:pPr hangingPunct="0"/>
+            <a:r>
+              <a:rPr sz="2150" lang="ja-JP">
+                <a:latin typeface="Hiragino Sans"/>
+                <a:ea typeface="Hiragino Sans"/>
+              </a:rPr>
+              <a:t>あいうえおか</a:t>
+            </a:r>
+          </a:p>
+        </p:txBody>
+      </p:sp>
+    </p:spTree>
+  </p:cSld>
+  <p:clrMapOvr>
+    <a:masterClrMapping/>
+  </p:clrMapOvr>
+</p:sld>
+</file>
+
+<file path=ppt/slides/slide42.xml><?xml version="1.0" encoding="utf-8"?>
+<p:sld xmlns:a="http://schemas.openxmlformats.org/drawingml/2006/main" xmlns:p="http://schemas.openxmlformats.org/presentationml/2006/main" xmlns:r="http://schemas.openxmlformats.org/officeDocument/2006/relationships">
+  <p:cSld>
+    <p:spTree>
+      <p:nvGrpSpPr>
+        <p:cNvPr id="1" name=""/>
+        <p:cNvGrpSpPr/>
+        <p:nvPr/>
+      </p:nvGrpSpPr>
+      <p:grpSpPr/>
+      <p:sp>
+        <p:nvSpPr>
+          <p:cNvPr id="2" name="TextBox 1"/>
+          <p:cNvSpPr txBox="1"/>
+          <p:nvPr/>
+        </p:nvSpPr>
+        <p:spPr>
+          <a:xfrm>
+            <a:off x="304800" y="190500"/>
+            <a:ext cx="1638427" cy="1397000"/>
+          </a:xfrm>
+          <a:prstGeom prst="rect">
+            <a:avLst/>
+          </a:prstGeom>
+          <a:noFill/>
+        </p:spPr>
+        <p:txBody>
+          <a:bodyPr wrap="square" lIns="0" rIns="0" tIns="0" bIns="0">
+            <a:noAutofit/>
+          </a:bodyPr>
+          <a:lstStyle/>
+          <a:p>
+            <a:pPr hangingPunct="0"/>
+            <a:r>
+              <a:rPr sz="2150" lang="ja-JP">
+                <a:latin typeface="Hiragino Sans"/>
+                <a:ea typeface="Hiragino Sans"/>
+              </a:rPr>
+              <a:t>あいうえおか</a:t>
+            </a:r>
+          </a:p>
+        </p:txBody>
+      </p:sp>
+    </p:spTree>
+  </p:cSld>
+  <p:clrMapOvr>
+    <a:masterClrMapping/>
+  </p:clrMapOvr>
+</p:sld>
+</file>
+
+<file path=ppt/slides/slide43.xml><?xml version="1.0" encoding="utf-8"?>
+<p:sld xmlns:a="http://schemas.openxmlformats.org/drawingml/2006/main" xmlns:p="http://schemas.openxmlformats.org/presentationml/2006/main" xmlns:r="http://schemas.openxmlformats.org/officeDocument/2006/relationships">
+  <p:cSld>
+    <p:spTree>
+      <p:nvGrpSpPr>
+        <p:cNvPr id="1" name=""/>
+        <p:cNvGrpSpPr/>
+        <p:nvPr/>
+      </p:nvGrpSpPr>
+      <p:grpSpPr/>
+      <p:sp>
+        <p:nvSpPr>
+          <p:cNvPr id="2" name="TextBox 1"/>
+          <p:cNvSpPr txBox="1"/>
+          <p:nvPr/>
+        </p:nvSpPr>
+        <p:spPr>
+          <a:xfrm>
+            <a:off x="304800" y="190500"/>
+            <a:ext cx="1638554" cy="1397000"/>
+          </a:xfrm>
+          <a:prstGeom prst="rect">
+            <a:avLst/>
+          </a:prstGeom>
+          <a:noFill/>
+        </p:spPr>
+        <p:txBody>
+          <a:bodyPr wrap="square" lIns="0" rIns="0" tIns="0" bIns="0">
+            <a:noAutofit/>
+          </a:bodyPr>
+          <a:lstStyle/>
+          <a:p>
+            <a:pPr hangingPunct="0"/>
+            <a:r>
+              <a:rPr sz="2150" lang="ja-JP">
+                <a:latin typeface="Hiragino Sans"/>
+                <a:ea typeface="Hiragino Sans"/>
+              </a:rPr>
+              <a:t>あいうえおか</a:t>
+            </a:r>
+          </a:p>
+        </p:txBody>
+      </p:sp>
+    </p:spTree>
+  </p:cSld>
+  <p:clrMapOvr>
+    <a:masterClrMapping/>
+  </p:clrMapOvr>
+</p:sld>
+</file>
+
+<file path=ppt/slides/slide44.xml><?xml version="1.0" encoding="utf-8"?>
+<p:sld xmlns:a="http://schemas.openxmlformats.org/drawingml/2006/main" xmlns:p="http://schemas.openxmlformats.org/presentationml/2006/main" xmlns:r="http://schemas.openxmlformats.org/officeDocument/2006/relationships">
+  <p:cSld>
+    <p:spTree>
+      <p:nvGrpSpPr>
+        <p:cNvPr id="1" name=""/>
+        <p:cNvGrpSpPr/>
+        <p:nvPr/>
+      </p:nvGrpSpPr>
+      <p:grpSpPr/>
+      <p:sp>
+        <p:nvSpPr>
+          <p:cNvPr id="2" name="TextBox 1"/>
+          <p:cNvSpPr txBox="1"/>
+          <p:nvPr/>
+        </p:nvSpPr>
+        <p:spPr>
+          <a:xfrm>
+            <a:off x="304800" y="190500"/>
+            <a:ext cx="1638935" cy="1397000"/>
+          </a:xfrm>
+          <a:prstGeom prst="rect">
+            <a:avLst/>
+          </a:prstGeom>
+          <a:noFill/>
+        </p:spPr>
+        <p:txBody>
+          <a:bodyPr wrap="square" lIns="0" rIns="0" tIns="0" bIns="0">
+            <a:noAutofit/>
+          </a:bodyPr>
+          <a:lstStyle/>
+          <a:p>
+            <a:pPr hangingPunct="0"/>
+            <a:r>
+              <a:rPr sz="2150" lang="ja-JP">
+                <a:latin typeface="Hiragino Sans"/>
+                <a:ea typeface="Hiragino Sans"/>
+              </a:rPr>
+              <a:t>あいうえおか</a:t>
+            </a:r>
+          </a:p>
+        </p:txBody>
+      </p:sp>
+    </p:spTree>
+  </p:cSld>
+  <p:clrMapOvr>
+    <a:masterClrMapping/>
+  </p:clrMapOvr>
+</p:sld>
+</file>
+
+<file path=ppt/slides/slide45.xml><?xml version="1.0" encoding="utf-8"?>
+<p:sld xmlns:a="http://schemas.openxmlformats.org/drawingml/2006/main" xmlns:p="http://schemas.openxmlformats.org/presentationml/2006/main" xmlns:r="http://schemas.openxmlformats.org/officeDocument/2006/relationships">
+  <p:cSld>
+    <p:spTree>
+      <p:nvGrpSpPr>
+        <p:cNvPr id="1" name=""/>
+        <p:cNvGrpSpPr/>
+        <p:nvPr/>
+      </p:nvGrpSpPr>
+      <p:grpSpPr/>
+      <p:sp>
+        <p:nvSpPr>
+          <p:cNvPr id="2" name="TextBox 1"/>
+          <p:cNvSpPr txBox="1"/>
+          <p:nvPr/>
+        </p:nvSpPr>
+        <p:spPr>
+          <a:xfrm>
+            <a:off x="304800" y="190500"/>
+            <a:ext cx="1639570" cy="1397000"/>
+          </a:xfrm>
+          <a:prstGeom prst="rect">
+            <a:avLst/>
+          </a:prstGeom>
+          <a:noFill/>
+        </p:spPr>
+        <p:txBody>
+          <a:bodyPr wrap="square" lIns="0" rIns="0" tIns="0" bIns="0">
+            <a:noAutofit/>
+          </a:bodyPr>
+          <a:lstStyle/>
+          <a:p>
+            <a:pPr hangingPunct="0"/>
+            <a:r>
+              <a:rPr sz="2150" lang="ja-JP">
+                <a:latin typeface="Hiragino Sans"/>
+                <a:ea typeface="Hiragino Sans"/>
+              </a:rPr>
+              <a:t>あいうえおか</a:t>
+            </a:r>
+          </a:p>
+        </p:txBody>
+      </p:sp>
+    </p:spTree>
+  </p:cSld>
+  <p:clrMapOvr>
+    <a:masterClrMapping/>
+  </p:clrMapOvr>
+</p:sld>
+</file>
+
+<file path=ppt/slides/slide46.xml><?xml version="1.0" encoding="utf-8"?>
+<p:sld xmlns:a="http://schemas.openxmlformats.org/drawingml/2006/main" xmlns:p="http://schemas.openxmlformats.org/presentationml/2006/main" xmlns:r="http://schemas.openxmlformats.org/officeDocument/2006/relationships">
+  <p:cSld>
+    <p:spTree>
+      <p:nvGrpSpPr>
+        <p:cNvPr id="1" name=""/>
+        <p:cNvGrpSpPr/>
+        <p:nvPr/>
+      </p:nvGrpSpPr>
+      <p:grpSpPr/>
+      <p:sp>
+        <p:nvSpPr>
+          <p:cNvPr id="2" name="TextBox 1"/>
+          <p:cNvSpPr txBox="1"/>
+          <p:nvPr/>
+        </p:nvSpPr>
+        <p:spPr>
+          <a:xfrm>
+            <a:off x="304800" y="190500"/>
+            <a:ext cx="1363980" cy="1397000"/>
+          </a:xfrm>
+          <a:prstGeom prst="rect">
+            <a:avLst/>
+          </a:prstGeom>
+          <a:noFill/>
+        </p:spPr>
+        <p:txBody>
+          <a:bodyPr wrap="square" lIns="0" rIns="0" tIns="0" bIns="0">
+            <a:noAutofit/>
+          </a:bodyPr>
+          <a:lstStyle/>
+          <a:p>
+            <a:pPr hangingPunct="0"/>
+            <a:r>
+              <a:rPr sz="2150" lang="ja-JP">
+                <a:latin typeface="Hiragino Sans"/>
+                <a:ea typeface="Hiragino Sans"/>
+              </a:rPr>
+              <a:t>あ、いう、え</a:t>
+            </a:r>
+          </a:p>
+        </p:txBody>
+      </p:sp>
+    </p:spTree>
+  </p:cSld>
+  <p:clrMapOvr>
+    <a:masterClrMapping/>
+  </p:clrMapOvr>
+</p:sld>
+</file>
+
+<file path=ppt/slides/slide47.xml><?xml version="1.0" encoding="utf-8"?>
+<p:sld xmlns:a="http://schemas.openxmlformats.org/drawingml/2006/main" xmlns:p="http://schemas.openxmlformats.org/presentationml/2006/main" xmlns:r="http://schemas.openxmlformats.org/officeDocument/2006/relationships">
+  <p:cSld>
+    <p:spTree>
+      <p:nvGrpSpPr>
+        <p:cNvPr id="1" name=""/>
+        <p:cNvGrpSpPr/>
+        <p:nvPr/>
+      </p:nvGrpSpPr>
+      <p:grpSpPr/>
+      <p:sp>
+        <p:nvSpPr>
+          <p:cNvPr id="2" name="TextBox 1"/>
+          <p:cNvSpPr txBox="1"/>
+          <p:nvPr/>
+        </p:nvSpPr>
+        <p:spPr>
+          <a:xfrm>
+            <a:off x="304800" y="190500"/>
+            <a:ext cx="1364615" cy="1397000"/>
+          </a:xfrm>
+          <a:prstGeom prst="rect">
+            <a:avLst/>
+          </a:prstGeom>
+          <a:noFill/>
+        </p:spPr>
+        <p:txBody>
+          <a:bodyPr wrap="square" lIns="0" rIns="0" tIns="0" bIns="0">
+            <a:noAutofit/>
+          </a:bodyPr>
+          <a:lstStyle/>
+          <a:p>
+            <a:pPr hangingPunct="0"/>
+            <a:r>
+              <a:rPr sz="2150" lang="ja-JP">
+                <a:latin typeface="Hiragino Sans"/>
+                <a:ea typeface="Hiragino Sans"/>
+              </a:rPr>
+              <a:t>あ、いう、え</a:t>
+            </a:r>
+          </a:p>
+        </p:txBody>
+      </p:sp>
+    </p:spTree>
+  </p:cSld>
+  <p:clrMapOvr>
+    <a:masterClrMapping/>
+  </p:clrMapOvr>
+</p:sld>
+</file>
+
+<file path=ppt/slides/slide48.xml><?xml version="1.0" encoding="utf-8"?>
+<p:sld xmlns:a="http://schemas.openxmlformats.org/drawingml/2006/main" xmlns:p="http://schemas.openxmlformats.org/presentationml/2006/main" xmlns:r="http://schemas.openxmlformats.org/officeDocument/2006/relationships">
+  <p:cSld>
+    <p:spTree>
+      <p:nvGrpSpPr>
+        <p:cNvPr id="1" name=""/>
+        <p:cNvGrpSpPr/>
+        <p:nvPr/>
+      </p:nvGrpSpPr>
+      <p:grpSpPr/>
+      <p:sp>
+        <p:nvSpPr>
+          <p:cNvPr id="2" name="TextBox 1"/>
+          <p:cNvSpPr txBox="1"/>
+          <p:nvPr/>
+        </p:nvSpPr>
+        <p:spPr>
+          <a:xfrm>
+            <a:off x="304800" y="190500"/>
+            <a:ext cx="1364996" cy="1397000"/>
+          </a:xfrm>
+          <a:prstGeom prst="rect">
+            <a:avLst/>
+          </a:prstGeom>
+          <a:noFill/>
+        </p:spPr>
+        <p:txBody>
+          <a:bodyPr wrap="square" lIns="0" rIns="0" tIns="0" bIns="0">
+            <a:noAutofit/>
+          </a:bodyPr>
+          <a:lstStyle/>
+          <a:p>
+            <a:pPr hangingPunct="0"/>
+            <a:r>
+              <a:rPr sz="2150" lang="ja-JP">
+                <a:latin typeface="Hiragino Sans"/>
+                <a:ea typeface="Hiragino Sans"/>
+              </a:rPr>
+              <a:t>あ、いう、え</a:t>
+            </a:r>
+          </a:p>
+        </p:txBody>
+      </p:sp>
+    </p:spTree>
+  </p:cSld>
+  <p:clrMapOvr>
+    <a:masterClrMapping/>
+  </p:clrMapOvr>
+</p:sld>
+</file>
+
+<file path=ppt/slides/slide49.xml><?xml version="1.0" encoding="utf-8"?>
+<p:sld xmlns:a="http://schemas.openxmlformats.org/drawingml/2006/main" xmlns:p="http://schemas.openxmlformats.org/presentationml/2006/main" xmlns:r="http://schemas.openxmlformats.org/officeDocument/2006/relationships">
+  <p:cSld>
+    <p:spTree>
+      <p:nvGrpSpPr>
+        <p:cNvPr id="1" name=""/>
+        <p:cNvGrpSpPr/>
+        <p:nvPr/>
+      </p:nvGrpSpPr>
+      <p:grpSpPr/>
+      <p:sp>
+        <p:nvSpPr>
+          <p:cNvPr id="2" name="TextBox 1"/>
+          <p:cNvSpPr txBox="1"/>
+          <p:nvPr/>
+        </p:nvSpPr>
+        <p:spPr>
+          <a:xfrm>
+            <a:off x="304800" y="190500"/>
+            <a:ext cx="1365123" cy="1397000"/>
+          </a:xfrm>
+          <a:prstGeom prst="rect">
+            <a:avLst/>
+          </a:prstGeom>
+          <a:noFill/>
+        </p:spPr>
+        <p:txBody>
+          <a:bodyPr wrap="square" lIns="0" rIns="0" tIns="0" bIns="0">
+            <a:noAutofit/>
+          </a:bodyPr>
+          <a:lstStyle/>
+          <a:p>
+            <a:pPr hangingPunct="0"/>
+            <a:r>
+              <a:rPr sz="2150" lang="ja-JP">
+                <a:latin typeface="Hiragino Sans"/>
+                <a:ea typeface="Hiragino Sans"/>
+              </a:rPr>
+              <a:t>あ、いう、え</a:t>
+            </a:r>
+          </a:p>
+        </p:txBody>
+      </p:sp>
+    </p:spTree>
+  </p:cSld>
+  <p:clrMapOvr>
+    <a:masterClrMapping/>
+  </p:clrMapOvr>
+</p:sld>
+</file>
+
+<file path=ppt/slides/slide5.xml><?xml version="1.0" encoding="utf-8"?>
+<p:sld xmlns:a="http://schemas.openxmlformats.org/drawingml/2006/main" xmlns:p="http://schemas.openxmlformats.org/presentationml/2006/main" xmlns:r="http://schemas.openxmlformats.org/officeDocument/2006/relationships">
+  <p:cSld>
+    <p:spTree>
+      <p:nvGrpSpPr>
+        <p:cNvPr id="1" name=""/>
+        <p:cNvGrpSpPr/>
+        <p:nvPr/>
+      </p:nvGrpSpPr>
+      <p:grpSpPr/>
+      <p:sp>
+        <p:nvSpPr>
+          <p:cNvPr id="2" name="TextBox 1"/>
+          <p:cNvSpPr txBox="1"/>
+          <p:nvPr/>
+        </p:nvSpPr>
+        <p:spPr>
+          <a:xfrm>
+            <a:off x="304800" y="190500"/>
+            <a:ext cx="1371600" cy="1397000"/>
+          </a:xfrm>
+          <a:prstGeom prst="rect">
+            <a:avLst/>
+          </a:prstGeom>
+          <a:noFill/>
+        </p:spPr>
+        <p:txBody>
+          <a:bodyPr wrap="square" lIns="0" rIns="0" tIns="0" bIns="0">
+            <a:noAutofit/>
+          </a:bodyPr>
+          <a:lstStyle/>
+          <a:p>
+            <a:pPr hangingPunct="0"/>
+            <a:r>
+              <a:rPr sz="1800" lang="ja-JP">
+                <a:latin typeface="Hiragino Sans"/>
+                <a:ea typeface="Hiragino Sans"/>
+              </a:rPr>
+              <a:t>あいうえおか</a:t>
+            </a:r>
+          </a:p>
+        </p:txBody>
+      </p:sp>
+    </p:spTree>
+  </p:cSld>
+  <p:clrMapOvr>
+    <a:masterClrMapping/>
+  </p:clrMapOvr>
+</p:sld>
+</file>
+
+<file path=ppt/slides/slide50.xml><?xml version="1.0" encoding="utf-8"?>
+<p:sld xmlns:a="http://schemas.openxmlformats.org/drawingml/2006/main" xmlns:p="http://schemas.openxmlformats.org/presentationml/2006/main" xmlns:r="http://schemas.openxmlformats.org/officeDocument/2006/relationships">
+  <p:cSld>
+    <p:spTree>
+      <p:nvGrpSpPr>
+        <p:cNvPr id="1" name=""/>
+        <p:cNvGrpSpPr/>
+        <p:nvPr/>
+      </p:nvGrpSpPr>
+      <p:grpSpPr/>
+      <p:sp>
+        <p:nvSpPr>
+          <p:cNvPr id="2" name="TextBox 1"/>
+          <p:cNvSpPr txBox="1"/>
+          <p:nvPr/>
+        </p:nvSpPr>
+        <p:spPr>
+          <a:xfrm>
+            <a:off x="304800" y="190500"/>
+            <a:ext cx="1365250" cy="1397000"/>
+          </a:xfrm>
+          <a:prstGeom prst="rect">
+            <a:avLst/>
+          </a:prstGeom>
+          <a:noFill/>
+        </p:spPr>
+        <p:txBody>
+          <a:bodyPr wrap="square" lIns="0" rIns="0" tIns="0" bIns="0">
+            <a:noAutofit/>
+          </a:bodyPr>
+          <a:lstStyle/>
+          <a:p>
+            <a:pPr hangingPunct="0"/>
+            <a:r>
+              <a:rPr sz="2150" lang="ja-JP">
+                <a:latin typeface="Hiragino Sans"/>
+                <a:ea typeface="Hiragino Sans"/>
+              </a:rPr>
+              <a:t>あ、いう、え</a:t>
+            </a:r>
+          </a:p>
+        </p:txBody>
+      </p:sp>
+    </p:spTree>
+  </p:cSld>
+  <p:clrMapOvr>
+    <a:masterClrMapping/>
+  </p:clrMapOvr>
+</p:sld>
+</file>
+
+<file path=ppt/slides/slide51.xml><?xml version="1.0" encoding="utf-8"?>
+<p:sld xmlns:a="http://schemas.openxmlformats.org/drawingml/2006/main" xmlns:p="http://schemas.openxmlformats.org/presentationml/2006/main" xmlns:r="http://schemas.openxmlformats.org/officeDocument/2006/relationships">
+  <p:cSld>
+    <p:spTree>
+      <p:nvGrpSpPr>
+        <p:cNvPr id="1" name=""/>
+        <p:cNvGrpSpPr/>
+        <p:nvPr/>
+      </p:nvGrpSpPr>
+      <p:grpSpPr/>
+      <p:sp>
+        <p:nvSpPr>
+          <p:cNvPr id="2" name="TextBox 1"/>
+          <p:cNvSpPr txBox="1"/>
+          <p:nvPr/>
+        </p:nvSpPr>
+        <p:spPr>
+          <a:xfrm>
+            <a:off x="304800" y="190500"/>
+            <a:ext cx="1365377" cy="1397000"/>
+          </a:xfrm>
+          <a:prstGeom prst="rect">
+            <a:avLst/>
+          </a:prstGeom>
+          <a:noFill/>
+        </p:spPr>
+        <p:txBody>
+          <a:bodyPr wrap="square" lIns="0" rIns="0" tIns="0" bIns="0">
+            <a:noAutofit/>
+          </a:bodyPr>
+          <a:lstStyle/>
+          <a:p>
+            <a:pPr hangingPunct="0"/>
+            <a:r>
+              <a:rPr sz="2150" lang="ja-JP">
+                <a:latin typeface="Hiragino Sans"/>
+                <a:ea typeface="Hiragino Sans"/>
+              </a:rPr>
+              <a:t>あ、いう、え</a:t>
+            </a:r>
+          </a:p>
+        </p:txBody>
+      </p:sp>
+    </p:spTree>
+  </p:cSld>
+  <p:clrMapOvr>
+    <a:masterClrMapping/>
+  </p:clrMapOvr>
+</p:sld>
+</file>
+
+<file path=ppt/slides/slide52.xml><?xml version="1.0" encoding="utf-8"?>
+<p:sld xmlns:a="http://schemas.openxmlformats.org/drawingml/2006/main" xmlns:p="http://schemas.openxmlformats.org/presentationml/2006/main" xmlns:r="http://schemas.openxmlformats.org/officeDocument/2006/relationships">
+  <p:cSld>
+    <p:spTree>
+      <p:nvGrpSpPr>
+        <p:cNvPr id="1" name=""/>
+        <p:cNvGrpSpPr/>
+        <p:nvPr/>
+      </p:nvGrpSpPr>
+      <p:grpSpPr/>
+      <p:sp>
+        <p:nvSpPr>
+          <p:cNvPr id="2" name="TextBox 1"/>
+          <p:cNvSpPr txBox="1"/>
+          <p:nvPr/>
+        </p:nvSpPr>
+        <p:spPr>
+          <a:xfrm>
+            <a:off x="304800" y="190500"/>
+            <a:ext cx="1365504" cy="1397000"/>
+          </a:xfrm>
+          <a:prstGeom prst="rect">
+            <a:avLst/>
+          </a:prstGeom>
+          <a:noFill/>
+        </p:spPr>
+        <p:txBody>
+          <a:bodyPr wrap="square" lIns="0" rIns="0" tIns="0" bIns="0">
+            <a:noAutofit/>
+          </a:bodyPr>
+          <a:lstStyle/>
+          <a:p>
+            <a:pPr hangingPunct="0"/>
+            <a:r>
+              <a:rPr sz="2150" lang="ja-JP">
+                <a:latin typeface="Hiragino Sans"/>
+                <a:ea typeface="Hiragino Sans"/>
+              </a:rPr>
+              <a:t>あ、いう、え</a:t>
+            </a:r>
+          </a:p>
+        </p:txBody>
+      </p:sp>
+    </p:spTree>
+  </p:cSld>
+  <p:clrMapOvr>
+    <a:masterClrMapping/>
+  </p:clrMapOvr>
+</p:sld>
+</file>
+
+<file path=ppt/slides/slide53.xml><?xml version="1.0" encoding="utf-8"?>
+<p:sld xmlns:a="http://schemas.openxmlformats.org/drawingml/2006/main" xmlns:p="http://schemas.openxmlformats.org/presentationml/2006/main" xmlns:r="http://schemas.openxmlformats.org/officeDocument/2006/relationships">
+  <p:cSld>
+    <p:spTree>
+      <p:nvGrpSpPr>
+        <p:cNvPr id="1" name=""/>
+        <p:cNvGrpSpPr/>
+        <p:nvPr/>
+      </p:nvGrpSpPr>
+      <p:grpSpPr/>
+      <p:sp>
+        <p:nvSpPr>
+          <p:cNvPr id="2" name="TextBox 1"/>
+          <p:cNvSpPr txBox="1"/>
+          <p:nvPr/>
+        </p:nvSpPr>
+        <p:spPr>
+          <a:xfrm>
+            <a:off x="304800" y="190500"/>
+            <a:ext cx="1365885" cy="1397000"/>
+          </a:xfrm>
+          <a:prstGeom prst="rect">
+            <a:avLst/>
+          </a:prstGeom>
+          <a:noFill/>
+        </p:spPr>
+        <p:txBody>
+          <a:bodyPr wrap="square" lIns="0" rIns="0" tIns="0" bIns="0">
+            <a:noAutofit/>
+          </a:bodyPr>
+          <a:lstStyle/>
+          <a:p>
+            <a:pPr hangingPunct="0"/>
+            <a:r>
+              <a:rPr sz="2150" lang="ja-JP">
+                <a:latin typeface="Hiragino Sans"/>
+                <a:ea typeface="Hiragino Sans"/>
+              </a:rPr>
+              <a:t>あ、いう、え</a:t>
+            </a:r>
+          </a:p>
+        </p:txBody>
+      </p:sp>
+    </p:spTree>
+  </p:cSld>
+  <p:clrMapOvr>
+    <a:masterClrMapping/>
+  </p:clrMapOvr>
+</p:sld>
+</file>
+
+<file path=ppt/slides/slide54.xml><?xml version="1.0" encoding="utf-8"?>
+<p:sld xmlns:a="http://schemas.openxmlformats.org/drawingml/2006/main" xmlns:p="http://schemas.openxmlformats.org/presentationml/2006/main" xmlns:r="http://schemas.openxmlformats.org/officeDocument/2006/relationships">
+  <p:cSld>
+    <p:spTree>
+      <p:nvGrpSpPr>
+        <p:cNvPr id="1" name=""/>
+        <p:cNvGrpSpPr/>
+        <p:nvPr/>
+      </p:nvGrpSpPr>
+      <p:grpSpPr/>
+      <p:sp>
+        <p:nvSpPr>
+          <p:cNvPr id="2" name="TextBox 1"/>
+          <p:cNvSpPr txBox="1"/>
+          <p:nvPr/>
+        </p:nvSpPr>
+        <p:spPr>
+          <a:xfrm>
+            <a:off x="304800" y="190500"/>
+            <a:ext cx="1366520" cy="1397000"/>
+          </a:xfrm>
+          <a:prstGeom prst="rect">
+            <a:avLst/>
+          </a:prstGeom>
+          <a:noFill/>
+        </p:spPr>
+        <p:txBody>
+          <a:bodyPr wrap="square" lIns="0" rIns="0" tIns="0" bIns="0">
+            <a:noAutofit/>
+          </a:bodyPr>
+          <a:lstStyle/>
+          <a:p>
+            <a:pPr hangingPunct="0"/>
+            <a:r>
+              <a:rPr sz="2150" lang="ja-JP">
+                <a:latin typeface="Hiragino Sans"/>
+                <a:ea typeface="Hiragino Sans"/>
+              </a:rPr>
+              <a:t>あ、いう、え</a:t>
+            </a:r>
+          </a:p>
+        </p:txBody>
+      </p:sp>
+    </p:spTree>
+  </p:cSld>
+  <p:clrMapOvr>
+    <a:masterClrMapping/>
+  </p:clrMapOvr>
+</p:sld>
+</file>
+
+<file path=ppt/slides/slide55.xml><?xml version="1.0" encoding="utf-8"?>
+<p:sld xmlns:a="http://schemas.openxmlformats.org/drawingml/2006/main" xmlns:p="http://schemas.openxmlformats.org/presentationml/2006/main" xmlns:r="http://schemas.openxmlformats.org/officeDocument/2006/relationships">
+  <p:cSld>
+    <p:spTree>
+      <p:nvGrpSpPr>
+        <p:cNvPr id="1" name=""/>
+        <p:cNvGrpSpPr/>
+        <p:nvPr/>
+      </p:nvGrpSpPr>
+      <p:grpSpPr/>
+      <p:sp>
+        <p:nvSpPr>
+          <p:cNvPr id="2" name="TextBox 1"/>
+          <p:cNvSpPr txBox="1"/>
+          <p:nvPr/>
+        </p:nvSpPr>
+        <p:spPr>
+          <a:xfrm>
+            <a:off x="304800" y="190500"/>
             <a:ext cx="1827530" cy="1397000"/>
           </a:xfrm>
           <a:prstGeom prst="rect">
@@ -3683,26 +5777,230 @@
 </p:sld>
 </file>
 
-<file path=ppt/slides/slide2.xml><?xml version="1.0" encoding="utf-8"?>
-<p:sld xmlns:a="http://schemas.openxmlformats.org/drawingml/2006/main" xmlns:p="http://schemas.openxmlformats.org/presentationml/2006/main" xmlns:r="http://schemas.openxmlformats.org/officeDocument/2006/relationships">
-  <p:cSld>
-    <p:spTree>
-      <p:nvGrpSpPr>
-        <p:cNvPr id="1" name=""/>
-        <p:cNvGrpSpPr/>
-        <p:nvPr/>
-      </p:nvGrpSpPr>
-      <p:grpSpPr/>
-      <p:sp>
-        <p:nvSpPr>
-          <p:cNvPr id="2" name="TextBox 1"/>
-          <p:cNvSpPr txBox="1"/>
-          <p:nvPr/>
-        </p:nvSpPr>
-        <p:spPr>
-          <a:xfrm>
-            <a:off x="304800" y="190500"/>
-            <a:ext cx="1370965" cy="1397000"/>
+<file path=ppt/slides/slide56.xml><?xml version="1.0" encoding="utf-8"?>
+<p:sld xmlns:a="http://schemas.openxmlformats.org/drawingml/2006/main" xmlns:p="http://schemas.openxmlformats.org/presentationml/2006/main" xmlns:r="http://schemas.openxmlformats.org/officeDocument/2006/relationships">
+  <p:cSld>
+    <p:spTree>
+      <p:nvGrpSpPr>
+        <p:cNvPr id="1" name=""/>
+        <p:cNvGrpSpPr/>
+        <p:nvPr/>
+      </p:nvGrpSpPr>
+      <p:grpSpPr/>
+      <p:sp>
+        <p:nvSpPr>
+          <p:cNvPr id="2" name="TextBox 1"/>
+          <p:cNvSpPr txBox="1"/>
+          <p:nvPr/>
+        </p:nvSpPr>
+        <p:spPr>
+          <a:xfrm>
+            <a:off x="304800" y="190500"/>
+            <a:ext cx="1828164" cy="1397000"/>
+          </a:xfrm>
+          <a:prstGeom prst="rect">
+            <a:avLst/>
+          </a:prstGeom>
+          <a:noFill/>
+        </p:spPr>
+        <p:txBody>
+          <a:bodyPr wrap="square" lIns="0" rIns="0" tIns="0" bIns="0">
+            <a:noAutofit/>
+          </a:bodyPr>
+          <a:lstStyle/>
+          <a:p>
+            <a:pPr hangingPunct="0"/>
+            <a:r>
+              <a:rPr sz="2400" lang="ja-JP">
+                <a:latin typeface="Hiragino Sans"/>
+                <a:ea typeface="Hiragino Sans"/>
+              </a:rPr>
+              <a:t>あいうえおか</a:t>
+            </a:r>
+          </a:p>
+        </p:txBody>
+      </p:sp>
+    </p:spTree>
+  </p:cSld>
+  <p:clrMapOvr>
+    <a:masterClrMapping/>
+  </p:clrMapOvr>
+</p:sld>
+</file>
+
+<file path=ppt/slides/slide57.xml><?xml version="1.0" encoding="utf-8"?>
+<p:sld xmlns:a="http://schemas.openxmlformats.org/drawingml/2006/main" xmlns:p="http://schemas.openxmlformats.org/presentationml/2006/main" xmlns:r="http://schemas.openxmlformats.org/officeDocument/2006/relationships">
+  <p:cSld>
+    <p:spTree>
+      <p:nvGrpSpPr>
+        <p:cNvPr id="1" name=""/>
+        <p:cNvGrpSpPr/>
+        <p:nvPr/>
+      </p:nvGrpSpPr>
+      <p:grpSpPr/>
+      <p:sp>
+        <p:nvSpPr>
+          <p:cNvPr id="2" name="TextBox 1"/>
+          <p:cNvSpPr txBox="1"/>
+          <p:nvPr/>
+        </p:nvSpPr>
+        <p:spPr>
+          <a:xfrm>
+            <a:off x="304800" y="190500"/>
+            <a:ext cx="1828545" cy="1397000"/>
+          </a:xfrm>
+          <a:prstGeom prst="rect">
+            <a:avLst/>
+          </a:prstGeom>
+          <a:noFill/>
+        </p:spPr>
+        <p:txBody>
+          <a:bodyPr wrap="square" lIns="0" rIns="0" tIns="0" bIns="0">
+            <a:noAutofit/>
+          </a:bodyPr>
+          <a:lstStyle/>
+          <a:p>
+            <a:pPr hangingPunct="0"/>
+            <a:r>
+              <a:rPr sz="2400" lang="ja-JP">
+                <a:latin typeface="Hiragino Sans"/>
+                <a:ea typeface="Hiragino Sans"/>
+              </a:rPr>
+              <a:t>あいうえおか</a:t>
+            </a:r>
+          </a:p>
+        </p:txBody>
+      </p:sp>
+    </p:spTree>
+  </p:cSld>
+  <p:clrMapOvr>
+    <a:masterClrMapping/>
+  </p:clrMapOvr>
+</p:sld>
+</file>
+
+<file path=ppt/slides/slide58.xml><?xml version="1.0" encoding="utf-8"?>
+<p:sld xmlns:a="http://schemas.openxmlformats.org/drawingml/2006/main" xmlns:p="http://schemas.openxmlformats.org/presentationml/2006/main" xmlns:r="http://schemas.openxmlformats.org/officeDocument/2006/relationships">
+  <p:cSld>
+    <p:spTree>
+      <p:nvGrpSpPr>
+        <p:cNvPr id="1" name=""/>
+        <p:cNvGrpSpPr/>
+        <p:nvPr/>
+      </p:nvGrpSpPr>
+      <p:grpSpPr/>
+      <p:sp>
+        <p:nvSpPr>
+          <p:cNvPr id="2" name="TextBox 1"/>
+          <p:cNvSpPr txBox="1"/>
+          <p:nvPr/>
+        </p:nvSpPr>
+        <p:spPr>
+          <a:xfrm>
+            <a:off x="304800" y="190500"/>
+            <a:ext cx="1828673" cy="1397000"/>
+          </a:xfrm>
+          <a:prstGeom prst="rect">
+            <a:avLst/>
+          </a:prstGeom>
+          <a:noFill/>
+        </p:spPr>
+        <p:txBody>
+          <a:bodyPr wrap="square" lIns="0" rIns="0" tIns="0" bIns="0">
+            <a:noAutofit/>
+          </a:bodyPr>
+          <a:lstStyle/>
+          <a:p>
+            <a:pPr hangingPunct="0"/>
+            <a:r>
+              <a:rPr sz="2400" lang="ja-JP">
+                <a:latin typeface="Hiragino Sans"/>
+                <a:ea typeface="Hiragino Sans"/>
+              </a:rPr>
+              <a:t>あいうえおか</a:t>
+            </a:r>
+          </a:p>
+        </p:txBody>
+      </p:sp>
+    </p:spTree>
+  </p:cSld>
+  <p:clrMapOvr>
+    <a:masterClrMapping/>
+  </p:clrMapOvr>
+</p:sld>
+</file>
+
+<file path=ppt/slides/slide59.xml><?xml version="1.0" encoding="utf-8"?>
+<p:sld xmlns:a="http://schemas.openxmlformats.org/drawingml/2006/main" xmlns:p="http://schemas.openxmlformats.org/presentationml/2006/main" xmlns:r="http://schemas.openxmlformats.org/officeDocument/2006/relationships">
+  <p:cSld>
+    <p:spTree>
+      <p:nvGrpSpPr>
+        <p:cNvPr id="1" name=""/>
+        <p:cNvGrpSpPr/>
+        <p:nvPr/>
+      </p:nvGrpSpPr>
+      <p:grpSpPr/>
+      <p:sp>
+        <p:nvSpPr>
+          <p:cNvPr id="2" name="TextBox 1"/>
+          <p:cNvSpPr txBox="1"/>
+          <p:nvPr/>
+        </p:nvSpPr>
+        <p:spPr>
+          <a:xfrm>
+            <a:off x="304800" y="190500"/>
+            <a:ext cx="1828800" cy="1397000"/>
+          </a:xfrm>
+          <a:prstGeom prst="rect">
+            <a:avLst/>
+          </a:prstGeom>
+          <a:noFill/>
+        </p:spPr>
+        <p:txBody>
+          <a:bodyPr wrap="square" lIns="0" rIns="0" tIns="0" bIns="0">
+            <a:noAutofit/>
+          </a:bodyPr>
+          <a:lstStyle/>
+          <a:p>
+            <a:pPr hangingPunct="0"/>
+            <a:r>
+              <a:rPr sz="2400" lang="ja-JP">
+                <a:latin typeface="Hiragino Sans"/>
+                <a:ea typeface="Hiragino Sans"/>
+              </a:rPr>
+              <a:t>あいうえおか</a:t>
+            </a:r>
+          </a:p>
+        </p:txBody>
+      </p:sp>
+    </p:spTree>
+  </p:cSld>
+  <p:clrMapOvr>
+    <a:masterClrMapping/>
+  </p:clrMapOvr>
+</p:sld>
+</file>
+
+<file path=ppt/slides/slide6.xml><?xml version="1.0" encoding="utf-8"?>
+<p:sld xmlns:a="http://schemas.openxmlformats.org/drawingml/2006/main" xmlns:p="http://schemas.openxmlformats.org/presentationml/2006/main" xmlns:r="http://schemas.openxmlformats.org/officeDocument/2006/relationships">
+  <p:cSld>
+    <p:spTree>
+      <p:nvGrpSpPr>
+        <p:cNvPr id="1" name=""/>
+        <p:cNvGrpSpPr/>
+        <p:nvPr/>
+      </p:nvGrpSpPr>
+      <p:grpSpPr/>
+      <p:sp>
+        <p:nvSpPr>
+          <p:cNvPr id="2" name="TextBox 1"/>
+          <p:cNvSpPr txBox="1"/>
+          <p:nvPr/>
+        </p:nvSpPr>
+        <p:spPr>
+          <a:xfrm>
+            <a:off x="304800" y="190500"/>
+            <a:ext cx="1371727" cy="1397000"/>
           </a:xfrm>
           <a:prstGeom prst="rect">
             <a:avLst/>
@@ -3734,26 +6032,26 @@
 </p:sld>
 </file>
 
-<file path=ppt/slides/slide20.xml><?xml version="1.0" encoding="utf-8"?>
-<p:sld xmlns:a="http://schemas.openxmlformats.org/drawingml/2006/main" xmlns:p="http://schemas.openxmlformats.org/presentationml/2006/main" xmlns:r="http://schemas.openxmlformats.org/officeDocument/2006/relationships">
-  <p:cSld>
-    <p:spTree>
-      <p:nvGrpSpPr>
-        <p:cNvPr id="1" name=""/>
-        <p:cNvGrpSpPr/>
-        <p:nvPr/>
-      </p:nvGrpSpPr>
-      <p:grpSpPr/>
-      <p:sp>
-        <p:nvSpPr>
-          <p:cNvPr id="2" name="TextBox 1"/>
-          <p:cNvSpPr txBox="1"/>
-          <p:nvPr/>
-        </p:nvSpPr>
-        <p:spPr>
-          <a:xfrm>
-            <a:off x="304800" y="190500"/>
-            <a:ext cx="1828164" cy="1397000"/>
+<file path=ppt/slides/slide60.xml><?xml version="1.0" encoding="utf-8"?>
+<p:sld xmlns:a="http://schemas.openxmlformats.org/drawingml/2006/main" xmlns:p="http://schemas.openxmlformats.org/presentationml/2006/main" xmlns:r="http://schemas.openxmlformats.org/officeDocument/2006/relationships">
+  <p:cSld>
+    <p:spTree>
+      <p:nvGrpSpPr>
+        <p:cNvPr id="1" name=""/>
+        <p:cNvGrpSpPr/>
+        <p:nvPr/>
+      </p:nvGrpSpPr>
+      <p:grpSpPr/>
+      <p:sp>
+        <p:nvSpPr>
+          <p:cNvPr id="2" name="TextBox 1"/>
+          <p:cNvSpPr txBox="1"/>
+          <p:nvPr/>
+        </p:nvSpPr>
+        <p:spPr>
+          <a:xfrm>
+            <a:off x="304800" y="190500"/>
+            <a:ext cx="1828927" cy="1397000"/>
           </a:xfrm>
           <a:prstGeom prst="rect">
             <a:avLst/>
@@ -3785,26 +6083,26 @@
 </p:sld>
 </file>
 
-<file path=ppt/slides/slide21.xml><?xml version="1.0" encoding="utf-8"?>
-<p:sld xmlns:a="http://schemas.openxmlformats.org/drawingml/2006/main" xmlns:p="http://schemas.openxmlformats.org/presentationml/2006/main" xmlns:r="http://schemas.openxmlformats.org/officeDocument/2006/relationships">
-  <p:cSld>
-    <p:spTree>
-      <p:nvGrpSpPr>
-        <p:cNvPr id="1" name=""/>
-        <p:cNvGrpSpPr/>
-        <p:nvPr/>
-      </p:nvGrpSpPr>
-      <p:grpSpPr/>
-      <p:sp>
-        <p:nvSpPr>
-          <p:cNvPr id="2" name="TextBox 1"/>
-          <p:cNvSpPr txBox="1"/>
-          <p:nvPr/>
-        </p:nvSpPr>
-        <p:spPr>
-          <a:xfrm>
-            <a:off x="304800" y="190500"/>
-            <a:ext cx="1828545" cy="1397000"/>
+<file path=ppt/slides/slide61.xml><?xml version="1.0" encoding="utf-8"?>
+<p:sld xmlns:a="http://schemas.openxmlformats.org/drawingml/2006/main" xmlns:p="http://schemas.openxmlformats.org/presentationml/2006/main" xmlns:r="http://schemas.openxmlformats.org/officeDocument/2006/relationships">
+  <p:cSld>
+    <p:spTree>
+      <p:nvGrpSpPr>
+        <p:cNvPr id="1" name=""/>
+        <p:cNvGrpSpPr/>
+        <p:nvPr/>
+      </p:nvGrpSpPr>
+      <p:grpSpPr/>
+      <p:sp>
+        <p:nvSpPr>
+          <p:cNvPr id="2" name="TextBox 1"/>
+          <p:cNvSpPr txBox="1"/>
+          <p:nvPr/>
+        </p:nvSpPr>
+        <p:spPr>
+          <a:xfrm>
+            <a:off x="304800" y="190500"/>
+            <a:ext cx="1829054" cy="1397000"/>
           </a:xfrm>
           <a:prstGeom prst="rect">
             <a:avLst/>
@@ -3836,26 +6134,26 @@
 </p:sld>
 </file>
 
-<file path=ppt/slides/slide22.xml><?xml version="1.0" encoding="utf-8"?>
-<p:sld xmlns:a="http://schemas.openxmlformats.org/drawingml/2006/main" xmlns:p="http://schemas.openxmlformats.org/presentationml/2006/main" xmlns:r="http://schemas.openxmlformats.org/officeDocument/2006/relationships">
-  <p:cSld>
-    <p:spTree>
-      <p:nvGrpSpPr>
-        <p:cNvPr id="1" name=""/>
-        <p:cNvGrpSpPr/>
-        <p:nvPr/>
-      </p:nvGrpSpPr>
-      <p:grpSpPr/>
-      <p:sp>
-        <p:nvSpPr>
-          <p:cNvPr id="2" name="TextBox 1"/>
-          <p:cNvSpPr txBox="1"/>
-          <p:nvPr/>
-        </p:nvSpPr>
-        <p:spPr>
-          <a:xfrm>
-            <a:off x="304800" y="190500"/>
-            <a:ext cx="1828673" cy="1397000"/>
+<file path=ppt/slides/slide62.xml><?xml version="1.0" encoding="utf-8"?>
+<p:sld xmlns:a="http://schemas.openxmlformats.org/drawingml/2006/main" xmlns:p="http://schemas.openxmlformats.org/presentationml/2006/main" xmlns:r="http://schemas.openxmlformats.org/officeDocument/2006/relationships">
+  <p:cSld>
+    <p:spTree>
+      <p:nvGrpSpPr>
+        <p:cNvPr id="1" name=""/>
+        <p:cNvGrpSpPr/>
+        <p:nvPr/>
+      </p:nvGrpSpPr>
+      <p:grpSpPr/>
+      <p:sp>
+        <p:nvSpPr>
+          <p:cNvPr id="2" name="TextBox 1"/>
+          <p:cNvSpPr txBox="1"/>
+          <p:nvPr/>
+        </p:nvSpPr>
+        <p:spPr>
+          <a:xfrm>
+            <a:off x="304800" y="190500"/>
+            <a:ext cx="1829435" cy="1397000"/>
           </a:xfrm>
           <a:prstGeom prst="rect">
             <a:avLst/>
@@ -3887,26 +6185,26 @@
 </p:sld>
 </file>
 
-<file path=ppt/slides/slide23.xml><?xml version="1.0" encoding="utf-8"?>
-<p:sld xmlns:a="http://schemas.openxmlformats.org/drawingml/2006/main" xmlns:p="http://schemas.openxmlformats.org/presentationml/2006/main" xmlns:r="http://schemas.openxmlformats.org/officeDocument/2006/relationships">
-  <p:cSld>
-    <p:spTree>
-      <p:nvGrpSpPr>
-        <p:cNvPr id="1" name=""/>
-        <p:cNvGrpSpPr/>
-        <p:nvPr/>
-      </p:nvGrpSpPr>
-      <p:grpSpPr/>
-      <p:sp>
-        <p:nvSpPr>
-          <p:cNvPr id="2" name="TextBox 1"/>
-          <p:cNvSpPr txBox="1"/>
-          <p:nvPr/>
-        </p:nvSpPr>
-        <p:spPr>
-          <a:xfrm>
-            <a:off x="304800" y="190500"/>
-            <a:ext cx="1828800" cy="1397000"/>
+<file path=ppt/slides/slide63.xml><?xml version="1.0" encoding="utf-8"?>
+<p:sld xmlns:a="http://schemas.openxmlformats.org/drawingml/2006/main" xmlns:p="http://schemas.openxmlformats.org/presentationml/2006/main" xmlns:r="http://schemas.openxmlformats.org/officeDocument/2006/relationships">
+  <p:cSld>
+    <p:spTree>
+      <p:nvGrpSpPr>
+        <p:cNvPr id="1" name=""/>
+        <p:cNvGrpSpPr/>
+        <p:nvPr/>
+      </p:nvGrpSpPr>
+      <p:grpSpPr/>
+      <p:sp>
+        <p:nvSpPr>
+          <p:cNvPr id="2" name="TextBox 1"/>
+          <p:cNvSpPr txBox="1"/>
+          <p:nvPr/>
+        </p:nvSpPr>
+        <p:spPr>
+          <a:xfrm>
+            <a:off x="304800" y="190500"/>
+            <a:ext cx="1830070" cy="1397000"/>
           </a:xfrm>
           <a:prstGeom prst="rect">
             <a:avLst/>
@@ -3938,26 +6236,26 @@
 </p:sld>
 </file>
 
-<file path=ppt/slides/slide24.xml><?xml version="1.0" encoding="utf-8"?>
-<p:sld xmlns:a="http://schemas.openxmlformats.org/drawingml/2006/main" xmlns:p="http://schemas.openxmlformats.org/presentationml/2006/main" xmlns:r="http://schemas.openxmlformats.org/officeDocument/2006/relationships">
-  <p:cSld>
-    <p:spTree>
-      <p:nvGrpSpPr>
-        <p:cNvPr id="1" name=""/>
-        <p:cNvGrpSpPr/>
-        <p:nvPr/>
-      </p:nvGrpSpPr>
-      <p:grpSpPr/>
-      <p:sp>
-        <p:nvSpPr>
-          <p:cNvPr id="2" name="TextBox 1"/>
-          <p:cNvSpPr txBox="1"/>
-          <p:nvPr/>
-        </p:nvSpPr>
-        <p:spPr>
-          <a:xfrm>
-            <a:off x="304800" y="190500"/>
-            <a:ext cx="1828927" cy="1397000"/>
+<file path=ppt/slides/slide64.xml><?xml version="1.0" encoding="utf-8"?>
+<p:sld xmlns:a="http://schemas.openxmlformats.org/drawingml/2006/main" xmlns:p="http://schemas.openxmlformats.org/presentationml/2006/main" xmlns:r="http://schemas.openxmlformats.org/officeDocument/2006/relationships">
+  <p:cSld>
+    <p:spTree>
+      <p:nvGrpSpPr>
+        <p:cNvPr id="1" name=""/>
+        <p:cNvGrpSpPr/>
+        <p:nvPr/>
+      </p:nvGrpSpPr>
+      <p:grpSpPr/>
+      <p:sp>
+        <p:nvSpPr>
+          <p:cNvPr id="2" name="TextBox 1"/>
+          <p:cNvSpPr txBox="1"/>
+          <p:nvPr/>
+        </p:nvSpPr>
+        <p:spPr>
+          <a:xfrm>
+            <a:off x="304800" y="190500"/>
+            <a:ext cx="1522730" cy="1397000"/>
           </a:xfrm>
           <a:prstGeom prst="rect">
             <a:avLst/>
@@ -3976,6 +6274,312 @@
                 <a:latin typeface="Hiragino Sans"/>
                 <a:ea typeface="Hiragino Sans"/>
               </a:rPr>
+              <a:t>あ、いう、え</a:t>
+            </a:r>
+          </a:p>
+        </p:txBody>
+      </p:sp>
+    </p:spTree>
+  </p:cSld>
+  <p:clrMapOvr>
+    <a:masterClrMapping/>
+  </p:clrMapOvr>
+</p:sld>
+</file>
+
+<file path=ppt/slides/slide65.xml><?xml version="1.0" encoding="utf-8"?>
+<p:sld xmlns:a="http://schemas.openxmlformats.org/drawingml/2006/main" xmlns:p="http://schemas.openxmlformats.org/presentationml/2006/main" xmlns:r="http://schemas.openxmlformats.org/officeDocument/2006/relationships">
+  <p:cSld>
+    <p:spTree>
+      <p:nvGrpSpPr>
+        <p:cNvPr id="1" name=""/>
+        <p:cNvGrpSpPr/>
+        <p:nvPr/>
+      </p:nvGrpSpPr>
+      <p:grpSpPr/>
+      <p:sp>
+        <p:nvSpPr>
+          <p:cNvPr id="2" name="TextBox 1"/>
+          <p:cNvSpPr txBox="1"/>
+          <p:nvPr/>
+        </p:nvSpPr>
+        <p:spPr>
+          <a:xfrm>
+            <a:off x="304800" y="190500"/>
+            <a:ext cx="1523365" cy="1397000"/>
+          </a:xfrm>
+          <a:prstGeom prst="rect">
+            <a:avLst/>
+          </a:prstGeom>
+          <a:noFill/>
+        </p:spPr>
+        <p:txBody>
+          <a:bodyPr wrap="square" lIns="0" rIns="0" tIns="0" bIns="0">
+            <a:noAutofit/>
+          </a:bodyPr>
+          <a:lstStyle/>
+          <a:p>
+            <a:pPr hangingPunct="0"/>
+            <a:r>
+              <a:rPr sz="2400" lang="ja-JP">
+                <a:latin typeface="Hiragino Sans"/>
+                <a:ea typeface="Hiragino Sans"/>
+              </a:rPr>
+              <a:t>あ、いう、え</a:t>
+            </a:r>
+          </a:p>
+        </p:txBody>
+      </p:sp>
+    </p:spTree>
+  </p:cSld>
+  <p:clrMapOvr>
+    <a:masterClrMapping/>
+  </p:clrMapOvr>
+</p:sld>
+</file>
+
+<file path=ppt/slides/slide66.xml><?xml version="1.0" encoding="utf-8"?>
+<p:sld xmlns:a="http://schemas.openxmlformats.org/drawingml/2006/main" xmlns:p="http://schemas.openxmlformats.org/presentationml/2006/main" xmlns:r="http://schemas.openxmlformats.org/officeDocument/2006/relationships">
+  <p:cSld>
+    <p:spTree>
+      <p:nvGrpSpPr>
+        <p:cNvPr id="1" name=""/>
+        <p:cNvGrpSpPr/>
+        <p:nvPr/>
+      </p:nvGrpSpPr>
+      <p:grpSpPr/>
+      <p:sp>
+        <p:nvSpPr>
+          <p:cNvPr id="2" name="TextBox 1"/>
+          <p:cNvSpPr txBox="1"/>
+          <p:nvPr/>
+        </p:nvSpPr>
+        <p:spPr>
+          <a:xfrm>
+            <a:off x="304800" y="190500"/>
+            <a:ext cx="1523746" cy="1397000"/>
+          </a:xfrm>
+          <a:prstGeom prst="rect">
+            <a:avLst/>
+          </a:prstGeom>
+          <a:noFill/>
+        </p:spPr>
+        <p:txBody>
+          <a:bodyPr wrap="square" lIns="0" rIns="0" tIns="0" bIns="0">
+            <a:noAutofit/>
+          </a:bodyPr>
+          <a:lstStyle/>
+          <a:p>
+            <a:pPr hangingPunct="0"/>
+            <a:r>
+              <a:rPr sz="2400" lang="ja-JP">
+                <a:latin typeface="Hiragino Sans"/>
+                <a:ea typeface="Hiragino Sans"/>
+              </a:rPr>
+              <a:t>あ、いう、え</a:t>
+            </a:r>
+          </a:p>
+        </p:txBody>
+      </p:sp>
+    </p:spTree>
+  </p:cSld>
+  <p:clrMapOvr>
+    <a:masterClrMapping/>
+  </p:clrMapOvr>
+</p:sld>
+</file>
+
+<file path=ppt/slides/slide67.xml><?xml version="1.0" encoding="utf-8"?>
+<p:sld xmlns:a="http://schemas.openxmlformats.org/drawingml/2006/main" xmlns:p="http://schemas.openxmlformats.org/presentationml/2006/main" xmlns:r="http://schemas.openxmlformats.org/officeDocument/2006/relationships">
+  <p:cSld>
+    <p:spTree>
+      <p:nvGrpSpPr>
+        <p:cNvPr id="1" name=""/>
+        <p:cNvGrpSpPr/>
+        <p:nvPr/>
+      </p:nvGrpSpPr>
+      <p:grpSpPr/>
+      <p:sp>
+        <p:nvSpPr>
+          <p:cNvPr id="2" name="TextBox 1"/>
+          <p:cNvSpPr txBox="1"/>
+          <p:nvPr/>
+        </p:nvSpPr>
+        <p:spPr>
+          <a:xfrm>
+            <a:off x="304800" y="190500"/>
+            <a:ext cx="1523873" cy="1397000"/>
+          </a:xfrm>
+          <a:prstGeom prst="rect">
+            <a:avLst/>
+          </a:prstGeom>
+          <a:noFill/>
+        </p:spPr>
+        <p:txBody>
+          <a:bodyPr wrap="square" lIns="0" rIns="0" tIns="0" bIns="0">
+            <a:noAutofit/>
+          </a:bodyPr>
+          <a:lstStyle/>
+          <a:p>
+            <a:pPr hangingPunct="0"/>
+            <a:r>
+              <a:rPr sz="2400" lang="ja-JP">
+                <a:latin typeface="Hiragino Sans"/>
+                <a:ea typeface="Hiragino Sans"/>
+              </a:rPr>
+              <a:t>あ、いう、え</a:t>
+            </a:r>
+          </a:p>
+        </p:txBody>
+      </p:sp>
+    </p:spTree>
+  </p:cSld>
+  <p:clrMapOvr>
+    <a:masterClrMapping/>
+  </p:clrMapOvr>
+</p:sld>
+</file>
+
+<file path=ppt/slides/slide68.xml><?xml version="1.0" encoding="utf-8"?>
+<p:sld xmlns:a="http://schemas.openxmlformats.org/drawingml/2006/main" xmlns:p="http://schemas.openxmlformats.org/presentationml/2006/main" xmlns:r="http://schemas.openxmlformats.org/officeDocument/2006/relationships">
+  <p:cSld>
+    <p:spTree>
+      <p:nvGrpSpPr>
+        <p:cNvPr id="1" name=""/>
+        <p:cNvGrpSpPr/>
+        <p:nvPr/>
+      </p:nvGrpSpPr>
+      <p:grpSpPr/>
+      <p:sp>
+        <p:nvSpPr>
+          <p:cNvPr id="2" name="TextBox 1"/>
+          <p:cNvSpPr txBox="1"/>
+          <p:nvPr/>
+        </p:nvSpPr>
+        <p:spPr>
+          <a:xfrm>
+            <a:off x="304800" y="190500"/>
+            <a:ext cx="1524000" cy="1397000"/>
+          </a:xfrm>
+          <a:prstGeom prst="rect">
+            <a:avLst/>
+          </a:prstGeom>
+          <a:noFill/>
+        </p:spPr>
+        <p:txBody>
+          <a:bodyPr wrap="square" lIns="0" rIns="0" tIns="0" bIns="0">
+            <a:noAutofit/>
+          </a:bodyPr>
+          <a:lstStyle/>
+          <a:p>
+            <a:pPr hangingPunct="0"/>
+            <a:r>
+              <a:rPr sz="2400" lang="ja-JP">
+                <a:latin typeface="Hiragino Sans"/>
+                <a:ea typeface="Hiragino Sans"/>
+              </a:rPr>
+              <a:t>あ、いう、え</a:t>
+            </a:r>
+          </a:p>
+        </p:txBody>
+      </p:sp>
+    </p:spTree>
+  </p:cSld>
+  <p:clrMapOvr>
+    <a:masterClrMapping/>
+  </p:clrMapOvr>
+</p:sld>
+</file>
+
+<file path=ppt/slides/slide69.xml><?xml version="1.0" encoding="utf-8"?>
+<p:sld xmlns:a="http://schemas.openxmlformats.org/drawingml/2006/main" xmlns:p="http://schemas.openxmlformats.org/presentationml/2006/main" xmlns:r="http://schemas.openxmlformats.org/officeDocument/2006/relationships">
+  <p:cSld>
+    <p:spTree>
+      <p:nvGrpSpPr>
+        <p:cNvPr id="1" name=""/>
+        <p:cNvGrpSpPr/>
+        <p:nvPr/>
+      </p:nvGrpSpPr>
+      <p:grpSpPr/>
+      <p:sp>
+        <p:nvSpPr>
+          <p:cNvPr id="2" name="TextBox 1"/>
+          <p:cNvSpPr txBox="1"/>
+          <p:nvPr/>
+        </p:nvSpPr>
+        <p:spPr>
+          <a:xfrm>
+            <a:off x="304800" y="190500"/>
+            <a:ext cx="1524127" cy="1397000"/>
+          </a:xfrm>
+          <a:prstGeom prst="rect">
+            <a:avLst/>
+          </a:prstGeom>
+          <a:noFill/>
+        </p:spPr>
+        <p:txBody>
+          <a:bodyPr wrap="square" lIns="0" rIns="0" tIns="0" bIns="0">
+            <a:noAutofit/>
+          </a:bodyPr>
+          <a:lstStyle/>
+          <a:p>
+            <a:pPr hangingPunct="0"/>
+            <a:r>
+              <a:rPr sz="2400" lang="ja-JP">
+                <a:latin typeface="Hiragino Sans"/>
+                <a:ea typeface="Hiragino Sans"/>
+              </a:rPr>
+              <a:t>あ、いう、え</a:t>
+            </a:r>
+          </a:p>
+        </p:txBody>
+      </p:sp>
+    </p:spTree>
+  </p:cSld>
+  <p:clrMapOvr>
+    <a:masterClrMapping/>
+  </p:clrMapOvr>
+</p:sld>
+</file>
+
+<file path=ppt/slides/slide7.xml><?xml version="1.0" encoding="utf-8"?>
+<p:sld xmlns:a="http://schemas.openxmlformats.org/drawingml/2006/main" xmlns:p="http://schemas.openxmlformats.org/presentationml/2006/main" xmlns:r="http://schemas.openxmlformats.org/officeDocument/2006/relationships">
+  <p:cSld>
+    <p:spTree>
+      <p:nvGrpSpPr>
+        <p:cNvPr id="1" name=""/>
+        <p:cNvGrpSpPr/>
+        <p:nvPr/>
+      </p:nvGrpSpPr>
+      <p:grpSpPr/>
+      <p:sp>
+        <p:nvSpPr>
+          <p:cNvPr id="2" name="TextBox 1"/>
+          <p:cNvSpPr txBox="1"/>
+          <p:nvPr/>
+        </p:nvSpPr>
+        <p:spPr>
+          <a:xfrm>
+            <a:off x="304800" y="190500"/>
+            <a:ext cx="1371854" cy="1397000"/>
+          </a:xfrm>
+          <a:prstGeom prst="rect">
+            <a:avLst/>
+          </a:prstGeom>
+          <a:noFill/>
+        </p:spPr>
+        <p:txBody>
+          <a:bodyPr wrap="square" lIns="0" rIns="0" tIns="0" bIns="0">
+            <a:noAutofit/>
+          </a:bodyPr>
+          <a:lstStyle/>
+          <a:p>
+            <a:pPr hangingPunct="0"/>
+            <a:r>
+              <a:rPr sz="1800" lang="ja-JP">
+                <a:latin typeface="Hiragino Sans"/>
+                <a:ea typeface="Hiragino Sans"/>
+              </a:rPr>
               <a:t>あいうえおか</a:t>
             </a:r>
           </a:p>
@@ -3989,26 +6593,26 @@
 </p:sld>
 </file>
 
-<file path=ppt/slides/slide25.xml><?xml version="1.0" encoding="utf-8"?>
-<p:sld xmlns:a="http://schemas.openxmlformats.org/drawingml/2006/main" xmlns:p="http://schemas.openxmlformats.org/presentationml/2006/main" xmlns:r="http://schemas.openxmlformats.org/officeDocument/2006/relationships">
-  <p:cSld>
-    <p:spTree>
-      <p:nvGrpSpPr>
-        <p:cNvPr id="1" name=""/>
-        <p:cNvGrpSpPr/>
-        <p:nvPr/>
-      </p:nvGrpSpPr>
-      <p:grpSpPr/>
-      <p:sp>
-        <p:nvSpPr>
-          <p:cNvPr id="2" name="TextBox 1"/>
-          <p:cNvSpPr txBox="1"/>
-          <p:nvPr/>
-        </p:nvSpPr>
-        <p:spPr>
-          <a:xfrm>
-            <a:off x="304800" y="190500"/>
-            <a:ext cx="1829054" cy="1397000"/>
+<file path=ppt/slides/slide70.xml><?xml version="1.0" encoding="utf-8"?>
+<p:sld xmlns:a="http://schemas.openxmlformats.org/drawingml/2006/main" xmlns:p="http://schemas.openxmlformats.org/presentationml/2006/main" xmlns:r="http://schemas.openxmlformats.org/officeDocument/2006/relationships">
+  <p:cSld>
+    <p:spTree>
+      <p:nvGrpSpPr>
+        <p:cNvPr id="1" name=""/>
+        <p:cNvGrpSpPr/>
+        <p:nvPr/>
+      </p:nvGrpSpPr>
+      <p:grpSpPr/>
+      <p:sp>
+        <p:nvSpPr>
+          <p:cNvPr id="2" name="TextBox 1"/>
+          <p:cNvSpPr txBox="1"/>
+          <p:nvPr/>
+        </p:nvSpPr>
+        <p:spPr>
+          <a:xfrm>
+            <a:off x="304800" y="190500"/>
+            <a:ext cx="1524254" cy="1397000"/>
           </a:xfrm>
           <a:prstGeom prst="rect">
             <a:avLst/>
@@ -4027,6 +6631,159 @@
                 <a:latin typeface="Hiragino Sans"/>
                 <a:ea typeface="Hiragino Sans"/>
               </a:rPr>
+              <a:t>あ、いう、え</a:t>
+            </a:r>
+          </a:p>
+        </p:txBody>
+      </p:sp>
+    </p:spTree>
+  </p:cSld>
+  <p:clrMapOvr>
+    <a:masterClrMapping/>
+  </p:clrMapOvr>
+</p:sld>
+</file>
+
+<file path=ppt/slides/slide71.xml><?xml version="1.0" encoding="utf-8"?>
+<p:sld xmlns:a="http://schemas.openxmlformats.org/drawingml/2006/main" xmlns:p="http://schemas.openxmlformats.org/presentationml/2006/main" xmlns:r="http://schemas.openxmlformats.org/officeDocument/2006/relationships">
+  <p:cSld>
+    <p:spTree>
+      <p:nvGrpSpPr>
+        <p:cNvPr id="1" name=""/>
+        <p:cNvGrpSpPr/>
+        <p:nvPr/>
+      </p:nvGrpSpPr>
+      <p:grpSpPr/>
+      <p:sp>
+        <p:nvSpPr>
+          <p:cNvPr id="2" name="TextBox 1"/>
+          <p:cNvSpPr txBox="1"/>
+          <p:nvPr/>
+        </p:nvSpPr>
+        <p:spPr>
+          <a:xfrm>
+            <a:off x="304800" y="190500"/>
+            <a:ext cx="1524635" cy="1397000"/>
+          </a:xfrm>
+          <a:prstGeom prst="rect">
+            <a:avLst/>
+          </a:prstGeom>
+          <a:noFill/>
+        </p:spPr>
+        <p:txBody>
+          <a:bodyPr wrap="square" lIns="0" rIns="0" tIns="0" bIns="0">
+            <a:noAutofit/>
+          </a:bodyPr>
+          <a:lstStyle/>
+          <a:p>
+            <a:pPr hangingPunct="0"/>
+            <a:r>
+              <a:rPr sz="2400" lang="ja-JP">
+                <a:latin typeface="Hiragino Sans"/>
+                <a:ea typeface="Hiragino Sans"/>
+              </a:rPr>
+              <a:t>あ、いう、え</a:t>
+            </a:r>
+          </a:p>
+        </p:txBody>
+      </p:sp>
+    </p:spTree>
+  </p:cSld>
+  <p:clrMapOvr>
+    <a:masterClrMapping/>
+  </p:clrMapOvr>
+</p:sld>
+</file>
+
+<file path=ppt/slides/slide72.xml><?xml version="1.0" encoding="utf-8"?>
+<p:sld xmlns:a="http://schemas.openxmlformats.org/drawingml/2006/main" xmlns:p="http://schemas.openxmlformats.org/presentationml/2006/main" xmlns:r="http://schemas.openxmlformats.org/officeDocument/2006/relationships">
+  <p:cSld>
+    <p:spTree>
+      <p:nvGrpSpPr>
+        <p:cNvPr id="1" name=""/>
+        <p:cNvGrpSpPr/>
+        <p:nvPr/>
+      </p:nvGrpSpPr>
+      <p:grpSpPr/>
+      <p:sp>
+        <p:nvSpPr>
+          <p:cNvPr id="2" name="TextBox 1"/>
+          <p:cNvSpPr txBox="1"/>
+          <p:nvPr/>
+        </p:nvSpPr>
+        <p:spPr>
+          <a:xfrm>
+            <a:off x="304800" y="190500"/>
+            <a:ext cx="1525270" cy="1397000"/>
+          </a:xfrm>
+          <a:prstGeom prst="rect">
+            <a:avLst/>
+          </a:prstGeom>
+          <a:noFill/>
+        </p:spPr>
+        <p:txBody>
+          <a:bodyPr wrap="square" lIns="0" rIns="0" tIns="0" bIns="0">
+            <a:noAutofit/>
+          </a:bodyPr>
+          <a:lstStyle/>
+          <a:p>
+            <a:pPr hangingPunct="0"/>
+            <a:r>
+              <a:rPr sz="2400" lang="ja-JP">
+                <a:latin typeface="Hiragino Sans"/>
+                <a:ea typeface="Hiragino Sans"/>
+              </a:rPr>
+              <a:t>あ、いう、え</a:t>
+            </a:r>
+          </a:p>
+        </p:txBody>
+      </p:sp>
+    </p:spTree>
+  </p:cSld>
+  <p:clrMapOvr>
+    <a:masterClrMapping/>
+  </p:clrMapOvr>
+</p:sld>
+</file>
+
+<file path=ppt/slides/slide73.xml><?xml version="1.0" encoding="utf-8"?>
+<p:sld xmlns:a="http://schemas.openxmlformats.org/drawingml/2006/main" xmlns:p="http://schemas.openxmlformats.org/presentationml/2006/main" xmlns:r="http://schemas.openxmlformats.org/officeDocument/2006/relationships">
+  <p:cSld>
+    <p:spTree>
+      <p:nvGrpSpPr>
+        <p:cNvPr id="1" name=""/>
+        <p:cNvGrpSpPr/>
+        <p:nvPr/>
+      </p:nvGrpSpPr>
+      <p:grpSpPr/>
+      <p:sp>
+        <p:nvSpPr>
+          <p:cNvPr id="2" name="TextBox 1"/>
+          <p:cNvSpPr txBox="1"/>
+          <p:nvPr/>
+        </p:nvSpPr>
+        <p:spPr>
+          <a:xfrm>
+            <a:off x="304800" y="190500"/>
+            <a:ext cx="2437130" cy="1397000"/>
+          </a:xfrm>
+          <a:prstGeom prst="rect">
+            <a:avLst/>
+          </a:prstGeom>
+          <a:noFill/>
+        </p:spPr>
+        <p:txBody>
+          <a:bodyPr wrap="square" lIns="0" rIns="0" tIns="0" bIns="0">
+            <a:noAutofit/>
+          </a:bodyPr>
+          <a:lstStyle/>
+          <a:p>
+            <a:pPr hangingPunct="0"/>
+            <a:r>
+              <a:rPr sz="3200" lang="ja-JP">
+                <a:latin typeface="Hiragino Sans"/>
+                <a:ea typeface="Hiragino Sans"/>
+              </a:rPr>
               <a:t>あいうえおか</a:t>
             </a:r>
           </a:p>
@@ -4040,26 +6797,995 @@
 </p:sld>
 </file>
 
-<file path=ppt/slides/slide26.xml><?xml version="1.0" encoding="utf-8"?>
-<p:sld xmlns:a="http://schemas.openxmlformats.org/drawingml/2006/main" xmlns:p="http://schemas.openxmlformats.org/presentationml/2006/main" xmlns:r="http://schemas.openxmlformats.org/officeDocument/2006/relationships">
-  <p:cSld>
-    <p:spTree>
-      <p:nvGrpSpPr>
-        <p:cNvPr id="1" name=""/>
-        <p:cNvGrpSpPr/>
-        <p:nvPr/>
-      </p:nvGrpSpPr>
-      <p:grpSpPr/>
-      <p:sp>
-        <p:nvSpPr>
-          <p:cNvPr id="2" name="TextBox 1"/>
-          <p:cNvSpPr txBox="1"/>
-          <p:nvPr/>
-        </p:nvSpPr>
-        <p:spPr>
-          <a:xfrm>
-            <a:off x="304800" y="190500"/>
-            <a:ext cx="1829435" cy="1397000"/>
+<file path=ppt/slides/slide74.xml><?xml version="1.0" encoding="utf-8"?>
+<p:sld xmlns:a="http://schemas.openxmlformats.org/drawingml/2006/main" xmlns:p="http://schemas.openxmlformats.org/presentationml/2006/main" xmlns:r="http://schemas.openxmlformats.org/officeDocument/2006/relationships">
+  <p:cSld>
+    <p:spTree>
+      <p:nvGrpSpPr>
+        <p:cNvPr id="1" name=""/>
+        <p:cNvGrpSpPr/>
+        <p:nvPr/>
+      </p:nvGrpSpPr>
+      <p:grpSpPr/>
+      <p:sp>
+        <p:nvSpPr>
+          <p:cNvPr id="2" name="TextBox 1"/>
+          <p:cNvSpPr txBox="1"/>
+          <p:nvPr/>
+        </p:nvSpPr>
+        <p:spPr>
+          <a:xfrm>
+            <a:off x="304800" y="190500"/>
+            <a:ext cx="2437765" cy="1397000"/>
+          </a:xfrm>
+          <a:prstGeom prst="rect">
+            <a:avLst/>
+          </a:prstGeom>
+          <a:noFill/>
+        </p:spPr>
+        <p:txBody>
+          <a:bodyPr wrap="square" lIns="0" rIns="0" tIns="0" bIns="0">
+            <a:noAutofit/>
+          </a:bodyPr>
+          <a:lstStyle/>
+          <a:p>
+            <a:pPr hangingPunct="0"/>
+            <a:r>
+              <a:rPr sz="3200" lang="ja-JP">
+                <a:latin typeface="Hiragino Sans"/>
+                <a:ea typeface="Hiragino Sans"/>
+              </a:rPr>
+              <a:t>あいうえおか</a:t>
+            </a:r>
+          </a:p>
+        </p:txBody>
+      </p:sp>
+    </p:spTree>
+  </p:cSld>
+  <p:clrMapOvr>
+    <a:masterClrMapping/>
+  </p:clrMapOvr>
+</p:sld>
+</file>
+
+<file path=ppt/slides/slide75.xml><?xml version="1.0" encoding="utf-8"?>
+<p:sld xmlns:a="http://schemas.openxmlformats.org/drawingml/2006/main" xmlns:p="http://schemas.openxmlformats.org/presentationml/2006/main" xmlns:r="http://schemas.openxmlformats.org/officeDocument/2006/relationships">
+  <p:cSld>
+    <p:spTree>
+      <p:nvGrpSpPr>
+        <p:cNvPr id="1" name=""/>
+        <p:cNvGrpSpPr/>
+        <p:nvPr/>
+      </p:nvGrpSpPr>
+      <p:grpSpPr/>
+      <p:sp>
+        <p:nvSpPr>
+          <p:cNvPr id="2" name="TextBox 1"/>
+          <p:cNvSpPr txBox="1"/>
+          <p:nvPr/>
+        </p:nvSpPr>
+        <p:spPr>
+          <a:xfrm>
+            <a:off x="304800" y="190500"/>
+            <a:ext cx="2438146" cy="1397000"/>
+          </a:xfrm>
+          <a:prstGeom prst="rect">
+            <a:avLst/>
+          </a:prstGeom>
+          <a:noFill/>
+        </p:spPr>
+        <p:txBody>
+          <a:bodyPr wrap="square" lIns="0" rIns="0" tIns="0" bIns="0">
+            <a:noAutofit/>
+          </a:bodyPr>
+          <a:lstStyle/>
+          <a:p>
+            <a:pPr hangingPunct="0"/>
+            <a:r>
+              <a:rPr sz="3200" lang="ja-JP">
+                <a:latin typeface="Hiragino Sans"/>
+                <a:ea typeface="Hiragino Sans"/>
+              </a:rPr>
+              <a:t>あいうえおか</a:t>
+            </a:r>
+          </a:p>
+        </p:txBody>
+      </p:sp>
+    </p:spTree>
+  </p:cSld>
+  <p:clrMapOvr>
+    <a:masterClrMapping/>
+  </p:clrMapOvr>
+</p:sld>
+</file>
+
+<file path=ppt/slides/slide76.xml><?xml version="1.0" encoding="utf-8"?>
+<p:sld xmlns:a="http://schemas.openxmlformats.org/drawingml/2006/main" xmlns:p="http://schemas.openxmlformats.org/presentationml/2006/main" xmlns:r="http://schemas.openxmlformats.org/officeDocument/2006/relationships">
+  <p:cSld>
+    <p:spTree>
+      <p:nvGrpSpPr>
+        <p:cNvPr id="1" name=""/>
+        <p:cNvGrpSpPr/>
+        <p:nvPr/>
+      </p:nvGrpSpPr>
+      <p:grpSpPr/>
+      <p:sp>
+        <p:nvSpPr>
+          <p:cNvPr id="2" name="TextBox 1"/>
+          <p:cNvSpPr txBox="1"/>
+          <p:nvPr/>
+        </p:nvSpPr>
+        <p:spPr>
+          <a:xfrm>
+            <a:off x="304800" y="190500"/>
+            <a:ext cx="2438273" cy="1397000"/>
+          </a:xfrm>
+          <a:prstGeom prst="rect">
+            <a:avLst/>
+          </a:prstGeom>
+          <a:noFill/>
+        </p:spPr>
+        <p:txBody>
+          <a:bodyPr wrap="square" lIns="0" rIns="0" tIns="0" bIns="0">
+            <a:noAutofit/>
+          </a:bodyPr>
+          <a:lstStyle/>
+          <a:p>
+            <a:pPr hangingPunct="0"/>
+            <a:r>
+              <a:rPr sz="3200" lang="ja-JP">
+                <a:latin typeface="Hiragino Sans"/>
+                <a:ea typeface="Hiragino Sans"/>
+              </a:rPr>
+              <a:t>あいうえおか</a:t>
+            </a:r>
+          </a:p>
+        </p:txBody>
+      </p:sp>
+    </p:spTree>
+  </p:cSld>
+  <p:clrMapOvr>
+    <a:masterClrMapping/>
+  </p:clrMapOvr>
+</p:sld>
+</file>
+
+<file path=ppt/slides/slide77.xml><?xml version="1.0" encoding="utf-8"?>
+<p:sld xmlns:a="http://schemas.openxmlformats.org/drawingml/2006/main" xmlns:p="http://schemas.openxmlformats.org/presentationml/2006/main" xmlns:r="http://schemas.openxmlformats.org/officeDocument/2006/relationships">
+  <p:cSld>
+    <p:spTree>
+      <p:nvGrpSpPr>
+        <p:cNvPr id="1" name=""/>
+        <p:cNvGrpSpPr/>
+        <p:nvPr/>
+      </p:nvGrpSpPr>
+      <p:grpSpPr/>
+      <p:sp>
+        <p:nvSpPr>
+          <p:cNvPr id="2" name="TextBox 1"/>
+          <p:cNvSpPr txBox="1"/>
+          <p:nvPr/>
+        </p:nvSpPr>
+        <p:spPr>
+          <a:xfrm>
+            <a:off x="304800" y="190500"/>
+            <a:ext cx="2438400" cy="1397000"/>
+          </a:xfrm>
+          <a:prstGeom prst="rect">
+            <a:avLst/>
+          </a:prstGeom>
+          <a:noFill/>
+        </p:spPr>
+        <p:txBody>
+          <a:bodyPr wrap="square" lIns="0" rIns="0" tIns="0" bIns="0">
+            <a:noAutofit/>
+          </a:bodyPr>
+          <a:lstStyle/>
+          <a:p>
+            <a:pPr hangingPunct="0"/>
+            <a:r>
+              <a:rPr sz="3200" lang="ja-JP">
+                <a:latin typeface="Hiragino Sans"/>
+                <a:ea typeface="Hiragino Sans"/>
+              </a:rPr>
+              <a:t>あいうえおか</a:t>
+            </a:r>
+          </a:p>
+        </p:txBody>
+      </p:sp>
+    </p:spTree>
+  </p:cSld>
+  <p:clrMapOvr>
+    <a:masterClrMapping/>
+  </p:clrMapOvr>
+</p:sld>
+</file>
+
+<file path=ppt/slides/slide78.xml><?xml version="1.0" encoding="utf-8"?>
+<p:sld xmlns:a="http://schemas.openxmlformats.org/drawingml/2006/main" xmlns:p="http://schemas.openxmlformats.org/presentationml/2006/main" xmlns:r="http://schemas.openxmlformats.org/officeDocument/2006/relationships">
+  <p:cSld>
+    <p:spTree>
+      <p:nvGrpSpPr>
+        <p:cNvPr id="1" name=""/>
+        <p:cNvGrpSpPr/>
+        <p:nvPr/>
+      </p:nvGrpSpPr>
+      <p:grpSpPr/>
+      <p:sp>
+        <p:nvSpPr>
+          <p:cNvPr id="2" name="TextBox 1"/>
+          <p:cNvSpPr txBox="1"/>
+          <p:nvPr/>
+        </p:nvSpPr>
+        <p:spPr>
+          <a:xfrm>
+            <a:off x="304800" y="190500"/>
+            <a:ext cx="2438527" cy="1397000"/>
+          </a:xfrm>
+          <a:prstGeom prst="rect">
+            <a:avLst/>
+          </a:prstGeom>
+          <a:noFill/>
+        </p:spPr>
+        <p:txBody>
+          <a:bodyPr wrap="square" lIns="0" rIns="0" tIns="0" bIns="0">
+            <a:noAutofit/>
+          </a:bodyPr>
+          <a:lstStyle/>
+          <a:p>
+            <a:pPr hangingPunct="0"/>
+            <a:r>
+              <a:rPr sz="3200" lang="ja-JP">
+                <a:latin typeface="Hiragino Sans"/>
+                <a:ea typeface="Hiragino Sans"/>
+              </a:rPr>
+              <a:t>あいうえおか</a:t>
+            </a:r>
+          </a:p>
+        </p:txBody>
+      </p:sp>
+    </p:spTree>
+  </p:cSld>
+  <p:clrMapOvr>
+    <a:masterClrMapping/>
+  </p:clrMapOvr>
+</p:sld>
+</file>
+
+<file path=ppt/slides/slide79.xml><?xml version="1.0" encoding="utf-8"?>
+<p:sld xmlns:a="http://schemas.openxmlformats.org/drawingml/2006/main" xmlns:p="http://schemas.openxmlformats.org/presentationml/2006/main" xmlns:r="http://schemas.openxmlformats.org/officeDocument/2006/relationships">
+  <p:cSld>
+    <p:spTree>
+      <p:nvGrpSpPr>
+        <p:cNvPr id="1" name=""/>
+        <p:cNvGrpSpPr/>
+        <p:nvPr/>
+      </p:nvGrpSpPr>
+      <p:grpSpPr/>
+      <p:sp>
+        <p:nvSpPr>
+          <p:cNvPr id="2" name="TextBox 1"/>
+          <p:cNvSpPr txBox="1"/>
+          <p:nvPr/>
+        </p:nvSpPr>
+        <p:spPr>
+          <a:xfrm>
+            <a:off x="304800" y="190500"/>
+            <a:ext cx="2438654" cy="1397000"/>
+          </a:xfrm>
+          <a:prstGeom prst="rect">
+            <a:avLst/>
+          </a:prstGeom>
+          <a:noFill/>
+        </p:spPr>
+        <p:txBody>
+          <a:bodyPr wrap="square" lIns="0" rIns="0" tIns="0" bIns="0">
+            <a:noAutofit/>
+          </a:bodyPr>
+          <a:lstStyle/>
+          <a:p>
+            <a:pPr hangingPunct="0"/>
+            <a:r>
+              <a:rPr sz="3200" lang="ja-JP">
+                <a:latin typeface="Hiragino Sans"/>
+                <a:ea typeface="Hiragino Sans"/>
+              </a:rPr>
+              <a:t>あいうえおか</a:t>
+            </a:r>
+          </a:p>
+        </p:txBody>
+      </p:sp>
+    </p:spTree>
+  </p:cSld>
+  <p:clrMapOvr>
+    <a:masterClrMapping/>
+  </p:clrMapOvr>
+</p:sld>
+</file>
+
+<file path=ppt/slides/slide8.xml><?xml version="1.0" encoding="utf-8"?>
+<p:sld xmlns:a="http://schemas.openxmlformats.org/drawingml/2006/main" xmlns:p="http://schemas.openxmlformats.org/presentationml/2006/main" xmlns:r="http://schemas.openxmlformats.org/officeDocument/2006/relationships">
+  <p:cSld>
+    <p:spTree>
+      <p:nvGrpSpPr>
+        <p:cNvPr id="1" name=""/>
+        <p:cNvGrpSpPr/>
+        <p:nvPr/>
+      </p:nvGrpSpPr>
+      <p:grpSpPr/>
+      <p:sp>
+        <p:nvSpPr>
+          <p:cNvPr id="2" name="TextBox 1"/>
+          <p:cNvSpPr txBox="1"/>
+          <p:nvPr/>
+        </p:nvSpPr>
+        <p:spPr>
+          <a:xfrm>
+            <a:off x="304800" y="190500"/>
+            <a:ext cx="1372235" cy="1397000"/>
+          </a:xfrm>
+          <a:prstGeom prst="rect">
+            <a:avLst/>
+          </a:prstGeom>
+          <a:noFill/>
+        </p:spPr>
+        <p:txBody>
+          <a:bodyPr wrap="square" lIns="0" rIns="0" tIns="0" bIns="0">
+            <a:noAutofit/>
+          </a:bodyPr>
+          <a:lstStyle/>
+          <a:p>
+            <a:pPr hangingPunct="0"/>
+            <a:r>
+              <a:rPr sz="1800" lang="ja-JP">
+                <a:latin typeface="Hiragino Sans"/>
+                <a:ea typeface="Hiragino Sans"/>
+              </a:rPr>
+              <a:t>あいうえおか</a:t>
+            </a:r>
+          </a:p>
+        </p:txBody>
+      </p:sp>
+    </p:spTree>
+  </p:cSld>
+  <p:clrMapOvr>
+    <a:masterClrMapping/>
+  </p:clrMapOvr>
+</p:sld>
+</file>
+
+<file path=ppt/slides/slide80.xml><?xml version="1.0" encoding="utf-8"?>
+<p:sld xmlns:a="http://schemas.openxmlformats.org/drawingml/2006/main" xmlns:p="http://schemas.openxmlformats.org/presentationml/2006/main" xmlns:r="http://schemas.openxmlformats.org/officeDocument/2006/relationships">
+  <p:cSld>
+    <p:spTree>
+      <p:nvGrpSpPr>
+        <p:cNvPr id="1" name=""/>
+        <p:cNvGrpSpPr/>
+        <p:nvPr/>
+      </p:nvGrpSpPr>
+      <p:grpSpPr/>
+      <p:sp>
+        <p:nvSpPr>
+          <p:cNvPr id="2" name="TextBox 1"/>
+          <p:cNvSpPr txBox="1"/>
+          <p:nvPr/>
+        </p:nvSpPr>
+        <p:spPr>
+          <a:xfrm>
+            <a:off x="304800" y="190500"/>
+            <a:ext cx="2439035" cy="1397000"/>
+          </a:xfrm>
+          <a:prstGeom prst="rect">
+            <a:avLst/>
+          </a:prstGeom>
+          <a:noFill/>
+        </p:spPr>
+        <p:txBody>
+          <a:bodyPr wrap="square" lIns="0" rIns="0" tIns="0" bIns="0">
+            <a:noAutofit/>
+          </a:bodyPr>
+          <a:lstStyle/>
+          <a:p>
+            <a:pPr hangingPunct="0"/>
+            <a:r>
+              <a:rPr sz="3200" lang="ja-JP">
+                <a:latin typeface="Hiragino Sans"/>
+                <a:ea typeface="Hiragino Sans"/>
+              </a:rPr>
+              <a:t>あいうえおか</a:t>
+            </a:r>
+          </a:p>
+        </p:txBody>
+      </p:sp>
+    </p:spTree>
+  </p:cSld>
+  <p:clrMapOvr>
+    <a:masterClrMapping/>
+  </p:clrMapOvr>
+</p:sld>
+</file>
+
+<file path=ppt/slides/slide81.xml><?xml version="1.0" encoding="utf-8"?>
+<p:sld xmlns:a="http://schemas.openxmlformats.org/drawingml/2006/main" xmlns:p="http://schemas.openxmlformats.org/presentationml/2006/main" xmlns:r="http://schemas.openxmlformats.org/officeDocument/2006/relationships">
+  <p:cSld>
+    <p:spTree>
+      <p:nvGrpSpPr>
+        <p:cNvPr id="1" name=""/>
+        <p:cNvGrpSpPr/>
+        <p:nvPr/>
+      </p:nvGrpSpPr>
+      <p:grpSpPr/>
+      <p:sp>
+        <p:nvSpPr>
+          <p:cNvPr id="2" name="TextBox 1"/>
+          <p:cNvSpPr txBox="1"/>
+          <p:nvPr/>
+        </p:nvSpPr>
+        <p:spPr>
+          <a:xfrm>
+            <a:off x="304800" y="190500"/>
+            <a:ext cx="2439670" cy="1397000"/>
+          </a:xfrm>
+          <a:prstGeom prst="rect">
+            <a:avLst/>
+          </a:prstGeom>
+          <a:noFill/>
+        </p:spPr>
+        <p:txBody>
+          <a:bodyPr wrap="square" lIns="0" rIns="0" tIns="0" bIns="0">
+            <a:noAutofit/>
+          </a:bodyPr>
+          <a:lstStyle/>
+          <a:p>
+            <a:pPr hangingPunct="0"/>
+            <a:r>
+              <a:rPr sz="3200" lang="ja-JP">
+                <a:latin typeface="Hiragino Sans"/>
+                <a:ea typeface="Hiragino Sans"/>
+              </a:rPr>
+              <a:t>あいうえおか</a:t>
+            </a:r>
+          </a:p>
+        </p:txBody>
+      </p:sp>
+    </p:spTree>
+  </p:cSld>
+  <p:clrMapOvr>
+    <a:masterClrMapping/>
+  </p:clrMapOvr>
+</p:sld>
+</file>
+
+<file path=ppt/slides/slide82.xml><?xml version="1.0" encoding="utf-8"?>
+<p:sld xmlns:a="http://schemas.openxmlformats.org/drawingml/2006/main" xmlns:p="http://schemas.openxmlformats.org/presentationml/2006/main" xmlns:r="http://schemas.openxmlformats.org/officeDocument/2006/relationships">
+  <p:cSld>
+    <p:spTree>
+      <p:nvGrpSpPr>
+        <p:cNvPr id="1" name=""/>
+        <p:cNvGrpSpPr/>
+        <p:nvPr/>
+      </p:nvGrpSpPr>
+      <p:grpSpPr/>
+      <p:sp>
+        <p:nvSpPr>
+          <p:cNvPr id="2" name="TextBox 1"/>
+          <p:cNvSpPr txBox="1"/>
+          <p:nvPr/>
+        </p:nvSpPr>
+        <p:spPr>
+          <a:xfrm>
+            <a:off x="304800" y="190500"/>
+            <a:ext cx="2030730" cy="1397000"/>
+          </a:xfrm>
+          <a:prstGeom prst="rect">
+            <a:avLst/>
+          </a:prstGeom>
+          <a:noFill/>
+        </p:spPr>
+        <p:txBody>
+          <a:bodyPr wrap="square" lIns="0" rIns="0" tIns="0" bIns="0">
+            <a:noAutofit/>
+          </a:bodyPr>
+          <a:lstStyle/>
+          <a:p>
+            <a:pPr hangingPunct="0"/>
+            <a:r>
+              <a:rPr sz="3200" lang="ja-JP">
+                <a:latin typeface="Hiragino Sans"/>
+                <a:ea typeface="Hiragino Sans"/>
+              </a:rPr>
+              <a:t>あ、いう、え</a:t>
+            </a:r>
+          </a:p>
+        </p:txBody>
+      </p:sp>
+    </p:spTree>
+  </p:cSld>
+  <p:clrMapOvr>
+    <a:masterClrMapping/>
+  </p:clrMapOvr>
+</p:sld>
+</file>
+
+<file path=ppt/slides/slide83.xml><?xml version="1.0" encoding="utf-8"?>
+<p:sld xmlns:a="http://schemas.openxmlformats.org/drawingml/2006/main" xmlns:p="http://schemas.openxmlformats.org/presentationml/2006/main" xmlns:r="http://schemas.openxmlformats.org/officeDocument/2006/relationships">
+  <p:cSld>
+    <p:spTree>
+      <p:nvGrpSpPr>
+        <p:cNvPr id="1" name=""/>
+        <p:cNvGrpSpPr/>
+        <p:nvPr/>
+      </p:nvGrpSpPr>
+      <p:grpSpPr/>
+      <p:sp>
+        <p:nvSpPr>
+          <p:cNvPr id="2" name="TextBox 1"/>
+          <p:cNvSpPr txBox="1"/>
+          <p:nvPr/>
+        </p:nvSpPr>
+        <p:spPr>
+          <a:xfrm>
+            <a:off x="304800" y="190500"/>
+            <a:ext cx="2031364" cy="1397000"/>
+          </a:xfrm>
+          <a:prstGeom prst="rect">
+            <a:avLst/>
+          </a:prstGeom>
+          <a:noFill/>
+        </p:spPr>
+        <p:txBody>
+          <a:bodyPr wrap="square" lIns="0" rIns="0" tIns="0" bIns="0">
+            <a:noAutofit/>
+          </a:bodyPr>
+          <a:lstStyle/>
+          <a:p>
+            <a:pPr hangingPunct="0"/>
+            <a:r>
+              <a:rPr sz="3200" lang="ja-JP">
+                <a:latin typeface="Hiragino Sans"/>
+                <a:ea typeface="Hiragino Sans"/>
+              </a:rPr>
+              <a:t>あ、いう、え</a:t>
+            </a:r>
+          </a:p>
+        </p:txBody>
+      </p:sp>
+    </p:spTree>
+  </p:cSld>
+  <p:clrMapOvr>
+    <a:masterClrMapping/>
+  </p:clrMapOvr>
+</p:sld>
+</file>
+
+<file path=ppt/slides/slide84.xml><?xml version="1.0" encoding="utf-8"?>
+<p:sld xmlns:a="http://schemas.openxmlformats.org/drawingml/2006/main" xmlns:p="http://schemas.openxmlformats.org/presentationml/2006/main" xmlns:r="http://schemas.openxmlformats.org/officeDocument/2006/relationships">
+  <p:cSld>
+    <p:spTree>
+      <p:nvGrpSpPr>
+        <p:cNvPr id="1" name=""/>
+        <p:cNvGrpSpPr/>
+        <p:nvPr/>
+      </p:nvGrpSpPr>
+      <p:grpSpPr/>
+      <p:sp>
+        <p:nvSpPr>
+          <p:cNvPr id="2" name="TextBox 1"/>
+          <p:cNvSpPr txBox="1"/>
+          <p:nvPr/>
+        </p:nvSpPr>
+        <p:spPr>
+          <a:xfrm>
+            <a:off x="304800" y="190500"/>
+            <a:ext cx="2031745" cy="1397000"/>
+          </a:xfrm>
+          <a:prstGeom prst="rect">
+            <a:avLst/>
+          </a:prstGeom>
+          <a:noFill/>
+        </p:spPr>
+        <p:txBody>
+          <a:bodyPr wrap="square" lIns="0" rIns="0" tIns="0" bIns="0">
+            <a:noAutofit/>
+          </a:bodyPr>
+          <a:lstStyle/>
+          <a:p>
+            <a:pPr hangingPunct="0"/>
+            <a:r>
+              <a:rPr sz="3200" lang="ja-JP">
+                <a:latin typeface="Hiragino Sans"/>
+                <a:ea typeface="Hiragino Sans"/>
+              </a:rPr>
+              <a:t>あ、いう、え</a:t>
+            </a:r>
+          </a:p>
+        </p:txBody>
+      </p:sp>
+    </p:spTree>
+  </p:cSld>
+  <p:clrMapOvr>
+    <a:masterClrMapping/>
+  </p:clrMapOvr>
+</p:sld>
+</file>
+
+<file path=ppt/slides/slide85.xml><?xml version="1.0" encoding="utf-8"?>
+<p:sld xmlns:a="http://schemas.openxmlformats.org/drawingml/2006/main" xmlns:p="http://schemas.openxmlformats.org/presentationml/2006/main" xmlns:r="http://schemas.openxmlformats.org/officeDocument/2006/relationships">
+  <p:cSld>
+    <p:spTree>
+      <p:nvGrpSpPr>
+        <p:cNvPr id="1" name=""/>
+        <p:cNvGrpSpPr/>
+        <p:nvPr/>
+      </p:nvGrpSpPr>
+      <p:grpSpPr/>
+      <p:sp>
+        <p:nvSpPr>
+          <p:cNvPr id="2" name="TextBox 1"/>
+          <p:cNvSpPr txBox="1"/>
+          <p:nvPr/>
+        </p:nvSpPr>
+        <p:spPr>
+          <a:xfrm>
+            <a:off x="304800" y="190500"/>
+            <a:ext cx="2031873" cy="1397000"/>
+          </a:xfrm>
+          <a:prstGeom prst="rect">
+            <a:avLst/>
+          </a:prstGeom>
+          <a:noFill/>
+        </p:spPr>
+        <p:txBody>
+          <a:bodyPr wrap="square" lIns="0" rIns="0" tIns="0" bIns="0">
+            <a:noAutofit/>
+          </a:bodyPr>
+          <a:lstStyle/>
+          <a:p>
+            <a:pPr hangingPunct="0"/>
+            <a:r>
+              <a:rPr sz="3200" lang="ja-JP">
+                <a:latin typeface="Hiragino Sans"/>
+                <a:ea typeface="Hiragino Sans"/>
+              </a:rPr>
+              <a:t>あ、いう、え</a:t>
+            </a:r>
+          </a:p>
+        </p:txBody>
+      </p:sp>
+    </p:spTree>
+  </p:cSld>
+  <p:clrMapOvr>
+    <a:masterClrMapping/>
+  </p:clrMapOvr>
+</p:sld>
+</file>
+
+<file path=ppt/slides/slide86.xml><?xml version="1.0" encoding="utf-8"?>
+<p:sld xmlns:a="http://schemas.openxmlformats.org/drawingml/2006/main" xmlns:p="http://schemas.openxmlformats.org/presentationml/2006/main" xmlns:r="http://schemas.openxmlformats.org/officeDocument/2006/relationships">
+  <p:cSld>
+    <p:spTree>
+      <p:nvGrpSpPr>
+        <p:cNvPr id="1" name=""/>
+        <p:cNvGrpSpPr/>
+        <p:nvPr/>
+      </p:nvGrpSpPr>
+      <p:grpSpPr/>
+      <p:sp>
+        <p:nvSpPr>
+          <p:cNvPr id="2" name="TextBox 1"/>
+          <p:cNvSpPr txBox="1"/>
+          <p:nvPr/>
+        </p:nvSpPr>
+        <p:spPr>
+          <a:xfrm>
+            <a:off x="304800" y="190500"/>
+            <a:ext cx="2032000" cy="1397000"/>
+          </a:xfrm>
+          <a:prstGeom prst="rect">
+            <a:avLst/>
+          </a:prstGeom>
+          <a:noFill/>
+        </p:spPr>
+        <p:txBody>
+          <a:bodyPr wrap="square" lIns="0" rIns="0" tIns="0" bIns="0">
+            <a:noAutofit/>
+          </a:bodyPr>
+          <a:lstStyle/>
+          <a:p>
+            <a:pPr hangingPunct="0"/>
+            <a:r>
+              <a:rPr sz="3200" lang="ja-JP">
+                <a:latin typeface="Hiragino Sans"/>
+                <a:ea typeface="Hiragino Sans"/>
+              </a:rPr>
+              <a:t>あ、いう、え</a:t>
+            </a:r>
+          </a:p>
+        </p:txBody>
+      </p:sp>
+    </p:spTree>
+  </p:cSld>
+  <p:clrMapOvr>
+    <a:masterClrMapping/>
+  </p:clrMapOvr>
+</p:sld>
+</file>
+
+<file path=ppt/slides/slide87.xml><?xml version="1.0" encoding="utf-8"?>
+<p:sld xmlns:a="http://schemas.openxmlformats.org/drawingml/2006/main" xmlns:p="http://schemas.openxmlformats.org/presentationml/2006/main" xmlns:r="http://schemas.openxmlformats.org/officeDocument/2006/relationships">
+  <p:cSld>
+    <p:spTree>
+      <p:nvGrpSpPr>
+        <p:cNvPr id="1" name=""/>
+        <p:cNvGrpSpPr/>
+        <p:nvPr/>
+      </p:nvGrpSpPr>
+      <p:grpSpPr/>
+      <p:sp>
+        <p:nvSpPr>
+          <p:cNvPr id="2" name="TextBox 1"/>
+          <p:cNvSpPr txBox="1"/>
+          <p:nvPr/>
+        </p:nvSpPr>
+        <p:spPr>
+          <a:xfrm>
+            <a:off x="304800" y="190500"/>
+            <a:ext cx="2032127" cy="1397000"/>
+          </a:xfrm>
+          <a:prstGeom prst="rect">
+            <a:avLst/>
+          </a:prstGeom>
+          <a:noFill/>
+        </p:spPr>
+        <p:txBody>
+          <a:bodyPr wrap="square" lIns="0" rIns="0" tIns="0" bIns="0">
+            <a:noAutofit/>
+          </a:bodyPr>
+          <a:lstStyle/>
+          <a:p>
+            <a:pPr hangingPunct="0"/>
+            <a:r>
+              <a:rPr sz="3200" lang="ja-JP">
+                <a:latin typeface="Hiragino Sans"/>
+                <a:ea typeface="Hiragino Sans"/>
+              </a:rPr>
+              <a:t>あ、いう、え</a:t>
+            </a:r>
+          </a:p>
+        </p:txBody>
+      </p:sp>
+    </p:spTree>
+  </p:cSld>
+  <p:clrMapOvr>
+    <a:masterClrMapping/>
+  </p:clrMapOvr>
+</p:sld>
+</file>
+
+<file path=ppt/slides/slide88.xml><?xml version="1.0" encoding="utf-8"?>
+<p:sld xmlns:a="http://schemas.openxmlformats.org/drawingml/2006/main" xmlns:p="http://schemas.openxmlformats.org/presentationml/2006/main" xmlns:r="http://schemas.openxmlformats.org/officeDocument/2006/relationships">
+  <p:cSld>
+    <p:spTree>
+      <p:nvGrpSpPr>
+        <p:cNvPr id="1" name=""/>
+        <p:cNvGrpSpPr/>
+        <p:nvPr/>
+      </p:nvGrpSpPr>
+      <p:grpSpPr/>
+      <p:sp>
+        <p:nvSpPr>
+          <p:cNvPr id="2" name="TextBox 1"/>
+          <p:cNvSpPr txBox="1"/>
+          <p:nvPr/>
+        </p:nvSpPr>
+        <p:spPr>
+          <a:xfrm>
+            <a:off x="304800" y="190500"/>
+            <a:ext cx="2032254" cy="1397000"/>
+          </a:xfrm>
+          <a:prstGeom prst="rect">
+            <a:avLst/>
+          </a:prstGeom>
+          <a:noFill/>
+        </p:spPr>
+        <p:txBody>
+          <a:bodyPr wrap="square" lIns="0" rIns="0" tIns="0" bIns="0">
+            <a:noAutofit/>
+          </a:bodyPr>
+          <a:lstStyle/>
+          <a:p>
+            <a:pPr hangingPunct="0"/>
+            <a:r>
+              <a:rPr sz="3200" lang="ja-JP">
+                <a:latin typeface="Hiragino Sans"/>
+                <a:ea typeface="Hiragino Sans"/>
+              </a:rPr>
+              <a:t>あ、いう、え</a:t>
+            </a:r>
+          </a:p>
+        </p:txBody>
+      </p:sp>
+    </p:spTree>
+  </p:cSld>
+  <p:clrMapOvr>
+    <a:masterClrMapping/>
+  </p:clrMapOvr>
+</p:sld>
+</file>
+
+<file path=ppt/slides/slide89.xml><?xml version="1.0" encoding="utf-8"?>
+<p:sld xmlns:a="http://schemas.openxmlformats.org/drawingml/2006/main" xmlns:p="http://schemas.openxmlformats.org/presentationml/2006/main" xmlns:r="http://schemas.openxmlformats.org/officeDocument/2006/relationships">
+  <p:cSld>
+    <p:spTree>
+      <p:nvGrpSpPr>
+        <p:cNvPr id="1" name=""/>
+        <p:cNvGrpSpPr/>
+        <p:nvPr/>
+      </p:nvGrpSpPr>
+      <p:grpSpPr/>
+      <p:sp>
+        <p:nvSpPr>
+          <p:cNvPr id="2" name="TextBox 1"/>
+          <p:cNvSpPr txBox="1"/>
+          <p:nvPr/>
+        </p:nvSpPr>
+        <p:spPr>
+          <a:xfrm>
+            <a:off x="304800" y="190500"/>
+            <a:ext cx="2032635" cy="1397000"/>
+          </a:xfrm>
+          <a:prstGeom prst="rect">
+            <a:avLst/>
+          </a:prstGeom>
+          <a:noFill/>
+        </p:spPr>
+        <p:txBody>
+          <a:bodyPr wrap="square" lIns="0" rIns="0" tIns="0" bIns="0">
+            <a:noAutofit/>
+          </a:bodyPr>
+          <a:lstStyle/>
+          <a:p>
+            <a:pPr hangingPunct="0"/>
+            <a:r>
+              <a:rPr sz="3200" lang="ja-JP">
+                <a:latin typeface="Hiragino Sans"/>
+                <a:ea typeface="Hiragino Sans"/>
+              </a:rPr>
+              <a:t>あ、いう、え</a:t>
+            </a:r>
+          </a:p>
+        </p:txBody>
+      </p:sp>
+    </p:spTree>
+  </p:cSld>
+  <p:clrMapOvr>
+    <a:masterClrMapping/>
+  </p:clrMapOvr>
+</p:sld>
+</file>
+
+<file path=ppt/slides/slide9.xml><?xml version="1.0" encoding="utf-8"?>
+<p:sld xmlns:a="http://schemas.openxmlformats.org/drawingml/2006/main" xmlns:p="http://schemas.openxmlformats.org/presentationml/2006/main" xmlns:r="http://schemas.openxmlformats.org/officeDocument/2006/relationships">
+  <p:cSld>
+    <p:spTree>
+      <p:nvGrpSpPr>
+        <p:cNvPr id="1" name=""/>
+        <p:cNvGrpSpPr/>
+        <p:nvPr/>
+      </p:nvGrpSpPr>
+      <p:grpSpPr/>
+      <p:sp>
+        <p:nvSpPr>
+          <p:cNvPr id="2" name="TextBox 1"/>
+          <p:cNvSpPr txBox="1"/>
+          <p:nvPr/>
+        </p:nvSpPr>
+        <p:spPr>
+          <a:xfrm>
+            <a:off x="304800" y="190500"/>
+            <a:ext cx="1372870" cy="1397000"/>
+          </a:xfrm>
+          <a:prstGeom prst="rect">
+            <a:avLst/>
+          </a:prstGeom>
+          <a:noFill/>
+        </p:spPr>
+        <p:txBody>
+          <a:bodyPr wrap="square" lIns="0" rIns="0" tIns="0" bIns="0">
+            <a:noAutofit/>
+          </a:bodyPr>
+          <a:lstStyle/>
+          <a:p>
+            <a:pPr hangingPunct="0"/>
+            <a:r>
+              <a:rPr sz="1800" lang="ja-JP">
+                <a:latin typeface="Hiragino Sans"/>
+                <a:ea typeface="Hiragino Sans"/>
+              </a:rPr>
+              <a:t>あいうえおか</a:t>
+            </a:r>
+          </a:p>
+        </p:txBody>
+      </p:sp>
+    </p:spTree>
+  </p:cSld>
+  <p:clrMapOvr>
+    <a:masterClrMapping/>
+  </p:clrMapOvr>
+</p:sld>
+</file>
+
+<file path=ppt/slides/slide90.xml><?xml version="1.0" encoding="utf-8"?>
+<p:sld xmlns:a="http://schemas.openxmlformats.org/drawingml/2006/main" xmlns:p="http://schemas.openxmlformats.org/presentationml/2006/main" xmlns:r="http://schemas.openxmlformats.org/officeDocument/2006/relationships">
+  <p:cSld>
+    <p:spTree>
+      <p:nvGrpSpPr>
+        <p:cNvPr id="1" name=""/>
+        <p:cNvGrpSpPr/>
+        <p:nvPr/>
+      </p:nvGrpSpPr>
+      <p:grpSpPr/>
+      <p:sp>
+        <p:nvSpPr>
+          <p:cNvPr id="2" name="TextBox 1"/>
+          <p:cNvSpPr txBox="1"/>
+          <p:nvPr/>
+        </p:nvSpPr>
+        <p:spPr>
+          <a:xfrm>
+            <a:off x="304800" y="190500"/>
+            <a:ext cx="2033270" cy="1397000"/>
+          </a:xfrm>
+          <a:prstGeom prst="rect">
+            <a:avLst/>
+          </a:prstGeom>
+          <a:noFill/>
+        </p:spPr>
+        <p:txBody>
+          <a:bodyPr wrap="square" lIns="0" rIns="0" tIns="0" bIns="0">
+            <a:noAutofit/>
+          </a:bodyPr>
+          <a:lstStyle/>
+          <a:p>
+            <a:pPr hangingPunct="0"/>
+            <a:r>
+              <a:rPr sz="3200" lang="ja-JP">
+                <a:latin typeface="Hiragino Sans"/>
+                <a:ea typeface="Hiragino Sans"/>
+              </a:rPr>
+              <a:t>あ、いう、え</a:t>
+            </a:r>
+          </a:p>
+        </p:txBody>
+      </p:sp>
+    </p:spTree>
+  </p:cSld>
+  <p:clrMapOvr>
+    <a:masterClrMapping/>
+  </p:clrMapOvr>
+</p:sld>
+</file>
+
+<file path=ppt/slides/slide91.xml><?xml version="1.0" encoding="utf-8"?>
+<p:sld xmlns:a="http://schemas.openxmlformats.org/drawingml/2006/main" xmlns:p="http://schemas.openxmlformats.org/presentationml/2006/main" xmlns:r="http://schemas.openxmlformats.org/officeDocument/2006/relationships">
+  <p:cSld>
+    <p:spTree>
+      <p:nvGrpSpPr>
+        <p:cNvPr id="1" name=""/>
+        <p:cNvGrpSpPr/>
+        <p:nvPr/>
+      </p:nvGrpSpPr>
+      <p:grpSpPr/>
+      <p:sp>
+        <p:nvSpPr>
+          <p:cNvPr id="2" name="TextBox 1"/>
+          <p:cNvSpPr txBox="1"/>
+          <p:nvPr/>
+        </p:nvSpPr>
+        <p:spPr>
+          <a:xfrm>
+            <a:off x="304800" y="190500"/>
+            <a:ext cx="1522730" cy="1397000"/>
           </a:xfrm>
           <a:prstGeom prst="rect">
             <a:avLst/>
@@ -4091,26 +7817,26 @@
 </p:sld>
 </file>
 
-<file path=ppt/slides/slide27.xml><?xml version="1.0" encoding="utf-8"?>
-<p:sld xmlns:a="http://schemas.openxmlformats.org/drawingml/2006/main" xmlns:p="http://schemas.openxmlformats.org/presentationml/2006/main" xmlns:r="http://schemas.openxmlformats.org/officeDocument/2006/relationships">
-  <p:cSld>
-    <p:spTree>
-      <p:nvGrpSpPr>
-        <p:cNvPr id="1" name=""/>
-        <p:cNvGrpSpPr/>
-        <p:nvPr/>
-      </p:nvGrpSpPr>
-      <p:grpSpPr/>
-      <p:sp>
-        <p:nvSpPr>
-          <p:cNvPr id="2" name="TextBox 1"/>
-          <p:cNvSpPr txBox="1"/>
-          <p:nvPr/>
-        </p:nvSpPr>
-        <p:spPr>
-          <a:xfrm>
-            <a:off x="304800" y="190500"/>
-            <a:ext cx="1830070" cy="1397000"/>
+<file path=ppt/slides/slide92.xml><?xml version="1.0" encoding="utf-8"?>
+<p:sld xmlns:a="http://schemas.openxmlformats.org/drawingml/2006/main" xmlns:p="http://schemas.openxmlformats.org/presentationml/2006/main" xmlns:r="http://schemas.openxmlformats.org/officeDocument/2006/relationships">
+  <p:cSld>
+    <p:spTree>
+      <p:nvGrpSpPr>
+        <p:cNvPr id="1" name=""/>
+        <p:cNvGrpSpPr/>
+        <p:nvPr/>
+      </p:nvGrpSpPr>
+      <p:grpSpPr/>
+      <p:sp>
+        <p:nvSpPr>
+          <p:cNvPr id="2" name="TextBox 1"/>
+          <p:cNvSpPr txBox="1"/>
+          <p:nvPr/>
+        </p:nvSpPr>
+        <p:spPr>
+          <a:xfrm>
+            <a:off x="304800" y="190500"/>
+            <a:ext cx="1523365" cy="1397000"/>
           </a:xfrm>
           <a:prstGeom prst="rect">
             <a:avLst/>
@@ -4142,26 +7868,26 @@
 </p:sld>
 </file>
 
-<file path=ppt/slides/slide28.xml><?xml version="1.0" encoding="utf-8"?>
-<p:sld xmlns:a="http://schemas.openxmlformats.org/drawingml/2006/main" xmlns:p="http://schemas.openxmlformats.org/presentationml/2006/main" xmlns:r="http://schemas.openxmlformats.org/officeDocument/2006/relationships">
-  <p:cSld>
-    <p:spTree>
-      <p:nvGrpSpPr>
-        <p:cNvPr id="1" name=""/>
-        <p:cNvGrpSpPr/>
-        <p:nvPr/>
-      </p:nvGrpSpPr>
-      <p:grpSpPr/>
-      <p:sp>
-        <p:nvSpPr>
-          <p:cNvPr id="2" name="TextBox 1"/>
-          <p:cNvSpPr txBox="1"/>
-          <p:nvPr/>
-        </p:nvSpPr>
-        <p:spPr>
-          <a:xfrm>
-            <a:off x="304800" y="190500"/>
-            <a:ext cx="1522730" cy="1397000"/>
+<file path=ppt/slides/slide93.xml><?xml version="1.0" encoding="utf-8"?>
+<p:sld xmlns:a="http://schemas.openxmlformats.org/drawingml/2006/main" xmlns:p="http://schemas.openxmlformats.org/presentationml/2006/main" xmlns:r="http://schemas.openxmlformats.org/officeDocument/2006/relationships">
+  <p:cSld>
+    <p:spTree>
+      <p:nvGrpSpPr>
+        <p:cNvPr id="1" name=""/>
+        <p:cNvGrpSpPr/>
+        <p:nvPr/>
+      </p:nvGrpSpPr>
+      <p:grpSpPr/>
+      <p:sp>
+        <p:nvSpPr>
+          <p:cNvPr id="2" name="TextBox 1"/>
+          <p:cNvSpPr txBox="1"/>
+          <p:nvPr/>
+        </p:nvSpPr>
+        <p:spPr>
+          <a:xfrm>
+            <a:off x="304800" y="190500"/>
+            <a:ext cx="1523746" cy="1397000"/>
           </a:xfrm>
           <a:prstGeom prst="rect">
             <a:avLst/>
@@ -4180,39 +7906,39 @@
                 <a:latin typeface="Hiragino Sans"/>
                 <a:ea typeface="Hiragino Sans"/>
               </a:rPr>
-              <a:t>あ、いう、え</a:t>
-            </a:r>
-          </a:p>
-        </p:txBody>
-      </p:sp>
-    </p:spTree>
-  </p:cSld>
-  <p:clrMapOvr>
-    <a:masterClrMapping/>
-  </p:clrMapOvr>
-</p:sld>
-</file>
-
-<file path=ppt/slides/slide29.xml><?xml version="1.0" encoding="utf-8"?>
-<p:sld xmlns:a="http://schemas.openxmlformats.org/drawingml/2006/main" xmlns:p="http://schemas.openxmlformats.org/presentationml/2006/main" xmlns:r="http://schemas.openxmlformats.org/officeDocument/2006/relationships">
-  <p:cSld>
-    <p:spTree>
-      <p:nvGrpSpPr>
-        <p:cNvPr id="1" name=""/>
-        <p:cNvGrpSpPr/>
-        <p:nvPr/>
-      </p:nvGrpSpPr>
-      <p:grpSpPr/>
-      <p:sp>
-        <p:nvSpPr>
-          <p:cNvPr id="2" name="TextBox 1"/>
-          <p:cNvSpPr txBox="1"/>
-          <p:nvPr/>
-        </p:nvSpPr>
-        <p:spPr>
-          <a:xfrm>
-            <a:off x="304800" y="190500"/>
-            <a:ext cx="1523365" cy="1397000"/>
+              <a:t>あいうえおか</a:t>
+            </a:r>
+          </a:p>
+        </p:txBody>
+      </p:sp>
+    </p:spTree>
+  </p:cSld>
+  <p:clrMapOvr>
+    <a:masterClrMapping/>
+  </p:clrMapOvr>
+</p:sld>
+</file>
+
+<file path=ppt/slides/slide94.xml><?xml version="1.0" encoding="utf-8"?>
+<p:sld xmlns:a="http://schemas.openxmlformats.org/drawingml/2006/main" xmlns:p="http://schemas.openxmlformats.org/presentationml/2006/main" xmlns:r="http://schemas.openxmlformats.org/officeDocument/2006/relationships">
+  <p:cSld>
+    <p:spTree>
+      <p:nvGrpSpPr>
+        <p:cNvPr id="1" name=""/>
+        <p:cNvGrpSpPr/>
+        <p:nvPr/>
+      </p:nvGrpSpPr>
+      <p:grpSpPr/>
+      <p:sp>
+        <p:nvSpPr>
+          <p:cNvPr id="2" name="TextBox 1"/>
+          <p:cNvSpPr txBox="1"/>
+          <p:nvPr/>
+        </p:nvSpPr>
+        <p:spPr>
+          <a:xfrm>
+            <a:off x="304800" y="190500"/>
+            <a:ext cx="1523873" cy="1397000"/>
           </a:xfrm>
           <a:prstGeom prst="rect">
             <a:avLst/>
@@ -4231,57 +7957,6 @@
                 <a:latin typeface="Hiragino Sans"/>
                 <a:ea typeface="Hiragino Sans"/>
               </a:rPr>
-              <a:t>あ、いう、え</a:t>
-            </a:r>
-          </a:p>
-        </p:txBody>
-      </p:sp>
-    </p:spTree>
-  </p:cSld>
-  <p:clrMapOvr>
-    <a:masterClrMapping/>
-  </p:clrMapOvr>
-</p:sld>
-</file>
-
-<file path=ppt/slides/slide3.xml><?xml version="1.0" encoding="utf-8"?>
-<p:sld xmlns:a="http://schemas.openxmlformats.org/drawingml/2006/main" xmlns:p="http://schemas.openxmlformats.org/presentationml/2006/main" xmlns:r="http://schemas.openxmlformats.org/officeDocument/2006/relationships">
-  <p:cSld>
-    <p:spTree>
-      <p:nvGrpSpPr>
-        <p:cNvPr id="1" name=""/>
-        <p:cNvGrpSpPr/>
-        <p:nvPr/>
-      </p:nvGrpSpPr>
-      <p:grpSpPr/>
-      <p:sp>
-        <p:nvSpPr>
-          <p:cNvPr id="2" name="TextBox 1"/>
-          <p:cNvSpPr txBox="1"/>
-          <p:nvPr/>
-        </p:nvSpPr>
-        <p:spPr>
-          <a:xfrm>
-            <a:off x="304800" y="190500"/>
-            <a:ext cx="1371346" cy="1397000"/>
-          </a:xfrm>
-          <a:prstGeom prst="rect">
-            <a:avLst/>
-          </a:prstGeom>
-          <a:noFill/>
-        </p:spPr>
-        <p:txBody>
-          <a:bodyPr wrap="square" lIns="0" rIns="0" tIns="0" bIns="0">
-            <a:noAutofit/>
-          </a:bodyPr>
-          <a:lstStyle/>
-          <a:p>
-            <a:pPr hangingPunct="0"/>
-            <a:r>
-              <a:rPr sz="1800" lang="ja-JP">
-                <a:latin typeface="Hiragino Sans"/>
-                <a:ea typeface="Hiragino Sans"/>
-              </a:rPr>
               <a:t>あいうえおか</a:t>
             </a:r>
           </a:p>
@@ -4295,26 +7970,26 @@
 </p:sld>
 </file>
 
-<file path=ppt/slides/slide30.xml><?xml version="1.0" encoding="utf-8"?>
-<p:sld xmlns:a="http://schemas.openxmlformats.org/drawingml/2006/main" xmlns:p="http://schemas.openxmlformats.org/presentationml/2006/main" xmlns:r="http://schemas.openxmlformats.org/officeDocument/2006/relationships">
-  <p:cSld>
-    <p:spTree>
-      <p:nvGrpSpPr>
-        <p:cNvPr id="1" name=""/>
-        <p:cNvGrpSpPr/>
-        <p:nvPr/>
-      </p:nvGrpSpPr>
-      <p:grpSpPr/>
-      <p:sp>
-        <p:nvSpPr>
-          <p:cNvPr id="2" name="TextBox 1"/>
-          <p:cNvSpPr txBox="1"/>
-          <p:nvPr/>
-        </p:nvSpPr>
-        <p:spPr>
-          <a:xfrm>
-            <a:off x="304800" y="190500"/>
-            <a:ext cx="1523746" cy="1397000"/>
+<file path=ppt/slides/slide95.xml><?xml version="1.0" encoding="utf-8"?>
+<p:sld xmlns:a="http://schemas.openxmlformats.org/drawingml/2006/main" xmlns:p="http://schemas.openxmlformats.org/presentationml/2006/main" xmlns:r="http://schemas.openxmlformats.org/officeDocument/2006/relationships">
+  <p:cSld>
+    <p:spTree>
+      <p:nvGrpSpPr>
+        <p:cNvPr id="1" name=""/>
+        <p:cNvGrpSpPr/>
+        <p:nvPr/>
+      </p:nvGrpSpPr>
+      <p:grpSpPr/>
+      <p:sp>
+        <p:nvSpPr>
+          <p:cNvPr id="2" name="TextBox 1"/>
+          <p:cNvSpPr txBox="1"/>
+          <p:nvPr/>
+        </p:nvSpPr>
+        <p:spPr>
+          <a:xfrm>
+            <a:off x="304800" y="190500"/>
+            <a:ext cx="1524000" cy="1397000"/>
           </a:xfrm>
           <a:prstGeom prst="rect">
             <a:avLst/>
@@ -4333,39 +8008,39 @@
                 <a:latin typeface="Hiragino Sans"/>
                 <a:ea typeface="Hiragino Sans"/>
               </a:rPr>
-              <a:t>あ、いう、え</a:t>
-            </a:r>
-          </a:p>
-        </p:txBody>
-      </p:sp>
-    </p:spTree>
-  </p:cSld>
-  <p:clrMapOvr>
-    <a:masterClrMapping/>
-  </p:clrMapOvr>
-</p:sld>
-</file>
-
-<file path=ppt/slides/slide31.xml><?xml version="1.0" encoding="utf-8"?>
-<p:sld xmlns:a="http://schemas.openxmlformats.org/drawingml/2006/main" xmlns:p="http://schemas.openxmlformats.org/presentationml/2006/main" xmlns:r="http://schemas.openxmlformats.org/officeDocument/2006/relationships">
-  <p:cSld>
-    <p:spTree>
-      <p:nvGrpSpPr>
-        <p:cNvPr id="1" name=""/>
-        <p:cNvGrpSpPr/>
-        <p:nvPr/>
-      </p:nvGrpSpPr>
-      <p:grpSpPr/>
-      <p:sp>
-        <p:nvSpPr>
-          <p:cNvPr id="2" name="TextBox 1"/>
-          <p:cNvSpPr txBox="1"/>
-          <p:nvPr/>
-        </p:nvSpPr>
-        <p:spPr>
-          <a:xfrm>
-            <a:off x="304800" y="190500"/>
-            <a:ext cx="1523873" cy="1397000"/>
+              <a:t>あいうえおか</a:t>
+            </a:r>
+          </a:p>
+        </p:txBody>
+      </p:sp>
+    </p:spTree>
+  </p:cSld>
+  <p:clrMapOvr>
+    <a:masterClrMapping/>
+  </p:clrMapOvr>
+</p:sld>
+</file>
+
+<file path=ppt/slides/slide96.xml><?xml version="1.0" encoding="utf-8"?>
+<p:sld xmlns:a="http://schemas.openxmlformats.org/drawingml/2006/main" xmlns:p="http://schemas.openxmlformats.org/presentationml/2006/main" xmlns:r="http://schemas.openxmlformats.org/officeDocument/2006/relationships">
+  <p:cSld>
+    <p:spTree>
+      <p:nvGrpSpPr>
+        <p:cNvPr id="1" name=""/>
+        <p:cNvGrpSpPr/>
+        <p:nvPr/>
+      </p:nvGrpSpPr>
+      <p:grpSpPr/>
+      <p:sp>
+        <p:nvSpPr>
+          <p:cNvPr id="2" name="TextBox 1"/>
+          <p:cNvSpPr txBox="1"/>
+          <p:nvPr/>
+        </p:nvSpPr>
+        <p:spPr>
+          <a:xfrm>
+            <a:off x="304800" y="190500"/>
+            <a:ext cx="1524127" cy="1397000"/>
           </a:xfrm>
           <a:prstGeom prst="rect">
             <a:avLst/>
@@ -4384,39 +8059,39 @@
                 <a:latin typeface="Hiragino Sans"/>
                 <a:ea typeface="Hiragino Sans"/>
               </a:rPr>
-              <a:t>あ、いう、え</a:t>
-            </a:r>
-          </a:p>
-        </p:txBody>
-      </p:sp>
-    </p:spTree>
-  </p:cSld>
-  <p:clrMapOvr>
-    <a:masterClrMapping/>
-  </p:clrMapOvr>
-</p:sld>
-</file>
-
-<file path=ppt/slides/slide32.xml><?xml version="1.0" encoding="utf-8"?>
-<p:sld xmlns:a="http://schemas.openxmlformats.org/drawingml/2006/main" xmlns:p="http://schemas.openxmlformats.org/presentationml/2006/main" xmlns:r="http://schemas.openxmlformats.org/officeDocument/2006/relationships">
-  <p:cSld>
-    <p:spTree>
-      <p:nvGrpSpPr>
-        <p:cNvPr id="1" name=""/>
-        <p:cNvGrpSpPr/>
-        <p:nvPr/>
-      </p:nvGrpSpPr>
-      <p:grpSpPr/>
-      <p:sp>
-        <p:nvSpPr>
-          <p:cNvPr id="2" name="TextBox 1"/>
-          <p:cNvSpPr txBox="1"/>
-          <p:nvPr/>
-        </p:nvSpPr>
-        <p:spPr>
-          <a:xfrm>
-            <a:off x="304800" y="190500"/>
-            <a:ext cx="1524000" cy="1397000"/>
+              <a:t>あいうえおか</a:t>
+            </a:r>
+          </a:p>
+        </p:txBody>
+      </p:sp>
+    </p:spTree>
+  </p:cSld>
+  <p:clrMapOvr>
+    <a:masterClrMapping/>
+  </p:clrMapOvr>
+</p:sld>
+</file>
+
+<file path=ppt/slides/slide97.xml><?xml version="1.0" encoding="utf-8"?>
+<p:sld xmlns:a="http://schemas.openxmlformats.org/drawingml/2006/main" xmlns:p="http://schemas.openxmlformats.org/presentationml/2006/main" xmlns:r="http://schemas.openxmlformats.org/officeDocument/2006/relationships">
+  <p:cSld>
+    <p:spTree>
+      <p:nvGrpSpPr>
+        <p:cNvPr id="1" name=""/>
+        <p:cNvGrpSpPr/>
+        <p:nvPr/>
+      </p:nvGrpSpPr>
+      <p:grpSpPr/>
+      <p:sp>
+        <p:nvSpPr>
+          <p:cNvPr id="2" name="TextBox 1"/>
+          <p:cNvSpPr txBox="1"/>
+          <p:nvPr/>
+        </p:nvSpPr>
+        <p:spPr>
+          <a:xfrm>
+            <a:off x="304800" y="190500"/>
+            <a:ext cx="1524254" cy="1397000"/>
           </a:xfrm>
           <a:prstGeom prst="rect">
             <a:avLst/>
@@ -4435,39 +8110,39 @@
                 <a:latin typeface="Hiragino Sans"/>
                 <a:ea typeface="Hiragino Sans"/>
               </a:rPr>
-              <a:t>あ、いう、え</a:t>
-            </a:r>
-          </a:p>
-        </p:txBody>
-      </p:sp>
-    </p:spTree>
-  </p:cSld>
-  <p:clrMapOvr>
-    <a:masterClrMapping/>
-  </p:clrMapOvr>
-</p:sld>
-</file>
-
-<file path=ppt/slides/slide33.xml><?xml version="1.0" encoding="utf-8"?>
-<p:sld xmlns:a="http://schemas.openxmlformats.org/drawingml/2006/main" xmlns:p="http://schemas.openxmlformats.org/presentationml/2006/main" xmlns:r="http://schemas.openxmlformats.org/officeDocument/2006/relationships">
-  <p:cSld>
-    <p:spTree>
-      <p:nvGrpSpPr>
-        <p:cNvPr id="1" name=""/>
-        <p:cNvGrpSpPr/>
-        <p:nvPr/>
-      </p:nvGrpSpPr>
-      <p:grpSpPr/>
-      <p:sp>
-        <p:nvSpPr>
-          <p:cNvPr id="2" name="TextBox 1"/>
-          <p:cNvSpPr txBox="1"/>
-          <p:nvPr/>
-        </p:nvSpPr>
-        <p:spPr>
-          <a:xfrm>
-            <a:off x="304800" y="190500"/>
-            <a:ext cx="1524127" cy="1397000"/>
+              <a:t>あいうえおか</a:t>
+            </a:r>
+          </a:p>
+        </p:txBody>
+      </p:sp>
+    </p:spTree>
+  </p:cSld>
+  <p:clrMapOvr>
+    <a:masterClrMapping/>
+  </p:clrMapOvr>
+</p:sld>
+</file>
+
+<file path=ppt/slides/slide98.xml><?xml version="1.0" encoding="utf-8"?>
+<p:sld xmlns:a="http://schemas.openxmlformats.org/drawingml/2006/main" xmlns:p="http://schemas.openxmlformats.org/presentationml/2006/main" xmlns:r="http://schemas.openxmlformats.org/officeDocument/2006/relationships">
+  <p:cSld>
+    <p:spTree>
+      <p:nvGrpSpPr>
+        <p:cNvPr id="1" name=""/>
+        <p:cNvGrpSpPr/>
+        <p:nvPr/>
+      </p:nvGrpSpPr>
+      <p:grpSpPr/>
+      <p:sp>
+        <p:nvSpPr>
+          <p:cNvPr id="2" name="TextBox 1"/>
+          <p:cNvSpPr txBox="1"/>
+          <p:nvPr/>
+        </p:nvSpPr>
+        <p:spPr>
+          <a:xfrm>
+            <a:off x="304800" y="190500"/>
+            <a:ext cx="1524635" cy="1397000"/>
           </a:xfrm>
           <a:prstGeom prst="rect">
             <a:avLst/>
@@ -4486,39 +8161,39 @@
                 <a:latin typeface="Hiragino Sans"/>
                 <a:ea typeface="Hiragino Sans"/>
               </a:rPr>
-              <a:t>あ、いう、え</a:t>
-            </a:r>
-          </a:p>
-        </p:txBody>
-      </p:sp>
-    </p:spTree>
-  </p:cSld>
-  <p:clrMapOvr>
-    <a:masterClrMapping/>
-  </p:clrMapOvr>
-</p:sld>
-</file>
-
-<file path=ppt/slides/slide34.xml><?xml version="1.0" encoding="utf-8"?>
-<p:sld xmlns:a="http://schemas.openxmlformats.org/drawingml/2006/main" xmlns:p="http://schemas.openxmlformats.org/presentationml/2006/main" xmlns:r="http://schemas.openxmlformats.org/officeDocument/2006/relationships">
-  <p:cSld>
-    <p:spTree>
-      <p:nvGrpSpPr>
-        <p:cNvPr id="1" name=""/>
-        <p:cNvGrpSpPr/>
-        <p:nvPr/>
-      </p:nvGrpSpPr>
-      <p:grpSpPr/>
-      <p:sp>
-        <p:nvSpPr>
-          <p:cNvPr id="2" name="TextBox 1"/>
-          <p:cNvSpPr txBox="1"/>
-          <p:nvPr/>
-        </p:nvSpPr>
-        <p:spPr>
-          <a:xfrm>
-            <a:off x="304800" y="190500"/>
-            <a:ext cx="1524254" cy="1397000"/>
+              <a:t>あいうえおか</a:t>
+            </a:r>
+          </a:p>
+        </p:txBody>
+      </p:sp>
+    </p:spTree>
+  </p:cSld>
+  <p:clrMapOvr>
+    <a:masterClrMapping/>
+  </p:clrMapOvr>
+</p:sld>
+</file>
+
+<file path=ppt/slides/slide99.xml><?xml version="1.0" encoding="utf-8"?>
+<p:sld xmlns:a="http://schemas.openxmlformats.org/drawingml/2006/main" xmlns:p="http://schemas.openxmlformats.org/presentationml/2006/main" xmlns:r="http://schemas.openxmlformats.org/officeDocument/2006/relationships">
+  <p:cSld>
+    <p:spTree>
+      <p:nvGrpSpPr>
+        <p:cNvPr id="1" name=""/>
+        <p:cNvGrpSpPr/>
+        <p:nvPr/>
+      </p:nvGrpSpPr>
+      <p:grpSpPr/>
+      <p:sp>
+        <p:nvSpPr>
+          <p:cNvPr id="2" name="TextBox 1"/>
+          <p:cNvSpPr txBox="1"/>
+          <p:nvPr/>
+        </p:nvSpPr>
+        <p:spPr>
+          <a:xfrm>
+            <a:off x="304800" y="190500"/>
+            <a:ext cx="1525270" cy="1397000"/>
           </a:xfrm>
           <a:prstGeom prst="rect">
             <a:avLst/>
@@ -4534,873 +8209,6 @@
             <a:pPr hangingPunct="0"/>
             <a:r>
               <a:rPr sz="2400" lang="ja-JP">
-                <a:latin typeface="Hiragino Sans"/>
-                <a:ea typeface="Hiragino Sans"/>
-              </a:rPr>
-              <a:t>あ、いう、え</a:t>
-            </a:r>
-          </a:p>
-        </p:txBody>
-      </p:sp>
-    </p:spTree>
-  </p:cSld>
-  <p:clrMapOvr>
-    <a:masterClrMapping/>
-  </p:clrMapOvr>
-</p:sld>
-</file>
-
-<file path=ppt/slides/slide35.xml><?xml version="1.0" encoding="utf-8"?>
-<p:sld xmlns:a="http://schemas.openxmlformats.org/drawingml/2006/main" xmlns:p="http://schemas.openxmlformats.org/presentationml/2006/main" xmlns:r="http://schemas.openxmlformats.org/officeDocument/2006/relationships">
-  <p:cSld>
-    <p:spTree>
-      <p:nvGrpSpPr>
-        <p:cNvPr id="1" name=""/>
-        <p:cNvGrpSpPr/>
-        <p:nvPr/>
-      </p:nvGrpSpPr>
-      <p:grpSpPr/>
-      <p:sp>
-        <p:nvSpPr>
-          <p:cNvPr id="2" name="TextBox 1"/>
-          <p:cNvSpPr txBox="1"/>
-          <p:nvPr/>
-        </p:nvSpPr>
-        <p:spPr>
-          <a:xfrm>
-            <a:off x="304800" y="190500"/>
-            <a:ext cx="1524635" cy="1397000"/>
-          </a:xfrm>
-          <a:prstGeom prst="rect">
-            <a:avLst/>
-          </a:prstGeom>
-          <a:noFill/>
-        </p:spPr>
-        <p:txBody>
-          <a:bodyPr wrap="square" lIns="0" rIns="0" tIns="0" bIns="0">
-            <a:noAutofit/>
-          </a:bodyPr>
-          <a:lstStyle/>
-          <a:p>
-            <a:pPr hangingPunct="0"/>
-            <a:r>
-              <a:rPr sz="2400" lang="ja-JP">
-                <a:latin typeface="Hiragino Sans"/>
-                <a:ea typeface="Hiragino Sans"/>
-              </a:rPr>
-              <a:t>あ、いう、え</a:t>
-            </a:r>
-          </a:p>
-        </p:txBody>
-      </p:sp>
-    </p:spTree>
-  </p:cSld>
-  <p:clrMapOvr>
-    <a:masterClrMapping/>
-  </p:clrMapOvr>
-</p:sld>
-</file>
-
-<file path=ppt/slides/slide36.xml><?xml version="1.0" encoding="utf-8"?>
-<p:sld xmlns:a="http://schemas.openxmlformats.org/drawingml/2006/main" xmlns:p="http://schemas.openxmlformats.org/presentationml/2006/main" xmlns:r="http://schemas.openxmlformats.org/officeDocument/2006/relationships">
-  <p:cSld>
-    <p:spTree>
-      <p:nvGrpSpPr>
-        <p:cNvPr id="1" name=""/>
-        <p:cNvGrpSpPr/>
-        <p:nvPr/>
-      </p:nvGrpSpPr>
-      <p:grpSpPr/>
-      <p:sp>
-        <p:nvSpPr>
-          <p:cNvPr id="2" name="TextBox 1"/>
-          <p:cNvSpPr txBox="1"/>
-          <p:nvPr/>
-        </p:nvSpPr>
-        <p:spPr>
-          <a:xfrm>
-            <a:off x="304800" y="190500"/>
-            <a:ext cx="1525270" cy="1397000"/>
-          </a:xfrm>
-          <a:prstGeom prst="rect">
-            <a:avLst/>
-          </a:prstGeom>
-          <a:noFill/>
-        </p:spPr>
-        <p:txBody>
-          <a:bodyPr wrap="square" lIns="0" rIns="0" tIns="0" bIns="0">
-            <a:noAutofit/>
-          </a:bodyPr>
-          <a:lstStyle/>
-          <a:p>
-            <a:pPr hangingPunct="0"/>
-            <a:r>
-              <a:rPr sz="2400" lang="ja-JP">
-                <a:latin typeface="Hiragino Sans"/>
-                <a:ea typeface="Hiragino Sans"/>
-              </a:rPr>
-              <a:t>あ、いう、え</a:t>
-            </a:r>
-          </a:p>
-        </p:txBody>
-      </p:sp>
-    </p:spTree>
-  </p:cSld>
-  <p:clrMapOvr>
-    <a:masterClrMapping/>
-  </p:clrMapOvr>
-</p:sld>
-</file>
-
-<file path=ppt/slides/slide37.xml><?xml version="1.0" encoding="utf-8"?>
-<p:sld xmlns:a="http://schemas.openxmlformats.org/drawingml/2006/main" xmlns:p="http://schemas.openxmlformats.org/presentationml/2006/main" xmlns:r="http://schemas.openxmlformats.org/officeDocument/2006/relationships">
-  <p:cSld>
-    <p:spTree>
-      <p:nvGrpSpPr>
-        <p:cNvPr id="1" name=""/>
-        <p:cNvGrpSpPr/>
-        <p:nvPr/>
-      </p:nvGrpSpPr>
-      <p:grpSpPr/>
-      <p:sp>
-        <p:nvSpPr>
-          <p:cNvPr id="2" name="TextBox 1"/>
-          <p:cNvSpPr txBox="1"/>
-          <p:nvPr/>
-        </p:nvSpPr>
-        <p:spPr>
-          <a:xfrm>
-            <a:off x="304800" y="190500"/>
-            <a:ext cx="1522730" cy="1397000"/>
-          </a:xfrm>
-          <a:prstGeom prst="rect">
-            <a:avLst/>
-          </a:prstGeom>
-          <a:noFill/>
-        </p:spPr>
-        <p:txBody>
-          <a:bodyPr wrap="square" lIns="0" rIns="0" tIns="0" bIns="0">
-            <a:noAutofit/>
-          </a:bodyPr>
-          <a:lstStyle/>
-          <a:p>
-            <a:pPr hangingPunct="0"/>
-            <a:r>
-              <a:rPr sz="2400" lang="ja-JP">
-                <a:latin typeface="Hiragino Sans"/>
-                <a:ea typeface="Hiragino Sans"/>
-              </a:rPr>
-              <a:t>あいうえおか</a:t>
-            </a:r>
-          </a:p>
-        </p:txBody>
-      </p:sp>
-    </p:spTree>
-  </p:cSld>
-  <p:clrMapOvr>
-    <a:masterClrMapping/>
-  </p:clrMapOvr>
-</p:sld>
-</file>
-
-<file path=ppt/slides/slide38.xml><?xml version="1.0" encoding="utf-8"?>
-<p:sld xmlns:a="http://schemas.openxmlformats.org/drawingml/2006/main" xmlns:p="http://schemas.openxmlformats.org/presentationml/2006/main" xmlns:r="http://schemas.openxmlformats.org/officeDocument/2006/relationships">
-  <p:cSld>
-    <p:spTree>
-      <p:nvGrpSpPr>
-        <p:cNvPr id="1" name=""/>
-        <p:cNvGrpSpPr/>
-        <p:nvPr/>
-      </p:nvGrpSpPr>
-      <p:grpSpPr/>
-      <p:sp>
-        <p:nvSpPr>
-          <p:cNvPr id="2" name="TextBox 1"/>
-          <p:cNvSpPr txBox="1"/>
-          <p:nvPr/>
-        </p:nvSpPr>
-        <p:spPr>
-          <a:xfrm>
-            <a:off x="304800" y="190500"/>
-            <a:ext cx="1523365" cy="1397000"/>
-          </a:xfrm>
-          <a:prstGeom prst="rect">
-            <a:avLst/>
-          </a:prstGeom>
-          <a:noFill/>
-        </p:spPr>
-        <p:txBody>
-          <a:bodyPr wrap="square" lIns="0" rIns="0" tIns="0" bIns="0">
-            <a:noAutofit/>
-          </a:bodyPr>
-          <a:lstStyle/>
-          <a:p>
-            <a:pPr hangingPunct="0"/>
-            <a:r>
-              <a:rPr sz="2400" lang="ja-JP">
-                <a:latin typeface="Hiragino Sans"/>
-                <a:ea typeface="Hiragino Sans"/>
-              </a:rPr>
-              <a:t>あいうえおか</a:t>
-            </a:r>
-          </a:p>
-        </p:txBody>
-      </p:sp>
-    </p:spTree>
-  </p:cSld>
-  <p:clrMapOvr>
-    <a:masterClrMapping/>
-  </p:clrMapOvr>
-</p:sld>
-</file>
-
-<file path=ppt/slides/slide39.xml><?xml version="1.0" encoding="utf-8"?>
-<p:sld xmlns:a="http://schemas.openxmlformats.org/drawingml/2006/main" xmlns:p="http://schemas.openxmlformats.org/presentationml/2006/main" xmlns:r="http://schemas.openxmlformats.org/officeDocument/2006/relationships">
-  <p:cSld>
-    <p:spTree>
-      <p:nvGrpSpPr>
-        <p:cNvPr id="1" name=""/>
-        <p:cNvGrpSpPr/>
-        <p:nvPr/>
-      </p:nvGrpSpPr>
-      <p:grpSpPr/>
-      <p:sp>
-        <p:nvSpPr>
-          <p:cNvPr id="2" name="TextBox 1"/>
-          <p:cNvSpPr txBox="1"/>
-          <p:nvPr/>
-        </p:nvSpPr>
-        <p:spPr>
-          <a:xfrm>
-            <a:off x="304800" y="190500"/>
-            <a:ext cx="1523746" cy="1397000"/>
-          </a:xfrm>
-          <a:prstGeom prst="rect">
-            <a:avLst/>
-          </a:prstGeom>
-          <a:noFill/>
-        </p:spPr>
-        <p:txBody>
-          <a:bodyPr wrap="square" lIns="0" rIns="0" tIns="0" bIns="0">
-            <a:noAutofit/>
-          </a:bodyPr>
-          <a:lstStyle/>
-          <a:p>
-            <a:pPr hangingPunct="0"/>
-            <a:r>
-              <a:rPr sz="2400" lang="ja-JP">
-                <a:latin typeface="Hiragino Sans"/>
-                <a:ea typeface="Hiragino Sans"/>
-              </a:rPr>
-              <a:t>あいうえおか</a:t>
-            </a:r>
-          </a:p>
-        </p:txBody>
-      </p:sp>
-    </p:spTree>
-  </p:cSld>
-  <p:clrMapOvr>
-    <a:masterClrMapping/>
-  </p:clrMapOvr>
-</p:sld>
-</file>
-
-<file path=ppt/slides/slide4.xml><?xml version="1.0" encoding="utf-8"?>
-<p:sld xmlns:a="http://schemas.openxmlformats.org/drawingml/2006/main" xmlns:p="http://schemas.openxmlformats.org/presentationml/2006/main" xmlns:r="http://schemas.openxmlformats.org/officeDocument/2006/relationships">
-  <p:cSld>
-    <p:spTree>
-      <p:nvGrpSpPr>
-        <p:cNvPr id="1" name=""/>
-        <p:cNvGrpSpPr/>
-        <p:nvPr/>
-      </p:nvGrpSpPr>
-      <p:grpSpPr/>
-      <p:sp>
-        <p:nvSpPr>
-          <p:cNvPr id="2" name="TextBox 1"/>
-          <p:cNvSpPr txBox="1"/>
-          <p:nvPr/>
-        </p:nvSpPr>
-        <p:spPr>
-          <a:xfrm>
-            <a:off x="304800" y="190500"/>
-            <a:ext cx="1371473" cy="1397000"/>
-          </a:xfrm>
-          <a:prstGeom prst="rect">
-            <a:avLst/>
-          </a:prstGeom>
-          <a:noFill/>
-        </p:spPr>
-        <p:txBody>
-          <a:bodyPr wrap="square" lIns="0" rIns="0" tIns="0" bIns="0">
-            <a:noAutofit/>
-          </a:bodyPr>
-          <a:lstStyle/>
-          <a:p>
-            <a:pPr hangingPunct="0"/>
-            <a:r>
-              <a:rPr sz="1800" lang="ja-JP">
-                <a:latin typeface="Hiragino Sans"/>
-                <a:ea typeface="Hiragino Sans"/>
-              </a:rPr>
-              <a:t>あいうえおか</a:t>
-            </a:r>
-          </a:p>
-        </p:txBody>
-      </p:sp>
-    </p:spTree>
-  </p:cSld>
-  <p:clrMapOvr>
-    <a:masterClrMapping/>
-  </p:clrMapOvr>
-</p:sld>
-</file>
-
-<file path=ppt/slides/slide40.xml><?xml version="1.0" encoding="utf-8"?>
-<p:sld xmlns:a="http://schemas.openxmlformats.org/drawingml/2006/main" xmlns:p="http://schemas.openxmlformats.org/presentationml/2006/main" xmlns:r="http://schemas.openxmlformats.org/officeDocument/2006/relationships">
-  <p:cSld>
-    <p:spTree>
-      <p:nvGrpSpPr>
-        <p:cNvPr id="1" name=""/>
-        <p:cNvGrpSpPr/>
-        <p:nvPr/>
-      </p:nvGrpSpPr>
-      <p:grpSpPr/>
-      <p:sp>
-        <p:nvSpPr>
-          <p:cNvPr id="2" name="TextBox 1"/>
-          <p:cNvSpPr txBox="1"/>
-          <p:nvPr/>
-        </p:nvSpPr>
-        <p:spPr>
-          <a:xfrm>
-            <a:off x="304800" y="190500"/>
-            <a:ext cx="1523873" cy="1397000"/>
-          </a:xfrm>
-          <a:prstGeom prst="rect">
-            <a:avLst/>
-          </a:prstGeom>
-          <a:noFill/>
-        </p:spPr>
-        <p:txBody>
-          <a:bodyPr wrap="square" lIns="0" rIns="0" tIns="0" bIns="0">
-            <a:noAutofit/>
-          </a:bodyPr>
-          <a:lstStyle/>
-          <a:p>
-            <a:pPr hangingPunct="0"/>
-            <a:r>
-              <a:rPr sz="2400" lang="ja-JP">
-                <a:latin typeface="Hiragino Sans"/>
-                <a:ea typeface="Hiragino Sans"/>
-              </a:rPr>
-              <a:t>あいうえおか</a:t>
-            </a:r>
-          </a:p>
-        </p:txBody>
-      </p:sp>
-    </p:spTree>
-  </p:cSld>
-  <p:clrMapOvr>
-    <a:masterClrMapping/>
-  </p:clrMapOvr>
-</p:sld>
-</file>
-
-<file path=ppt/slides/slide41.xml><?xml version="1.0" encoding="utf-8"?>
-<p:sld xmlns:a="http://schemas.openxmlformats.org/drawingml/2006/main" xmlns:p="http://schemas.openxmlformats.org/presentationml/2006/main" xmlns:r="http://schemas.openxmlformats.org/officeDocument/2006/relationships">
-  <p:cSld>
-    <p:spTree>
-      <p:nvGrpSpPr>
-        <p:cNvPr id="1" name=""/>
-        <p:cNvGrpSpPr/>
-        <p:nvPr/>
-      </p:nvGrpSpPr>
-      <p:grpSpPr/>
-      <p:sp>
-        <p:nvSpPr>
-          <p:cNvPr id="2" name="TextBox 1"/>
-          <p:cNvSpPr txBox="1"/>
-          <p:nvPr/>
-        </p:nvSpPr>
-        <p:spPr>
-          <a:xfrm>
-            <a:off x="304800" y="190500"/>
-            <a:ext cx="1524000" cy="1397000"/>
-          </a:xfrm>
-          <a:prstGeom prst="rect">
-            <a:avLst/>
-          </a:prstGeom>
-          <a:noFill/>
-        </p:spPr>
-        <p:txBody>
-          <a:bodyPr wrap="square" lIns="0" rIns="0" tIns="0" bIns="0">
-            <a:noAutofit/>
-          </a:bodyPr>
-          <a:lstStyle/>
-          <a:p>
-            <a:pPr hangingPunct="0"/>
-            <a:r>
-              <a:rPr sz="2400" lang="ja-JP">
-                <a:latin typeface="Hiragino Sans"/>
-                <a:ea typeface="Hiragino Sans"/>
-              </a:rPr>
-              <a:t>あいうえおか</a:t>
-            </a:r>
-          </a:p>
-        </p:txBody>
-      </p:sp>
-    </p:spTree>
-  </p:cSld>
-  <p:clrMapOvr>
-    <a:masterClrMapping/>
-  </p:clrMapOvr>
-</p:sld>
-</file>
-
-<file path=ppt/slides/slide42.xml><?xml version="1.0" encoding="utf-8"?>
-<p:sld xmlns:a="http://schemas.openxmlformats.org/drawingml/2006/main" xmlns:p="http://schemas.openxmlformats.org/presentationml/2006/main" xmlns:r="http://schemas.openxmlformats.org/officeDocument/2006/relationships">
-  <p:cSld>
-    <p:spTree>
-      <p:nvGrpSpPr>
-        <p:cNvPr id="1" name=""/>
-        <p:cNvGrpSpPr/>
-        <p:nvPr/>
-      </p:nvGrpSpPr>
-      <p:grpSpPr/>
-      <p:sp>
-        <p:nvSpPr>
-          <p:cNvPr id="2" name="TextBox 1"/>
-          <p:cNvSpPr txBox="1"/>
-          <p:nvPr/>
-        </p:nvSpPr>
-        <p:spPr>
-          <a:xfrm>
-            <a:off x="304800" y="190500"/>
-            <a:ext cx="1524127" cy="1397000"/>
-          </a:xfrm>
-          <a:prstGeom prst="rect">
-            <a:avLst/>
-          </a:prstGeom>
-          <a:noFill/>
-        </p:spPr>
-        <p:txBody>
-          <a:bodyPr wrap="square" lIns="0" rIns="0" tIns="0" bIns="0">
-            <a:noAutofit/>
-          </a:bodyPr>
-          <a:lstStyle/>
-          <a:p>
-            <a:pPr hangingPunct="0"/>
-            <a:r>
-              <a:rPr sz="2400" lang="ja-JP">
-                <a:latin typeface="Hiragino Sans"/>
-                <a:ea typeface="Hiragino Sans"/>
-              </a:rPr>
-              <a:t>あいうえおか</a:t>
-            </a:r>
-          </a:p>
-        </p:txBody>
-      </p:sp>
-    </p:spTree>
-  </p:cSld>
-  <p:clrMapOvr>
-    <a:masterClrMapping/>
-  </p:clrMapOvr>
-</p:sld>
-</file>
-
-<file path=ppt/slides/slide43.xml><?xml version="1.0" encoding="utf-8"?>
-<p:sld xmlns:a="http://schemas.openxmlformats.org/drawingml/2006/main" xmlns:p="http://schemas.openxmlformats.org/presentationml/2006/main" xmlns:r="http://schemas.openxmlformats.org/officeDocument/2006/relationships">
-  <p:cSld>
-    <p:spTree>
-      <p:nvGrpSpPr>
-        <p:cNvPr id="1" name=""/>
-        <p:cNvGrpSpPr/>
-        <p:nvPr/>
-      </p:nvGrpSpPr>
-      <p:grpSpPr/>
-      <p:sp>
-        <p:nvSpPr>
-          <p:cNvPr id="2" name="TextBox 1"/>
-          <p:cNvSpPr txBox="1"/>
-          <p:nvPr/>
-        </p:nvSpPr>
-        <p:spPr>
-          <a:xfrm>
-            <a:off x="304800" y="190500"/>
-            <a:ext cx="1524254" cy="1397000"/>
-          </a:xfrm>
-          <a:prstGeom prst="rect">
-            <a:avLst/>
-          </a:prstGeom>
-          <a:noFill/>
-        </p:spPr>
-        <p:txBody>
-          <a:bodyPr wrap="square" lIns="0" rIns="0" tIns="0" bIns="0">
-            <a:noAutofit/>
-          </a:bodyPr>
-          <a:lstStyle/>
-          <a:p>
-            <a:pPr hangingPunct="0"/>
-            <a:r>
-              <a:rPr sz="2400" lang="ja-JP">
-                <a:latin typeface="Hiragino Sans"/>
-                <a:ea typeface="Hiragino Sans"/>
-              </a:rPr>
-              <a:t>あいうえおか</a:t>
-            </a:r>
-          </a:p>
-        </p:txBody>
-      </p:sp>
-    </p:spTree>
-  </p:cSld>
-  <p:clrMapOvr>
-    <a:masterClrMapping/>
-  </p:clrMapOvr>
-</p:sld>
-</file>
-
-<file path=ppt/slides/slide44.xml><?xml version="1.0" encoding="utf-8"?>
-<p:sld xmlns:a="http://schemas.openxmlformats.org/drawingml/2006/main" xmlns:p="http://schemas.openxmlformats.org/presentationml/2006/main" xmlns:r="http://schemas.openxmlformats.org/officeDocument/2006/relationships">
-  <p:cSld>
-    <p:spTree>
-      <p:nvGrpSpPr>
-        <p:cNvPr id="1" name=""/>
-        <p:cNvGrpSpPr/>
-        <p:nvPr/>
-      </p:nvGrpSpPr>
-      <p:grpSpPr/>
-      <p:sp>
-        <p:nvSpPr>
-          <p:cNvPr id="2" name="TextBox 1"/>
-          <p:cNvSpPr txBox="1"/>
-          <p:nvPr/>
-        </p:nvSpPr>
-        <p:spPr>
-          <a:xfrm>
-            <a:off x="304800" y="190500"/>
-            <a:ext cx="1524635" cy="1397000"/>
-          </a:xfrm>
-          <a:prstGeom prst="rect">
-            <a:avLst/>
-          </a:prstGeom>
-          <a:noFill/>
-        </p:spPr>
-        <p:txBody>
-          <a:bodyPr wrap="square" lIns="0" rIns="0" tIns="0" bIns="0">
-            <a:noAutofit/>
-          </a:bodyPr>
-          <a:lstStyle/>
-          <a:p>
-            <a:pPr hangingPunct="0"/>
-            <a:r>
-              <a:rPr sz="2400" lang="ja-JP">
-                <a:latin typeface="Hiragino Sans"/>
-                <a:ea typeface="Hiragino Sans"/>
-              </a:rPr>
-              <a:t>あいうえおか</a:t>
-            </a:r>
-          </a:p>
-        </p:txBody>
-      </p:sp>
-    </p:spTree>
-  </p:cSld>
-  <p:clrMapOvr>
-    <a:masterClrMapping/>
-  </p:clrMapOvr>
-</p:sld>
-</file>
-
-<file path=ppt/slides/slide45.xml><?xml version="1.0" encoding="utf-8"?>
-<p:sld xmlns:a="http://schemas.openxmlformats.org/drawingml/2006/main" xmlns:p="http://schemas.openxmlformats.org/presentationml/2006/main" xmlns:r="http://schemas.openxmlformats.org/officeDocument/2006/relationships">
-  <p:cSld>
-    <p:spTree>
-      <p:nvGrpSpPr>
-        <p:cNvPr id="1" name=""/>
-        <p:cNvGrpSpPr/>
-        <p:nvPr/>
-      </p:nvGrpSpPr>
-      <p:grpSpPr/>
-      <p:sp>
-        <p:nvSpPr>
-          <p:cNvPr id="2" name="TextBox 1"/>
-          <p:cNvSpPr txBox="1"/>
-          <p:nvPr/>
-        </p:nvSpPr>
-        <p:spPr>
-          <a:xfrm>
-            <a:off x="304800" y="190500"/>
-            <a:ext cx="1525270" cy="1397000"/>
-          </a:xfrm>
-          <a:prstGeom prst="rect">
-            <a:avLst/>
-          </a:prstGeom>
-          <a:noFill/>
-        </p:spPr>
-        <p:txBody>
-          <a:bodyPr wrap="square" lIns="0" rIns="0" tIns="0" bIns="0">
-            <a:noAutofit/>
-          </a:bodyPr>
-          <a:lstStyle/>
-          <a:p>
-            <a:pPr hangingPunct="0"/>
-            <a:r>
-              <a:rPr sz="2400" lang="ja-JP">
-                <a:latin typeface="Hiragino Sans"/>
-                <a:ea typeface="Hiragino Sans"/>
-              </a:rPr>
-              <a:t>あいうえおか</a:t>
-            </a:r>
-          </a:p>
-        </p:txBody>
-      </p:sp>
-    </p:spTree>
-  </p:cSld>
-  <p:clrMapOvr>
-    <a:masterClrMapping/>
-  </p:clrMapOvr>
-</p:sld>
-</file>
-
-<file path=ppt/slides/slide5.xml><?xml version="1.0" encoding="utf-8"?>
-<p:sld xmlns:a="http://schemas.openxmlformats.org/drawingml/2006/main" xmlns:p="http://schemas.openxmlformats.org/presentationml/2006/main" xmlns:r="http://schemas.openxmlformats.org/officeDocument/2006/relationships">
-  <p:cSld>
-    <p:spTree>
-      <p:nvGrpSpPr>
-        <p:cNvPr id="1" name=""/>
-        <p:cNvGrpSpPr/>
-        <p:nvPr/>
-      </p:nvGrpSpPr>
-      <p:grpSpPr/>
-      <p:sp>
-        <p:nvSpPr>
-          <p:cNvPr id="2" name="TextBox 1"/>
-          <p:cNvSpPr txBox="1"/>
-          <p:nvPr/>
-        </p:nvSpPr>
-        <p:spPr>
-          <a:xfrm>
-            <a:off x="304800" y="190500"/>
-            <a:ext cx="1371600" cy="1397000"/>
-          </a:xfrm>
-          <a:prstGeom prst="rect">
-            <a:avLst/>
-          </a:prstGeom>
-          <a:noFill/>
-        </p:spPr>
-        <p:txBody>
-          <a:bodyPr wrap="square" lIns="0" rIns="0" tIns="0" bIns="0">
-            <a:noAutofit/>
-          </a:bodyPr>
-          <a:lstStyle/>
-          <a:p>
-            <a:pPr hangingPunct="0"/>
-            <a:r>
-              <a:rPr sz="1800" lang="ja-JP">
-                <a:latin typeface="Hiragino Sans"/>
-                <a:ea typeface="Hiragino Sans"/>
-              </a:rPr>
-              <a:t>あいうえおか</a:t>
-            </a:r>
-          </a:p>
-        </p:txBody>
-      </p:sp>
-    </p:spTree>
-  </p:cSld>
-  <p:clrMapOvr>
-    <a:masterClrMapping/>
-  </p:clrMapOvr>
-</p:sld>
-</file>
-
-<file path=ppt/slides/slide6.xml><?xml version="1.0" encoding="utf-8"?>
-<p:sld xmlns:a="http://schemas.openxmlformats.org/drawingml/2006/main" xmlns:p="http://schemas.openxmlformats.org/presentationml/2006/main" xmlns:r="http://schemas.openxmlformats.org/officeDocument/2006/relationships">
-  <p:cSld>
-    <p:spTree>
-      <p:nvGrpSpPr>
-        <p:cNvPr id="1" name=""/>
-        <p:cNvGrpSpPr/>
-        <p:nvPr/>
-      </p:nvGrpSpPr>
-      <p:grpSpPr/>
-      <p:sp>
-        <p:nvSpPr>
-          <p:cNvPr id="2" name="TextBox 1"/>
-          <p:cNvSpPr txBox="1"/>
-          <p:nvPr/>
-        </p:nvSpPr>
-        <p:spPr>
-          <a:xfrm>
-            <a:off x="304800" y="190500"/>
-            <a:ext cx="1371727" cy="1397000"/>
-          </a:xfrm>
-          <a:prstGeom prst="rect">
-            <a:avLst/>
-          </a:prstGeom>
-          <a:noFill/>
-        </p:spPr>
-        <p:txBody>
-          <a:bodyPr wrap="square" lIns="0" rIns="0" tIns="0" bIns="0">
-            <a:noAutofit/>
-          </a:bodyPr>
-          <a:lstStyle/>
-          <a:p>
-            <a:pPr hangingPunct="0"/>
-            <a:r>
-              <a:rPr sz="1800" lang="ja-JP">
-                <a:latin typeface="Hiragino Sans"/>
-                <a:ea typeface="Hiragino Sans"/>
-              </a:rPr>
-              <a:t>あいうえおか</a:t>
-            </a:r>
-          </a:p>
-        </p:txBody>
-      </p:sp>
-    </p:spTree>
-  </p:cSld>
-  <p:clrMapOvr>
-    <a:masterClrMapping/>
-  </p:clrMapOvr>
-</p:sld>
-</file>
-
-<file path=ppt/slides/slide7.xml><?xml version="1.0" encoding="utf-8"?>
-<p:sld xmlns:a="http://schemas.openxmlformats.org/drawingml/2006/main" xmlns:p="http://schemas.openxmlformats.org/presentationml/2006/main" xmlns:r="http://schemas.openxmlformats.org/officeDocument/2006/relationships">
-  <p:cSld>
-    <p:spTree>
-      <p:nvGrpSpPr>
-        <p:cNvPr id="1" name=""/>
-        <p:cNvGrpSpPr/>
-        <p:nvPr/>
-      </p:nvGrpSpPr>
-      <p:grpSpPr/>
-      <p:sp>
-        <p:nvSpPr>
-          <p:cNvPr id="2" name="TextBox 1"/>
-          <p:cNvSpPr txBox="1"/>
-          <p:nvPr/>
-        </p:nvSpPr>
-        <p:spPr>
-          <a:xfrm>
-            <a:off x="304800" y="190500"/>
-            <a:ext cx="1371854" cy="1397000"/>
-          </a:xfrm>
-          <a:prstGeom prst="rect">
-            <a:avLst/>
-          </a:prstGeom>
-          <a:noFill/>
-        </p:spPr>
-        <p:txBody>
-          <a:bodyPr wrap="square" lIns="0" rIns="0" tIns="0" bIns="0">
-            <a:noAutofit/>
-          </a:bodyPr>
-          <a:lstStyle/>
-          <a:p>
-            <a:pPr hangingPunct="0"/>
-            <a:r>
-              <a:rPr sz="1800" lang="ja-JP">
-                <a:latin typeface="Hiragino Sans"/>
-                <a:ea typeface="Hiragino Sans"/>
-              </a:rPr>
-              <a:t>あいうえおか</a:t>
-            </a:r>
-          </a:p>
-        </p:txBody>
-      </p:sp>
-    </p:spTree>
-  </p:cSld>
-  <p:clrMapOvr>
-    <a:masterClrMapping/>
-  </p:clrMapOvr>
-</p:sld>
-</file>
-
-<file path=ppt/slides/slide8.xml><?xml version="1.0" encoding="utf-8"?>
-<p:sld xmlns:a="http://schemas.openxmlformats.org/drawingml/2006/main" xmlns:p="http://schemas.openxmlformats.org/presentationml/2006/main" xmlns:r="http://schemas.openxmlformats.org/officeDocument/2006/relationships">
-  <p:cSld>
-    <p:spTree>
-      <p:nvGrpSpPr>
-        <p:cNvPr id="1" name=""/>
-        <p:cNvGrpSpPr/>
-        <p:nvPr/>
-      </p:nvGrpSpPr>
-      <p:grpSpPr/>
-      <p:sp>
-        <p:nvSpPr>
-          <p:cNvPr id="2" name="TextBox 1"/>
-          <p:cNvSpPr txBox="1"/>
-          <p:nvPr/>
-        </p:nvSpPr>
-        <p:spPr>
-          <a:xfrm>
-            <a:off x="304800" y="190500"/>
-            <a:ext cx="1372235" cy="1397000"/>
-          </a:xfrm>
-          <a:prstGeom prst="rect">
-            <a:avLst/>
-          </a:prstGeom>
-          <a:noFill/>
-        </p:spPr>
-        <p:txBody>
-          <a:bodyPr wrap="square" lIns="0" rIns="0" tIns="0" bIns="0">
-            <a:noAutofit/>
-          </a:bodyPr>
-          <a:lstStyle/>
-          <a:p>
-            <a:pPr hangingPunct="0"/>
-            <a:r>
-              <a:rPr sz="1800" lang="ja-JP">
-                <a:latin typeface="Hiragino Sans"/>
-                <a:ea typeface="Hiragino Sans"/>
-              </a:rPr>
-              <a:t>あいうえおか</a:t>
-            </a:r>
-          </a:p>
-        </p:txBody>
-      </p:sp>
-    </p:spTree>
-  </p:cSld>
-  <p:clrMapOvr>
-    <a:masterClrMapping/>
-  </p:clrMapOvr>
-</p:sld>
-</file>
-
-<file path=ppt/slides/slide9.xml><?xml version="1.0" encoding="utf-8"?>
-<p:sld xmlns:a="http://schemas.openxmlformats.org/drawingml/2006/main" xmlns:p="http://schemas.openxmlformats.org/presentationml/2006/main" xmlns:r="http://schemas.openxmlformats.org/officeDocument/2006/relationships">
-  <p:cSld>
-    <p:spTree>
-      <p:nvGrpSpPr>
-        <p:cNvPr id="1" name=""/>
-        <p:cNvGrpSpPr/>
-        <p:nvPr/>
-      </p:nvGrpSpPr>
-      <p:grpSpPr/>
-      <p:sp>
-        <p:nvSpPr>
-          <p:cNvPr id="2" name="TextBox 1"/>
-          <p:cNvSpPr txBox="1"/>
-          <p:nvPr/>
-        </p:nvSpPr>
-        <p:spPr>
-          <a:xfrm>
-            <a:off x="304800" y="190500"/>
-            <a:ext cx="1372870" cy="1397000"/>
-          </a:xfrm>
-          <a:prstGeom prst="rect">
-            <a:avLst/>
-          </a:prstGeom>
-          <a:noFill/>
-        </p:spPr>
-        <p:txBody>
-          <a:bodyPr wrap="square" lIns="0" rIns="0" tIns="0" bIns="0">
-            <a:noAutofit/>
-          </a:bodyPr>
-          <a:lstStyle/>
-          <a:p>
-            <a:pPr hangingPunct="0"/>
-            <a:r>
-              <a:rPr sz="1800" lang="ja-JP">
                 <a:latin typeface="Hiragino Sans"/>
                 <a:ea typeface="Hiragino Sans"/>
               </a:rPr>
